--- a/PMK_Equipo_Septiembre2026.pptx
+++ b/PMK_Equipo_Septiembre2026.pptx
@@ -6,6 +6,12 @@
   </p:sldMasterIdLst>
   <p:sldIdLst>
     <p:sldId id="264" r:id="rId15"/>
+    <p:sldId id="265" r:id="rId16"/>
+    <p:sldId id="266" r:id="rId17"/>
+    <p:sldId id="267" r:id="rId18"/>
+    <p:sldId id="268" r:id="rId19"/>
+    <p:sldId id="269" r:id="rId20"/>
+    <p:sldId id="270" r:id="rId21"/>
   </p:sldIdLst>
   <p:notesMasterIdLst>
     <p:notesMasterId r:id="rId9"/>
@@ -130,20 +136,927 @@
               </c:strCache>
             </c:strRef>
           </c:tx>
-          <c:spPr>
+          <c:dPt>
+            <c:idx val="0"/>
+            <c:spPr>
+              <a:solidFill>
+                <a:srgbClr val="1B7F4A"/>
+              </a:solidFill>
+            </c:spPr>
+          </c:dPt>
+          <c:dPt>
+            <c:idx val="1"/>
+            <c:spPr>
+              <a:solidFill>
+                <a:srgbClr val="ED6C23"/>
+              </a:solidFill>
+            </c:spPr>
+          </c:dPt>
+          <c:dPt>
+            <c:idx val="2"/>
+            <c:spPr>
+              <a:solidFill>
+                <a:srgbClr val="C0392B"/>
+              </a:solidFill>
+            </c:spPr>
+          </c:dPt>
+          <c:dPt>
+            <c:idx val="3"/>
+            <c:spPr>
+              <a:solidFill>
+                <a:srgbClr val="C0392B"/>
+              </a:solidFill>
+            </c:spPr>
+          </c:dPt>
+          <c:dPt>
+            <c:idx val="4"/>
+            <c:spPr>
+              <a:noFill/>
+              <a:ln w="19050">
+                <a:solidFill>
+                  <a:srgbClr val="ED6C23"/>
+                </a:solidFill>
+              </a:ln>
+            </c:spPr>
+          </c:dPt>
+          <c:dPt>
+            <c:idx val="5"/>
+            <c:spPr>
+              <a:noFill/>
+              <a:ln w="19050">
+                <a:solidFill>
+                  <a:srgbClr val="ED6C23"/>
+                </a:solidFill>
+              </a:ln>
+            </c:spPr>
+          </c:dPt>
+          <c:dPt>
+            <c:idx val="6"/>
+            <c:spPr>
+              <a:noFill/>
+              <a:ln w="19050">
+                <a:solidFill>
+                  <a:srgbClr val="ED6C23"/>
+                </a:solidFill>
+              </a:ln>
+            </c:spPr>
+          </c:dPt>
+          <c:dPt>
+            <c:idx val="7"/>
+            <c:spPr>
+              <a:noFill/>
+              <a:ln w="19050">
+                <a:solidFill>
+                  <a:srgbClr val="ED6C23"/>
+                </a:solidFill>
+              </a:ln>
+            </c:spPr>
+          </c:dPt>
+          <c:dLbls>
+            <c:dLbl>
+              <c:idx val="0"/>
+              <c:spPr/>
+              <c:txPr>
+                <a:bodyPr/>
+                <a:lstStyle/>
+                <a:p>
+                  <a:pPr>
+                    <a:defRPr sz="1000" b="1">
+                      <a:solidFill>
+                        <a:srgbClr val="27AE60"/>
+                      </a:solidFill>
+                    </a:defRPr>
+                  </a:pPr>
+                </a:p>
+              </c:txPr>
+              <c:dLblPos val="outEnd"/>
+              <c:showLegendKey val="0"/>
+              <c:showVal val="1"/>
+              <c:showCatName val="0"/>
+              <c:showSerName val="0"/>
+              <c:showPercent val="0"/>
+              <c:showBubbleSize val="0"/>
+            </c:dLbl>
+            <c:dLbl>
+              <c:idx val="1"/>
+              <c:spPr/>
+              <c:txPr>
+                <a:bodyPr/>
+                <a:lstStyle/>
+                <a:p>
+                  <a:pPr>
+                    <a:defRPr sz="1000" b="1">
+                      <a:solidFill>
+                        <a:srgbClr val="ED6C23"/>
+                      </a:solidFill>
+                    </a:defRPr>
+                  </a:pPr>
+                </a:p>
+              </c:txPr>
+              <c:dLblPos val="outEnd"/>
+              <c:showLegendKey val="0"/>
+              <c:showVal val="1"/>
+              <c:showCatName val="0"/>
+              <c:showSerName val="0"/>
+              <c:showPercent val="0"/>
+              <c:showBubbleSize val="0"/>
+            </c:dLbl>
+            <c:dLbl>
+              <c:idx val="2"/>
+              <c:spPr/>
+              <c:txPr>
+                <a:bodyPr/>
+                <a:lstStyle/>
+                <a:p>
+                  <a:pPr>
+                    <a:defRPr sz="1000" b="1">
+                      <a:solidFill>
+                        <a:srgbClr val="E74C3C"/>
+                      </a:solidFill>
+                    </a:defRPr>
+                  </a:pPr>
+                </a:p>
+              </c:txPr>
+              <c:dLblPos val="outEnd"/>
+              <c:showLegendKey val="0"/>
+              <c:showVal val="1"/>
+              <c:showCatName val="0"/>
+              <c:showSerName val="0"/>
+              <c:showPercent val="0"/>
+              <c:showBubbleSize val="0"/>
+            </c:dLbl>
+            <c:dLbl>
+              <c:idx val="3"/>
+              <c:spPr/>
+              <c:txPr>
+                <a:bodyPr/>
+                <a:lstStyle/>
+                <a:p>
+                  <a:pPr>
+                    <a:defRPr sz="1000" b="1">
+                      <a:solidFill>
+                        <a:srgbClr val="E74C3C"/>
+                      </a:solidFill>
+                    </a:defRPr>
+                  </a:pPr>
+                </a:p>
+              </c:txPr>
+              <c:dLblPos val="outEnd"/>
+              <c:showLegendKey val="0"/>
+              <c:showVal val="1"/>
+              <c:showCatName val="0"/>
+              <c:showSerName val="0"/>
+              <c:showPercent val="0"/>
+              <c:showBubbleSize val="0"/>
+            </c:dLbl>
+            <c:dLbl>
+              <c:idx val="4"/>
+              <c:tx>
+                <c:rich>
+                  <a:bodyPr/>
+                  <a:lstStyle/>
+                  <a:p>
+                    <a:r>
+                      <a:rPr sz="1000" b="1">
+                        <a:solidFill>
+                          <a:srgbClr val="ED6C23"/>
+                        </a:solidFill>
+                      </a:rPr>
+                      <a:t>≤11%</a:t>
+                    </a:r>
+                  </a:p>
+                </c:rich>
+              </c:tx>
+              <c:dLblPos val="outEnd"/>
+              <c:showLegendKey val="0"/>
+              <c:showVal val="1"/>
+              <c:showCatName val="0"/>
+              <c:showSerName val="0"/>
+              <c:showPercent val="0"/>
+              <c:showBubbleSize val="0"/>
+            </c:dLbl>
+            <c:dLbl>
+              <c:idx val="5"/>
+              <c:tx>
+                <c:rich>
+                  <a:bodyPr/>
+                  <a:lstStyle/>
+                  <a:p>
+                    <a:r>
+                      <a:rPr sz="1000" b="1">
+                        <a:solidFill>
+                          <a:srgbClr val="ED6C23"/>
+                        </a:solidFill>
+                      </a:rPr>
+                      <a:t>≤8%</a:t>
+                    </a:r>
+                  </a:p>
+                </c:rich>
+              </c:tx>
+              <c:dLblPos val="outEnd"/>
+              <c:showLegendKey val="0"/>
+              <c:showVal val="1"/>
+              <c:showCatName val="0"/>
+              <c:showSerName val="0"/>
+              <c:showPercent val="0"/>
+              <c:showBubbleSize val="0"/>
+            </c:dLbl>
+            <c:dLbl>
+              <c:idx val="6"/>
+              <c:tx>
+                <c:rich>
+                  <a:bodyPr/>
+                  <a:lstStyle/>
+                  <a:p>
+                    <a:r>
+                      <a:rPr sz="1000" b="1">
+                        <a:solidFill>
+                          <a:srgbClr val="ED6C23"/>
+                        </a:solidFill>
+                      </a:rPr>
+                      <a:t>≤6%</a:t>
+                    </a:r>
+                  </a:p>
+                </c:rich>
+              </c:tx>
+              <c:dLblPos val="outEnd"/>
+              <c:showLegendKey val="0"/>
+              <c:showVal val="1"/>
+              <c:showCatName val="0"/>
+              <c:showSerName val="0"/>
+              <c:showPercent val="0"/>
+              <c:showBubbleSize val="0"/>
+            </c:dLbl>
+            <c:dLbl>
+              <c:idx val="7"/>
+              <c:tx>
+                <c:rich>
+                  <a:bodyPr/>
+                  <a:lstStyle/>
+                  <a:p>
+                    <a:r>
+                      <a:rPr sz="1000" b="1">
+                        <a:solidFill>
+                          <a:srgbClr val="ED6C23"/>
+                        </a:solidFill>
+                      </a:rPr>
+                      <a:t>≤5%</a:t>
+                    </a:r>
+                  </a:p>
+                </c:rich>
+              </c:tx>
+              <c:dLblPos val="outEnd"/>
+              <c:showLegendKey val="0"/>
+              <c:showVal val="1"/>
+              <c:showCatName val="0"/>
+              <c:showSerName val="0"/>
+              <c:showPercent val="0"/>
+              <c:showBubbleSize val="0"/>
+            </c:dLbl>
+            <c:numFmt formatCode="0.0&quot;%&quot;" sourceLinked="0"/>
+            <c:txPr>
+              <a:bodyPr/>
+              <a:lstStyle/>
+              <a:p>
+                <a:pPr>
+                  <a:defRPr sz="1000" b="1">
+                    <a:solidFill>
+                      <a:srgbClr val="D0D0D0"/>
+                    </a:solidFill>
+                  </a:defRPr>
+                </a:pPr>
+              </a:p>
+            </c:txPr>
+            <c:dLblPos val="outEnd"/>
+            <c:showLegendKey val="0"/>
+            <c:showVal val="1"/>
+            <c:showCatName val="0"/>
+            <c:showSerName val="0"/>
+            <c:showPercent val="0"/>
+            <c:showBubbleSize val="0"/>
+            <c:showLeaderLines val="1"/>
+          </c:dLbls>
+          <c:cat>
+            <c:strRef>
+              <c:f>Sheet1!$A$2:$A$9</c:f>
+              <c:strCache>
+                <c:ptCount val="8"/>
+                <c:pt idx="0">
+                  <c:v>MAY</c:v>
+                </c:pt>
+                <c:pt idx="1">
+                  <c:v>JUN</c:v>
+                </c:pt>
+                <c:pt idx="2">
+                  <c:v>JUL*</c:v>
+                </c:pt>
+                <c:pt idx="3">
+                  <c:v>AGO</c:v>
+                </c:pt>
+                <c:pt idx="4">
+                  <c:v>SEP</c:v>
+                </c:pt>
+                <c:pt idx="5">
+                  <c:v>OCT</c:v>
+                </c:pt>
+                <c:pt idx="6">
+                  <c:v>NOV</c:v>
+                </c:pt>
+                <c:pt idx="7">
+                  <c:v>DIC</c:v>
+                </c:pt>
+              </c:strCache>
+            </c:strRef>
+          </c:cat>
+          <c:val>
+            <c:numRef>
+              <c:f>Sheet1!$B$2:$B$9</c:f>
+              <c:numCache>
+                <c:formatCode>General</c:formatCode>
+                <c:ptCount val="8"/>
+                <c:pt idx="0">
+                  <c:v>6.6</c:v>
+                </c:pt>
+                <c:pt idx="1">
+                  <c:v>7.4</c:v>
+                </c:pt>
+                <c:pt idx="2">
+                  <c:v>11.4</c:v>
+                </c:pt>
+                <c:pt idx="3">
+                  <c:v>13.9</c:v>
+                </c:pt>
+                <c:pt idx="4">
+                  <c:v>11</c:v>
+                </c:pt>
+                <c:pt idx="5">
+                  <c:v>8</c:v>
+                </c:pt>
+                <c:pt idx="6">
+                  <c:v>6</c:v>
+                </c:pt>
+                <c:pt idx="7">
+                  <c:v>5</c:v>
+                </c:pt>
+              </c:numCache>
+            </c:numRef>
+          </c:val>
+        </c:ser>
+        <c:gapWidth val="50"/>
+        <c:axId val="-2068027336"/>
+        <c:axId val="-2113994440"/>
+      </c:barChart>
+      <c:catAx>
+        <c:axId val="-2068027336"/>
+        <c:scaling>
+          <c:orientation val="minMax"/>
+        </c:scaling>
+        <c:delete val="0"/>
+        <c:axPos val="b"/>
+        <c:majorTickMark val="out"/>
+        <c:minorTickMark val="none"/>
+        <c:tickLblPos val="nextTo"/>
+        <c:spPr>
+          <a:ln>
             <a:solidFill>
               <a:srgbClr val="4A4A4A"/>
             </a:solidFill>
+          </a:ln>
+        </c:spPr>
+        <c:txPr>
+          <a:bodyPr/>
+          <a:lstStyle/>
+          <a:p>
+            <a:pPr>
+              <a:defRPr sz="950" b="1">
+                <a:solidFill>
+                  <a:srgbClr val="9A9A9A"/>
+                </a:solidFill>
+              </a:defRPr>
+            </a:pPr>
+          </a:p>
+        </c:txPr>
+        <c:crossAx val="-2113994440"/>
+        <c:crosses val="autoZero"/>
+        <c:auto val="1"/>
+        <c:lblAlgn val="ctr"/>
+        <c:lblOffset val="100"/>
+        <c:noMultiLvlLbl val="0"/>
+      </c:catAx>
+      <c:valAx>
+        <c:axId val="-2113994440"/>
+        <c:scaling>
+          <c:max val="16.0"/>
+          <c:min val="0.0"/>
+        </c:scaling>
+        <c:delete/>
+        <c:axPos val="l"/>
+        <c:majorTickMark val="out"/>
+        <c:minorTickMark val="none"/>
+        <c:tickLblPos val="nextTo"/>
+        <c:crossAx val="-2068027336"/>
+        <c:crosses val="autoZero"/>
+      </c:valAx>
+      <c:spPr>
+        <a:noFill/>
+        <a:ln>
+          <a:noFill/>
+        </a:ln>
+      </c:spPr>
+    </c:plotArea>
+    <c:dispBlanksAs val="gap"/>
+  </c:chart>
+  <c:spPr>
+    <a:noFill/>
+    <a:ln>
+      <a:noFill/>
+    </a:ln>
+  </c:spPr>
+  <c:txPr>
+    <a:bodyPr/>
+    <a:lstStyle/>
+    <a:p>
+      <a:pPr>
+        <a:defRPr sz="900">
+          <a:solidFill>
+            <a:srgbClr val="9A9A9A"/>
+          </a:solidFill>
+          <a:latin typeface="Arial"/>
+        </a:defRPr>
+      </a:pPr>
+      <a:endParaRPr lang="en-US"/>
+    </a:p>
+  </c:txPr>
+  <c:externalData r:id="rId1">
+    <c:autoUpdate val="0"/>
+  </c:externalData>
+</c:chartSpace>
+</file>
+
+<file path=ppt/charts/chart4.xml><?xml version="1.0" encoding="utf-8"?>
+<c:chartSpace xmlns:c="http://schemas.openxmlformats.org/drawingml/2006/chart" xmlns:a="http://schemas.openxmlformats.org/drawingml/2006/main" xmlns:r="http://schemas.openxmlformats.org/officeDocument/2006/relationships">
+  <c:date1904 val="0"/>
+  <c:chart>
+    <c:autoTitleDeleted val="1"/>
+    <c:plotArea>
+      <c:barChart>
+        <c:barDir val="bar"/>
+        <c:grouping val="clustered"/>
+        <c:ser>
+          <c:idx val="0"/>
+          <c:order val="0"/>
+          <c:tx>
+            <c:strRef>
+              <c:f>Sheet1!$B$1</c:f>
+              <c:strCache>
+                <c:ptCount val="1"/>
+                <c:pt idx="0">
+                  <c:v>Septiembre</c:v>
+                </c:pt>
+              </c:strCache>
+            </c:strRef>
+          </c:tx>
+          <c:spPr>
+            <a:solidFill>
+              <a:srgbClr val="ED6C23"/>
+            </a:solidFill>
           </c:spPr>
+          <c:dLbls>
+            <c:txPr>
+              <a:bodyPr/>
+              <a:lstStyle/>
+              <a:p>
+                <a:pPr>
+                  <a:defRPr sz="850" b="1">
+                    <a:solidFill>
+                      <a:srgbClr val="D0D0D0"/>
+                    </a:solidFill>
+                  </a:defRPr>
+                </a:pPr>
+              </a:p>
+            </c:txPr>
+            <c:dLblPos val="outEnd"/>
+            <c:showLegendKey val="0"/>
+            <c:showVal val="1"/>
+            <c:showCatName val="0"/>
+            <c:showSerName val="0"/>
+            <c:showPercent val="0"/>
+            <c:showBubbleSize val="0"/>
+            <c:showLeaderLines val="1"/>
+          </c:dLbls>
+          <c:cat>
+            <c:strRef>
+              <c:f>Sheet1!$A$2:$A$8</c:f>
+              <c:strCache>
+                <c:ptCount val="7"/>
+                <c:pt idx="0">
+                  <c:v>Faltó impresión</c:v>
+                </c:pt>
+                <c:pt idx="1">
+                  <c:v>Confección</c:v>
+                </c:pt>
+                <c:pt idx="2">
+                  <c:v>Diseño / ficha</c:v>
+                </c:pt>
+                <c:pt idx="3">
+                  <c:v>Corte</c:v>
+                </c:pt>
+                <c:pt idx="4">
+                  <c:v>Pendientes en taller</c:v>
+                </c:pt>
+                <c:pt idx="5">
+                  <c:v>Sublimación</c:v>
+                </c:pt>
+                <c:pt idx="6">
+                  <c:v>Armado de mesa / papel</c:v>
+                </c:pt>
+              </c:strCache>
+            </c:strRef>
+          </c:cat>
+          <c:val>
+            <c:numRef>
+              <c:f>Sheet1!$B$2:$B$8</c:f>
+              <c:numCache>
+                <c:formatCode>General</c:formatCode>
+                <c:ptCount val="7"/>
+                <c:pt idx="0">
+                  <c:v>2</c:v>
+                </c:pt>
+                <c:pt idx="1">
+                  <c:v>6</c:v>
+                </c:pt>
+                <c:pt idx="2">
+                  <c:v>7</c:v>
+                </c:pt>
+                <c:pt idx="3">
+                  <c:v>7</c:v>
+                </c:pt>
+                <c:pt idx="4">
+                  <c:v>7</c:v>
+                </c:pt>
+                <c:pt idx="5">
+                  <c:v>12</c:v>
+                </c:pt>
+                <c:pt idx="6">
+                  <c:v>10</c:v>
+                </c:pt>
+              </c:numCache>
+            </c:numRef>
+          </c:val>
+        </c:ser>
+        <c:ser>
+          <c:idx val="1"/>
+          <c:order val="1"/>
+          <c:tx>
+            <c:strRef>
+              <c:f>Sheet1!$C$1</c:f>
+              <c:strCache>
+                <c:ptCount val="1"/>
+                <c:pt idx="0">
+                  <c:v>Agosto</c:v>
+                </c:pt>
+              </c:strCache>
+            </c:strRef>
+          </c:tx>
+          <c:spPr>
+            <a:solidFill>
+              <a:srgbClr val="5A5A5A"/>
+            </a:solidFill>
+          </c:spPr>
+          <c:dLbls>
+            <c:txPr>
+              <a:bodyPr/>
+              <a:lstStyle/>
+              <a:p>
+                <a:pPr>
+                  <a:defRPr sz="850" b="1">
+                    <a:solidFill>
+                      <a:srgbClr val="9A9A9A"/>
+                    </a:solidFill>
+                  </a:defRPr>
+                </a:pPr>
+              </a:p>
+            </c:txPr>
+            <c:dLblPos val="outEnd"/>
+            <c:showLegendKey val="0"/>
+            <c:showVal val="1"/>
+            <c:showCatName val="0"/>
+            <c:showSerName val="0"/>
+            <c:showPercent val="0"/>
+            <c:showBubbleSize val="0"/>
+            <c:showLeaderLines val="1"/>
+          </c:dLbls>
+          <c:cat>
+            <c:strRef>
+              <c:f>Sheet1!$A$2:$A$8</c:f>
+              <c:strCache>
+                <c:ptCount val="7"/>
+                <c:pt idx="0">
+                  <c:v>Faltó impresión</c:v>
+                </c:pt>
+                <c:pt idx="1">
+                  <c:v>Confección</c:v>
+                </c:pt>
+                <c:pt idx="2">
+                  <c:v>Diseño / ficha</c:v>
+                </c:pt>
+                <c:pt idx="3">
+                  <c:v>Corte</c:v>
+                </c:pt>
+                <c:pt idx="4">
+                  <c:v>Pendientes en taller</c:v>
+                </c:pt>
+                <c:pt idx="5">
+                  <c:v>Sublimación</c:v>
+                </c:pt>
+                <c:pt idx="6">
+                  <c:v>Armado de mesa / papel</c:v>
+                </c:pt>
+              </c:strCache>
+            </c:strRef>
+          </c:cat>
+          <c:val>
+            <c:numRef>
+              <c:f>Sheet1!$C$2:$C$8</c:f>
+              <c:numCache>
+                <c:formatCode>General</c:formatCode>
+                <c:ptCount val="7"/>
+                <c:pt idx="0">
+                  <c:v>5</c:v>
+                </c:pt>
+                <c:pt idx="1">
+                  <c:v>4</c:v>
+                </c:pt>
+                <c:pt idx="2">
+                  <c:v>5</c:v>
+                </c:pt>
+                <c:pt idx="3">
+                  <c:v>4</c:v>
+                </c:pt>
+                <c:pt idx="4">
+                  <c:v>12</c:v>
+                </c:pt>
+                <c:pt idx="5">
+                  <c:v>12</c:v>
+                </c:pt>
+                <c:pt idx="6">
+                  <c:v>15</c:v>
+                </c:pt>
+              </c:numCache>
+            </c:numRef>
+          </c:val>
+        </c:ser>
+        <c:gapWidth val="45"/>
+        <c:overlap val="-5"/>
+        <c:axId val="-2068027336"/>
+        <c:axId val="-2113994440"/>
+      </c:barChart>
+      <c:catAx>
+        <c:axId val="-2068027336"/>
+        <c:scaling>
+          <c:orientation val="minMax"/>
+        </c:scaling>
+        <c:delete val="0"/>
+        <c:axPos val="l"/>
+        <c:majorTickMark val="out"/>
+        <c:minorTickMark val="none"/>
+        <c:tickLblPos val="nextTo"/>
+        <c:spPr>
+          <a:ln>
+            <a:solidFill>
+              <a:srgbClr val="4A4A4A"/>
+            </a:solidFill>
+          </a:ln>
+        </c:spPr>
+        <c:txPr>
+          <a:bodyPr/>
+          <a:lstStyle/>
+          <a:p>
+            <a:pPr>
+              <a:defRPr sz="900">
+                <a:solidFill>
+                  <a:srgbClr val="D0D0D0"/>
+                </a:solidFill>
+              </a:defRPr>
+            </a:pPr>
+          </a:p>
+        </c:txPr>
+        <c:crossAx val="-2113994440"/>
+        <c:crosses val="autoZero"/>
+        <c:auto val="1"/>
+        <c:lblAlgn val="ctr"/>
+        <c:lblOffset val="100"/>
+        <c:noMultiLvlLbl val="0"/>
+      </c:catAx>
+      <c:valAx>
+        <c:axId val="-2113994440"/>
+        <c:scaling>
+          <c:max val="17.0"/>
+        </c:scaling>
+        <c:delete/>
+        <c:axPos val="b"/>
+        <c:majorTickMark val="out"/>
+        <c:minorTickMark val="none"/>
+        <c:tickLblPos val="nextTo"/>
+        <c:crossAx val="-2068027336"/>
+        <c:crosses val="autoZero"/>
+      </c:valAx>
+      <c:spPr>
+        <a:noFill/>
+        <a:ln>
+          <a:noFill/>
+        </a:ln>
+      </c:spPr>
+    </c:plotArea>
+    <c:dispBlanksAs val="gap"/>
+  </c:chart>
+  <c:spPr>
+    <a:noFill/>
+    <a:ln>
+      <a:noFill/>
+    </a:ln>
+  </c:spPr>
+  <c:txPr>
+    <a:bodyPr/>
+    <a:lstStyle/>
+    <a:p>
+      <a:pPr>
+        <a:defRPr sz="900">
+          <a:solidFill>
+            <a:srgbClr val="9A9A9A"/>
+          </a:solidFill>
+          <a:latin typeface="Arial"/>
+        </a:defRPr>
+      </a:pPr>
+      <a:endParaRPr lang="en-US"/>
+    </a:p>
+  </c:txPr>
+  <c:externalData r:id="rId1">
+    <c:autoUpdate val="0"/>
+  </c:externalData>
+</c:chartSpace>
+</file>
+
+<file path=ppt/charts/chart5.xml><?xml version="1.0" encoding="utf-8"?>
+<c:chartSpace xmlns:c="http://schemas.openxmlformats.org/drawingml/2006/chart" xmlns:a="http://schemas.openxmlformats.org/drawingml/2006/main" xmlns:r="http://schemas.openxmlformats.org/officeDocument/2006/relationships">
+  <c:date1904 val="0"/>
+  <c:chart>
+    <c:autoTitleDeleted val="1"/>
+    <c:plotArea>
+      <c:barChart>
+        <c:barDir val="col"/>
+        <c:grouping val="clustered"/>
+        <c:ser>
+          <c:idx val="0"/>
+          <c:order val="0"/>
+          <c:tx>
+            <c:strRef>
+              <c:f>Sheet1!$B$1</c:f>
+              <c:strCache>
+                <c:ptCount val="1"/>
+                <c:pt idx="0">
+                  <c:v>% reproceso</c:v>
+                </c:pt>
+              </c:strCache>
+            </c:strRef>
+          </c:tx>
+          <c:dPt>
+            <c:idx val="0"/>
+            <c:spPr>
+              <a:solidFill>
+                <a:srgbClr val="4A4A4A"/>
+              </a:solidFill>
+            </c:spPr>
+          </c:dPt>
+          <c:dPt>
+            <c:idx val="1"/>
+            <c:spPr>
+              <a:solidFill>
+                <a:srgbClr val="4A4A4A"/>
+              </a:solidFill>
+            </c:spPr>
+          </c:dPt>
+          <c:dPt>
+            <c:idx val="2"/>
+            <c:spPr>
+              <a:solidFill>
+                <a:srgbClr val="4A4A4A"/>
+              </a:solidFill>
+            </c:spPr>
+          </c:dPt>
+          <c:dPt>
+            <c:idx val="3"/>
+            <c:spPr>
+              <a:solidFill>
+                <a:srgbClr val="4A4A4A"/>
+              </a:solidFill>
+            </c:spPr>
+          </c:dPt>
           <c:dPt>
             <c:idx val="4"/>
             <c:spPr>
               <a:solidFill>
-                <a:srgbClr val="27AE60"/>
+                <a:srgbClr val="1B7F4A"/>
               </a:solidFill>
             </c:spPr>
           </c:dPt>
           <c:dLbls>
+            <c:dLbl>
+              <c:idx val="0"/>
+              <c:spPr/>
+              <c:txPr>
+                <a:bodyPr/>
+                <a:lstStyle/>
+                <a:p>
+                  <a:pPr>
+                    <a:defRPr sz="1000" b="1">
+                      <a:solidFill>
+                        <a:srgbClr val="9A9A9A"/>
+                      </a:solidFill>
+                    </a:defRPr>
+                  </a:pPr>
+                </a:p>
+              </c:txPr>
+              <c:dLblPos val="outEnd"/>
+              <c:showLegendKey val="0"/>
+              <c:showVal val="1"/>
+              <c:showCatName val="0"/>
+              <c:showSerName val="0"/>
+              <c:showPercent val="0"/>
+              <c:showBubbleSize val="0"/>
+            </c:dLbl>
+            <c:dLbl>
+              <c:idx val="1"/>
+              <c:spPr/>
+              <c:txPr>
+                <a:bodyPr/>
+                <a:lstStyle/>
+                <a:p>
+                  <a:pPr>
+                    <a:defRPr sz="1000" b="1">
+                      <a:solidFill>
+                        <a:srgbClr val="9A9A9A"/>
+                      </a:solidFill>
+                    </a:defRPr>
+                  </a:pPr>
+                </a:p>
+              </c:txPr>
+              <c:dLblPos val="outEnd"/>
+              <c:showLegendKey val="0"/>
+              <c:showVal val="1"/>
+              <c:showCatName val="0"/>
+              <c:showSerName val="0"/>
+              <c:showPercent val="0"/>
+              <c:showBubbleSize val="0"/>
+            </c:dLbl>
+            <c:dLbl>
+              <c:idx val="2"/>
+              <c:spPr/>
+              <c:txPr>
+                <a:bodyPr/>
+                <a:lstStyle/>
+                <a:p>
+                  <a:pPr>
+                    <a:defRPr sz="1000" b="1">
+                      <a:solidFill>
+                        <a:srgbClr val="9A9A9A"/>
+                      </a:solidFill>
+                    </a:defRPr>
+                  </a:pPr>
+                </a:p>
+              </c:txPr>
+              <c:dLblPos val="outEnd"/>
+              <c:showLegendKey val="0"/>
+              <c:showVal val="1"/>
+              <c:showCatName val="0"/>
+              <c:showSerName val="0"/>
+              <c:showPercent val="0"/>
+              <c:showBubbleSize val="0"/>
+            </c:dLbl>
+            <c:dLbl>
+              <c:idx val="3"/>
+              <c:spPr/>
+              <c:txPr>
+                <a:bodyPr/>
+                <a:lstStyle/>
+                <a:p>
+                  <a:pPr>
+                    <a:defRPr sz="1000" b="1">
+                      <a:solidFill>
+                        <a:srgbClr val="9A9A9A"/>
+                      </a:solidFill>
+                    </a:defRPr>
+                  </a:pPr>
+                </a:p>
+              </c:txPr>
+              <c:dLblPos val="outEnd"/>
+              <c:showLegendKey val="0"/>
+              <c:showVal val="1"/>
+              <c:showCatName val="0"/>
+              <c:showSerName val="0"/>
+              <c:showPercent val="0"/>
+              <c:showBubbleSize val="0"/>
+            </c:dLbl>
             <c:dLbl>
               <c:idx val="4"/>
               <c:spPr/>
@@ -152,7 +1065,7 @@
                 <a:lstStyle/>
                 <a:p>
                   <a:pPr>
-                    <a:defRPr sz="1100" b="1">
+                    <a:defRPr sz="1000" b="1">
                       <a:solidFill>
                         <a:srgbClr val="27AE60"/>
                       </a:solidFill>
@@ -174,7 +1087,7 @@
               <a:lstStyle/>
               <a:p>
                 <a:pPr>
-                  <a:defRPr sz="900" b="1">
+                  <a:defRPr sz="1000" b="1">
                     <a:solidFill>
                       <a:srgbClr val="D0D0D0"/>
                     </a:solidFill>
@@ -239,7 +1152,7 @@
             </c:numRef>
           </c:val>
         </c:ser>
-        <c:gapWidth val="55"/>
+        <c:gapWidth val="50"/>
         <c:axId val="-2068027336"/>
         <c:axId val="-2113994440"/>
       </c:barChart>
@@ -265,7 +1178,7 @@
           <a:lstStyle/>
           <a:p>
             <a:pPr>
-              <a:defRPr sz="900" b="1">
+              <a:defRPr sz="950" b="1">
                 <a:solidFill>
                   <a:srgbClr val="9A9A9A"/>
                 </a:solidFill>
@@ -679,6 +1592,383 @@
 </p:notesMaster>
 </file>
 
+<file path=ppt/notesSlides/notesSlide10.xml><?xml version="1.0" encoding="utf-8"?>
+<p:notes xmlns:a="http://schemas.openxmlformats.org/drawingml/2006/main" xmlns:p="http://schemas.openxmlformats.org/presentationml/2006/main" xmlns:r="http://schemas.openxmlformats.org/officeDocument/2006/relationships">
+  <p:cSld>
+    <p:spTree>
+      <p:nvGrpSpPr>
+        <p:cNvPr id="1" name=""/>
+        <p:cNvGrpSpPr/>
+        <p:nvPr/>
+      </p:nvGrpSpPr>
+      <p:grpSpPr>
+        <a:xfrm>
+          <a:off x="0" y="0"/>
+          <a:ext cx="0" cy="0"/>
+          <a:chOff x="0" y="0"/>
+          <a:chExt cx="0" cy="0"/>
+        </a:xfrm>
+      </p:grpSpPr>
+      <p:sp>
+        <p:nvSpPr>
+          <p:cNvPr id="2" name="Slide Image Placeholder 1"/>
+          <p:cNvSpPr>
+            <a:spLocks noGrp="1"/>
+          </p:cNvSpPr>
+          <p:nvPr>
+            <p:ph type="sldImg" idx="2"/>
+          </p:nvPr>
+        </p:nvSpPr>
+        <p:spPr/>
+      </p:sp>
+      <p:sp>
+        <p:nvSpPr>
+          <p:cNvPr id="3" name="Notes Placeholder 2"/>
+          <p:cNvSpPr>
+            <a:spLocks noGrp="1"/>
+          </p:cNvSpPr>
+          <p:nvPr>
+            <p:ph type="body" idx="3" sz="quarter"/>
+          </p:nvPr>
+        </p:nvSpPr>
+        <p:spPr/>
+        <p:txBody>
+          <a:bodyPr/>
+          <a:lstStyle/>
+          <a:p>
+            <a:r>
+              <a:t>Recorrer la tabla. Mayo y junio estuvieron cerca del verde; julio y agosto pasaron a rojo. Agosto: de cada 100 metros, 14 eran para repetir. Septiembre lo dejamos para el final.</a:t>
+            </a:r>
+          </a:p>
+        </p:txBody>
+      </p:sp>
+      <p:sp>
+        <p:nvSpPr>
+          <p:cNvPr id="4" name="Slide Number Placeholder 3"/>
+          <p:cNvSpPr>
+            <a:spLocks noGrp="1"/>
+          </p:cNvSpPr>
+          <p:nvPr>
+            <p:ph type="sldNum" idx="5" sz="quarter"/>
+          </p:nvPr>
+        </p:nvSpPr>
+        <p:spPr/>
+      </p:sp>
+    </p:spTree>
+  </p:cSld>
+  <p:clrMapOvr>
+    <a:masterClrMapping/>
+  </p:clrMapOvr>
+</p:notes>
+</file>
+
+<file path=ppt/notesSlides/notesSlide11.xml><?xml version="1.0" encoding="utf-8"?>
+<p:notes xmlns:a="http://schemas.openxmlformats.org/drawingml/2006/main" xmlns:p="http://schemas.openxmlformats.org/presentationml/2006/main" xmlns:r="http://schemas.openxmlformats.org/officeDocument/2006/relationships">
+  <p:cSld>
+    <p:spTree>
+      <p:nvGrpSpPr>
+        <p:cNvPr id="1" name=""/>
+        <p:cNvGrpSpPr/>
+        <p:nvPr/>
+      </p:nvGrpSpPr>
+      <p:grpSpPr>
+        <a:xfrm>
+          <a:off x="0" y="0"/>
+          <a:ext cx="0" cy="0"/>
+          <a:chOff x="0" y="0"/>
+          <a:chExt cx="0" cy="0"/>
+        </a:xfrm>
+      </p:grpSpPr>
+      <p:sp>
+        <p:nvSpPr>
+          <p:cNvPr id="2" name="Slide Image Placeholder 1"/>
+          <p:cNvSpPr>
+            <a:spLocks noGrp="1"/>
+          </p:cNvSpPr>
+          <p:nvPr>
+            <p:ph type="sldImg" idx="2"/>
+          </p:nvPr>
+        </p:nvSpPr>
+        <p:spPr/>
+      </p:sp>
+      <p:sp>
+        <p:nvSpPr>
+          <p:cNvPr id="3" name="Notes Placeholder 2"/>
+          <p:cNvSpPr>
+            <a:spLocks noGrp="1"/>
+          </p:cNvSpPr>
+          <p:nvPr>
+            <p:ph type="body" idx="3" sz="quarter"/>
+          </p:nvPr>
+        </p:nvSpPr>
+        <p:spPr/>
+        <p:txBody>
+          <a:bodyPr/>
+          <a:lstStyle/>
+          <a:p>
+            <a:r>
+              <a:t>Después de agosto se definió una meta por mes: septiembre ≤11%, octubre ≤8%, noviembre ≤6% y diciembre ≤5%. Septiembre era el primer paso. Dejar la pregunta abierta.</a:t>
+            </a:r>
+          </a:p>
+        </p:txBody>
+      </p:sp>
+      <p:sp>
+        <p:nvSpPr>
+          <p:cNvPr id="4" name="Slide Number Placeholder 3"/>
+          <p:cNvSpPr>
+            <a:spLocks noGrp="1"/>
+          </p:cNvSpPr>
+          <p:nvPr>
+            <p:ph type="sldNum" idx="5" sz="quarter"/>
+          </p:nvPr>
+        </p:nvSpPr>
+        <p:spPr/>
+      </p:sp>
+    </p:spTree>
+  </p:cSld>
+  <p:clrMapOvr>
+    <a:masterClrMapping/>
+  </p:clrMapOvr>
+</p:notes>
+</file>
+
+<file path=ppt/notesSlides/notesSlide12.xml><?xml version="1.0" encoding="utf-8"?>
+<p:notes xmlns:a="http://schemas.openxmlformats.org/drawingml/2006/main" xmlns:p="http://schemas.openxmlformats.org/presentationml/2006/main" xmlns:r="http://schemas.openxmlformats.org/officeDocument/2006/relationships">
+  <p:cSld>
+    <p:spTree>
+      <p:nvGrpSpPr>
+        <p:cNvPr id="1" name=""/>
+        <p:cNvGrpSpPr/>
+        <p:nvPr/>
+      </p:nvGrpSpPr>
+      <p:grpSpPr>
+        <a:xfrm>
+          <a:off x="0" y="0"/>
+          <a:ext cx="0" cy="0"/>
+          <a:chOff x="0" y="0"/>
+          <a:chExt cx="0" cy="0"/>
+        </a:xfrm>
+      </p:grpSpPr>
+      <p:sp>
+        <p:nvSpPr>
+          <p:cNvPr id="2" name="Slide Image Placeholder 1"/>
+          <p:cNvSpPr>
+            <a:spLocks noGrp="1"/>
+          </p:cNvSpPr>
+          <p:nvPr>
+            <p:ph type="sldImg" idx="2"/>
+          </p:nvPr>
+        </p:nvSpPr>
+        <p:spPr/>
+      </p:sp>
+      <p:sp>
+        <p:nvSpPr>
+          <p:cNvPr id="3" name="Notes Placeholder 2"/>
+          <p:cNvSpPr>
+            <a:spLocks noGrp="1"/>
+          </p:cNvSpPr>
+          <p:nvPr>
+            <p:ph type="body" idx="3" sz="quarter"/>
+          </p:nvPr>
+        </p:nvSpPr>
+        <p:spPr/>
+        <p:txBody>
+          <a:bodyPr/>
+          <a:lstStyle/>
+          <a:p>
+            <a:r>
+              <a:t>Septiembre fue el mes con más producción (2.098 m) y aun así hubo menos pedidos que en agosto (51 vs 57). Comentar qué etapas bajaron y cuáles subieron, hablando de procesos y no de personas. Sublimación es el foco de octubre.</a:t>
+            </a:r>
+          </a:p>
+        </p:txBody>
+      </p:sp>
+      <p:sp>
+        <p:nvSpPr>
+          <p:cNvPr id="4" name="Slide Number Placeholder 3"/>
+          <p:cNvSpPr>
+            <a:spLocks noGrp="1"/>
+          </p:cNvSpPr>
+          <p:nvPr>
+            <p:ph type="sldNum" idx="5" sz="quarter"/>
+          </p:nvPr>
+        </p:nvSpPr>
+        <p:spPr/>
+      </p:sp>
+    </p:spTree>
+  </p:cSld>
+  <p:clrMapOvr>
+    <a:masterClrMapping/>
+  </p:clrMapOvr>
+</p:notes>
+</file>
+
+<file path=ppt/notesSlides/notesSlide13.xml><?xml version="1.0" encoding="utf-8"?>
+<p:notes xmlns:a="http://schemas.openxmlformats.org/drawingml/2006/main" xmlns:p="http://schemas.openxmlformats.org/presentationml/2006/main" xmlns:r="http://schemas.openxmlformats.org/officeDocument/2006/relationships">
+  <p:cSld>
+    <p:spTree>
+      <p:nvGrpSpPr>
+        <p:cNvPr id="1" name=""/>
+        <p:cNvGrpSpPr/>
+        <p:nvPr/>
+      </p:nvGrpSpPr>
+      <p:grpSpPr>
+        <a:xfrm>
+          <a:off x="0" y="0"/>
+          <a:ext cx="0" cy="0"/>
+          <a:chOff x="0" y="0"/>
+          <a:chExt cx="0" cy="0"/>
+        </a:xfrm>
+      </p:grpSpPr>
+      <p:sp>
+        <p:nvSpPr>
+          <p:cNvPr id="2" name="Slide Image Placeholder 1"/>
+          <p:cNvSpPr>
+            <a:spLocks noGrp="1"/>
+          </p:cNvSpPr>
+          <p:nvPr>
+            <p:ph type="sldImg" idx="2"/>
+          </p:nvPr>
+        </p:nvSpPr>
+        <p:spPr/>
+      </p:sp>
+      <p:sp>
+        <p:nvSpPr>
+          <p:cNvPr id="3" name="Notes Placeholder 2"/>
+          <p:cNvSpPr>
+            <a:spLocks noGrp="1"/>
+          </p:cNvSpPr>
+          <p:nvPr>
+            <p:ph type="body" idx="3" sz="quarter"/>
+          </p:nvPr>
+        </p:nvSpPr>
+        <p:spPr/>
+        <p:txBody>
+          <a:bodyPr/>
+          <a:lstStyle/>
+          <a:p>
+            <a:r>
+              <a:t>Revelar: septiembre cerró en 5,7%. La meta del mes era ≤11%: se cumplió con holgura. Repetimos 127 m contra 279 m de agosto, en el mes de mayor producción. Próxima meta: octubre ≤8%.</a:t>
+            </a:r>
+          </a:p>
+        </p:txBody>
+      </p:sp>
+      <p:sp>
+        <p:nvSpPr>
+          <p:cNvPr id="4" name="Slide Number Placeholder 3"/>
+          <p:cNvSpPr>
+            <a:spLocks noGrp="1"/>
+          </p:cNvSpPr>
+          <p:nvPr>
+            <p:ph type="sldNum" idx="5" sz="quarter"/>
+          </p:nvPr>
+        </p:nvSpPr>
+        <p:spPr/>
+      </p:sp>
+    </p:spTree>
+  </p:cSld>
+  <p:clrMapOvr>
+    <a:masterClrMapping/>
+  </p:clrMapOvr>
+</p:notes>
+</file>
+
+<file path=ppt/notesSlides/notesSlide14.xml><?xml version="1.0" encoding="utf-8"?>
+<p:notes xmlns:a="http://schemas.openxmlformats.org/drawingml/2006/main" xmlns:p="http://schemas.openxmlformats.org/presentationml/2006/main" xmlns:r="http://schemas.openxmlformats.org/officeDocument/2006/relationships">
+  <p:cSld>
+    <p:spTree>
+      <p:nvGrpSpPr>
+        <p:cNvPr id="1" name=""/>
+        <p:cNvGrpSpPr/>
+        <p:nvPr/>
+      </p:nvGrpSpPr>
+      <p:grpSpPr>
+        <a:xfrm>
+          <a:off x="0" y="0"/>
+          <a:ext cx="0" cy="0"/>
+          <a:chOff x="0" y="0"/>
+          <a:chExt cx="0" cy="0"/>
+        </a:xfrm>
+      </p:grpSpPr>
+      <p:sp>
+        <p:nvSpPr>
+          <p:cNvPr id="2" name="Slide Image Placeholder 1"/>
+          <p:cNvSpPr>
+            <a:spLocks noGrp="1"/>
+          </p:cNvSpPr>
+          <p:nvPr>
+            <p:ph type="sldImg" idx="2"/>
+          </p:nvPr>
+        </p:nvSpPr>
+        <p:spPr/>
+      </p:sp>
+      <p:sp>
+        <p:nvSpPr>
+          <p:cNvPr id="3" name="Notes Placeholder 2"/>
+          <p:cNvSpPr>
+            <a:spLocks noGrp="1"/>
+          </p:cNvSpPr>
+          <p:nvPr>
+            <p:ph type="body" idx="3" sz="quarter"/>
+          </p:nvPr>
+        </p:nvSpPr>
+        <p:spPr/>
+        <p:txBody>
+          <a:bodyPr/>
+          <a:lstStyle/>
+          <a:p>
+            <a:r>
+              <a:t>RESULTADO DE ESTE MES: MEJORA (13,9% → 5,7%). El mensaje aparece con un clic.</a:t>
+            </a:r>
+          </a:p>
+          <a:p/>
+          <a:p>
+            <a:r>
+              <a:t>CÓMO ELEGIR EL MENSAJE CADA MES (comparar el % de reproceso con el mes anterior):</a:t>
+            </a:r>
+          </a:p>
+          <a:p>
+            <a:r>
+              <a:t>• MEJORÓ (bajó 0,5 puntos o más) → felicitar (panel verde): "¡Felicitaciones, equipo! … Este logro es de todos."</a:t>
+            </a:r>
+          </a:p>
+          <a:p>
+            <a:r>
+              <a:t>• SE MANTUVO (cambio menor a 0,5 puntos) → invitar a mejorar (panel naranja): "Mantuvimos el nivel. Vamos por más. El siguiente paso está en los detalles: revisar el papel antes de sublimar."</a:t>
+            </a:r>
+          </a:p>
+          <a:p>
+            <a:r>
+              <a:t>• NO FUE LO ESPERADO (subió más de 0,5 puntos) → reflexión constructiva (panel azul): "Este mes nos costó, y está bien decirlo. Cada error nos muestra dónde mejorar: miremos juntos las causas. Confiamos en este equipo."</a:t>
+            </a:r>
+          </a:p>
+          <a:p/>
+          <a:p>
+            <a:r>
+              <a:t>NO SE MUESTRA AL EQUIPO: costos en pesos, ventas, nombres asociados a errores ni detalles de metodología.</a:t>
+            </a:r>
+          </a:p>
+        </p:txBody>
+      </p:sp>
+      <p:sp>
+        <p:nvSpPr>
+          <p:cNvPr id="4" name="Slide Number Placeholder 3"/>
+          <p:cNvSpPr>
+            <a:spLocks noGrp="1"/>
+          </p:cNvSpPr>
+          <p:nvPr>
+            <p:ph type="sldNum" idx="5" sz="quarter"/>
+          </p:nvPr>
+        </p:nvSpPr>
+        <p:spPr/>
+      </p:sp>
+    </p:spTree>
+  </p:cSld>
+  <p:clrMapOvr>
+    <a:masterClrMapping/>
+  </p:clrMapOvr>
+</p:notes>
+</file>
+
 <file path=ppt/notesSlides/notesSlide8.xml><?xml version="1.0" encoding="utf-8"?>
 <p:notes xmlns:a="http://schemas.openxmlformats.org/drawingml/2006/main" xmlns:p="http://schemas.openxmlformats.org/presentationml/2006/main" xmlns:r="http://schemas.openxmlformats.org/officeDocument/2006/relationships">
   <p:cSld>
@@ -724,44 +2014,77 @@
           <a:lstStyle/>
           <a:p>
             <a:r>
-              <a:t>RESULTADO DE ESTE MES: MEJORA (13.9% → 5.7%).</a:t>
-            </a:r>
-          </a:p>
-          <a:p/>
-          <a:p>
-            <a:r>
-              <a:t>CÓMO ELEGIR LA FRASE FINAL CADA MES (comparar el % de reproceso con el mes anterior):</a:t>
-            </a:r>
-          </a:p>
-          <a:p>
-            <a:r>
-              <a:t>• MEJORÓ (bajó 0,5 puntos o más) → felicitar: "¡Felicitaciones, equipo! … Este logro es de todos: ahora vamos juntos por la meta."</a:t>
-            </a:r>
-          </a:p>
-          <a:p>
-            <a:r>
-              <a:t>• SE MANTUVO (cambio menor a 0,5 puntos) → invitar a mejorar: "Mantuvimos el nivel. El siguiente paso está en los detalles: revisemos el papel antes de sublimar y vamos juntos por la meta del próximo mes."</a:t>
-            </a:r>
-          </a:p>
-          <a:p>
-            <a:r>
-              <a:t>• NO FUE LO ESPERADO (subió más de 0,5 puntos) → reflexión constructiva: "Este mes nos costó, y está bien decirlo. Cada error nos muestra dónde mejorar. Miremos juntos las causas y volvamos a la meta: confiamos en este equipo."</a:t>
-            </a:r>
-          </a:p>
-          <a:p/>
-          <a:p>
-            <a:r>
-              <a:t>IDEAS PARA COMENTAR: el resultado es del equipo completo; hablar de procesos (mesa, sublimación, corte), no de personas; pedir que cada reproceso indique la ETAPA (antes o después de sublimar) en el chat.</a:t>
-            </a:r>
-          </a:p>
-          <a:p>
-            <a:r>
-              <a:t>NO SE MUESTRA AL EQUIPO: costos en pesos, ventas, nombres asociados a errores ni detalles de metodología.</a:t>
-            </a:r>
-          </a:p>
-          <a:p>
-            <a:r>
-              <a:t>La frase final aparece con un clic.</a:t>
+              <a:t>Abrir con la pregunta. Contar el orden: primero los números que medimos y cómo venimos, después lo que pasó en septiembre, y el resultado se muestra al final.</a:t>
+            </a:r>
+          </a:p>
+        </p:txBody>
+      </p:sp>
+      <p:sp>
+        <p:nvSpPr>
+          <p:cNvPr id="4" name="Slide Number Placeholder 3"/>
+          <p:cNvSpPr>
+            <a:spLocks noGrp="1"/>
+          </p:cNvSpPr>
+          <p:nvPr>
+            <p:ph type="sldNum" idx="5" sz="quarter"/>
+          </p:nvPr>
+        </p:nvSpPr>
+        <p:spPr/>
+      </p:sp>
+    </p:spTree>
+  </p:cSld>
+  <p:clrMapOvr>
+    <a:masterClrMapping/>
+  </p:clrMapOvr>
+</p:notes>
+</file>
+
+<file path=ppt/notesSlides/notesSlide9.xml><?xml version="1.0" encoding="utf-8"?>
+<p:notes xmlns:a="http://schemas.openxmlformats.org/drawingml/2006/main" xmlns:p="http://schemas.openxmlformats.org/presentationml/2006/main" xmlns:r="http://schemas.openxmlformats.org/officeDocument/2006/relationships">
+  <p:cSld>
+    <p:spTree>
+      <p:nvGrpSpPr>
+        <p:cNvPr id="1" name=""/>
+        <p:cNvGrpSpPr/>
+        <p:nvPr/>
+      </p:nvGrpSpPr>
+      <p:grpSpPr>
+        <a:xfrm>
+          <a:off x="0" y="0"/>
+          <a:ext cx="0" cy="0"/>
+          <a:chOff x="0" y="0"/>
+          <a:chExt cx="0" cy="0"/>
+        </a:xfrm>
+      </p:grpSpPr>
+      <p:sp>
+        <p:nvSpPr>
+          <p:cNvPr id="2" name="Slide Image Placeholder 1"/>
+          <p:cNvSpPr>
+            <a:spLocks noGrp="1"/>
+          </p:cNvSpPr>
+          <p:nvPr>
+            <p:ph type="sldImg" idx="2"/>
+          </p:nvPr>
+        </p:nvSpPr>
+        <p:spPr/>
+      </p:sp>
+      <p:sp>
+        <p:nvSpPr>
+          <p:cNvPr id="3" name="Notes Placeholder 2"/>
+          <p:cNvSpPr>
+            <a:spLocks noGrp="1"/>
+          </p:cNvSpPr>
+          <p:nvPr>
+            <p:ph type="body" idx="3" sz="quarter"/>
+          </p:nvPr>
+        </p:nvSpPr>
+        <p:spPr/>
+        <p:txBody>
+          <a:bodyPr/>
+          <a:lstStyle/>
+          <a:p>
+            <a:r>
+              <a:t>Explicar el indicador: metros reprocesados dividido por el total impreso. No mide a personas, mide el proceso. Semáforo: verde bajo 7%, naranja 7–10%, rojo sobre 10%. La meta para diciembre es 5%: 1 de cada 20 metros.</a:t>
             </a:r>
           </a:p>
         </p:txBody>
@@ -1093,7 +2416,7 @@
 </p:sldMaster>
 </file>
 
-<file path=ppt/slides/slide9.xml><?xml version="1.0" encoding="utf-8"?>
+<file path=ppt/slides/slide10.xml><?xml version="1.0" encoding="utf-8"?>
 <p:sld xmlns:a="http://schemas.openxmlformats.org/drawingml/2006/main" xmlns:p="http://schemas.openxmlformats.org/presentationml/2006/main" xmlns:r="http://schemas.openxmlformats.org/officeDocument/2006/relationships">
   <p:cSld>
     <p:spTree>
@@ -1105,7 +2428,7 @@
       <p:grpSpPr/>
       <p:sp>
         <p:nvSpPr>
-          <p:cNvPr id="3001" name="Shape 3001"/>
+          <p:cNvPr id="2" name="Rectangle 1"/>
           <p:cNvSpPr/>
           <p:nvPr/>
         </p:nvSpPr>
@@ -1120,12 +2443,36 @@
           <a:solidFill>
             <a:srgbClr val="000000"/>
           </a:solidFill>
-          <a:ln/>
-        </p:spPr>
-      </p:sp>
-      <p:sp>
-        <p:nvSpPr>
-          <p:cNvPr id="3002" name="Shape 3002"/>
+          <a:ln>
+            <a:noFill/>
+          </a:ln>
+          <a:effectLst/>
+        </p:spPr>
+        <p:style>
+          <a:lnRef idx="1">
+            <a:schemeClr val="accent1"/>
+          </a:lnRef>
+          <a:fillRef idx="3">
+            <a:schemeClr val="accent1"/>
+          </a:fillRef>
+          <a:effectRef idx="2">
+            <a:schemeClr val="accent1"/>
+          </a:effectRef>
+          <a:fontRef idx="minor">
+            <a:schemeClr val="lt1"/>
+          </a:fontRef>
+        </p:style>
+        <p:txBody>
+          <a:bodyPr rtlCol="0" anchor="ctr"/>
+          <a:lstStyle/>
+          <a:p>
+            <a:pPr algn="ctr"/>
+          </a:p>
+        </p:txBody>
+      </p:sp>
+      <p:sp>
+        <p:nvSpPr>
+          <p:cNvPr id="3" name="Rectangle 2"/>
           <p:cNvSpPr/>
           <p:nvPr/>
         </p:nvSpPr>
@@ -1140,12 +2487,36 @@
           <a:solidFill>
             <a:srgbClr val="ED6C23"/>
           </a:solidFill>
-          <a:ln/>
-        </p:spPr>
-      </p:sp>
-      <p:sp>
-        <p:nvSpPr>
-          <p:cNvPr id="3003" name="Shape 3003"/>
+          <a:ln>
+            <a:noFill/>
+          </a:ln>
+          <a:effectLst/>
+        </p:spPr>
+        <p:style>
+          <a:lnRef idx="1">
+            <a:schemeClr val="accent1"/>
+          </a:lnRef>
+          <a:fillRef idx="3">
+            <a:schemeClr val="accent1"/>
+          </a:fillRef>
+          <a:effectRef idx="2">
+            <a:schemeClr val="accent1"/>
+          </a:effectRef>
+          <a:fontRef idx="minor">
+            <a:schemeClr val="lt1"/>
+          </a:fontRef>
+        </p:style>
+        <p:txBody>
+          <a:bodyPr rtlCol="0" anchor="ctr"/>
+          <a:lstStyle/>
+          <a:p>
+            <a:pPr algn="ctr"/>
+          </a:p>
+        </p:txBody>
+      </p:sp>
+      <p:sp>
+        <p:nvSpPr>
+          <p:cNvPr id="4" name="Rectangle 3"/>
           <p:cNvSpPr/>
           <p:nvPr/>
         </p:nvSpPr>
@@ -1160,271 +2531,3155 @@
           <a:solidFill>
             <a:srgbClr val="ED6C23"/>
           </a:solidFill>
-          <a:ln/>
-        </p:spPr>
-      </p:sp>
-      <p:sp>
-        <p:nvSpPr>
-          <p:cNvPr id="3004" name="Shape 3004"/>
-          <p:cNvSpPr txBox="1"/>
-          <p:nvPr/>
-        </p:nvSpPr>
-        <p:spPr>
-          <a:xfrm>
-            <a:off x="365760" y="237744"/>
-            <a:ext cx="6400800" cy="237744"/>
-          </a:xfrm>
-          <a:prstGeom prst="rect">
-            <a:avLst/>
-          </a:prstGeom>
-          <a:noFill/>
-          <a:ln/>
-        </p:spPr>
-        <p:txBody>
-          <a:bodyPr wrap="square" lIns="0" tIns="0" rIns="0" bIns="0" rtlCol="0" anchor="t"/>
-          <a:lstStyle/>
-          <a:p>
-            <a:pPr algn="l" indent="0" marL="0">
-              <a:buNone/>
-            </a:pPr>
-            <a:r>
-              <a:rPr lang="en-US" sz="1000" b="1" dirty="0">
+          <a:ln>
+            <a:noFill/>
+          </a:ln>
+          <a:effectLst/>
+        </p:spPr>
+        <p:style>
+          <a:lnRef idx="1">
+            <a:schemeClr val="accent1"/>
+          </a:lnRef>
+          <a:fillRef idx="3">
+            <a:schemeClr val="accent1"/>
+          </a:fillRef>
+          <a:effectRef idx="2">
+            <a:schemeClr val="accent1"/>
+          </a:effectRef>
+          <a:fontRef idx="minor">
+            <a:schemeClr val="lt1"/>
+          </a:fontRef>
+        </p:style>
+        <p:txBody>
+          <a:bodyPr rtlCol="0" anchor="ctr"/>
+          <a:lstStyle/>
+          <a:p>
+            <a:pPr algn="ctr"/>
+          </a:p>
+        </p:txBody>
+      </p:sp>
+      <p:sp>
+        <p:nvSpPr>
+          <p:cNvPr id="5" name="TextBox 4"/>
+          <p:cNvSpPr txBox="1"/>
+          <p:nvPr/>
+        </p:nvSpPr>
+        <p:spPr>
+          <a:xfrm>
+            <a:off x="411480" y="274320"/>
+            <a:ext cx="7772400" cy="228600"/>
+          </a:xfrm>
+          <a:prstGeom prst="rect">
+            <a:avLst/>
+          </a:prstGeom>
+          <a:noFill/>
+        </p:spPr>
+        <p:txBody>
+          <a:bodyPr wrap="square" lIns="0" rIns="0" tIns="0" bIns="0" anchor="t">
+            <a:spAutoFit/>
+          </a:bodyPr>
+          <a:lstStyle/>
+          <a:p>
+            <a:pPr algn="l"/>
+            <a:r>
+              <a:rPr sz="1050" b="1" i="0">
                 <a:solidFill>
                   <a:srgbClr val="ED6C23"/>
                 </a:solidFill>
-                <a:latin typeface="Arial" pitchFamily="34" charset="0"/>
-                <a:ea typeface="Arial" pitchFamily="34" charset="-122"/>
-                <a:cs typeface="Arial" pitchFamily="34" charset="-120"/>
+                <a:latin typeface="Arial"/>
+              </a:rPr>
+              <a:t>1 · QUÉ ESTAMOS MIDIENDO</a:t>
+            </a:r>
+          </a:p>
+        </p:txBody>
+      </p:sp>
+      <p:sp>
+        <p:nvSpPr>
+          <p:cNvPr id="6" name="TextBox 5"/>
+          <p:cNvSpPr txBox="1"/>
+          <p:nvPr/>
+        </p:nvSpPr>
+        <p:spPr>
+          <a:xfrm>
+            <a:off x="411480" y="502920"/>
+            <a:ext cx="8321040" cy="502920"/>
+          </a:xfrm>
+          <a:prstGeom prst="rect">
+            <a:avLst/>
+          </a:prstGeom>
+          <a:noFill/>
+        </p:spPr>
+        <p:txBody>
+          <a:bodyPr wrap="square" lIns="0" rIns="0" tIns="0" bIns="0" anchor="t">
+            <a:spAutoFit/>
+          </a:bodyPr>
+          <a:lstStyle/>
+          <a:p>
+            <a:pPr algn="l"/>
+            <a:r>
+              <a:rPr sz="2400" b="1" i="0">
+                <a:solidFill>
+                  <a:srgbClr val="FFFFFF"/>
+                </a:solidFill>
+                <a:latin typeface="Arial"/>
+              </a:rPr>
+              <a:t>EL NÚMERO QUE SEGUIMOS CADA MES</a:t>
+            </a:r>
+          </a:p>
+        </p:txBody>
+      </p:sp>
+      <p:sp>
+        <p:nvSpPr>
+          <p:cNvPr id="7" name="TextBox 6"/>
+          <p:cNvSpPr txBox="1"/>
+          <p:nvPr/>
+        </p:nvSpPr>
+        <p:spPr>
+          <a:xfrm>
+            <a:off x="5120640" y="4773168"/>
+            <a:ext cx="3657600" cy="182880"/>
+          </a:xfrm>
+          <a:prstGeom prst="rect">
+            <a:avLst/>
+          </a:prstGeom>
+          <a:noFill/>
+        </p:spPr>
+        <p:txBody>
+          <a:bodyPr wrap="square" lIns="0" rIns="0" tIns="0" bIns="0" anchor="t">
+            <a:spAutoFit/>
+          </a:bodyPr>
+          <a:lstStyle/>
+          <a:p>
+            <a:pPr algn="r"/>
+            <a:r>
+              <a:rPr sz="750" b="0" i="0">
+                <a:solidFill>
+                  <a:srgbClr val="9A9A9A"/>
+                </a:solidFill>
+                <a:latin typeface="Arial"/>
               </a:rPr>
               <a:t>EQUIPO PRODUCCIÓN  ·  SEPTIEMBRE 2026</a:t>
             </a:r>
-            <a:endParaRPr lang="en-US" sz="1600" dirty="0"/>
-          </a:p>
-        </p:txBody>
-      </p:sp>
-      <p:sp>
-        <p:nvSpPr>
-          <p:cNvPr id="3005" name="Shape 3005"/>
-          <p:cNvSpPr txBox="1"/>
-          <p:nvPr/>
-        </p:nvSpPr>
-        <p:spPr>
-          <a:xfrm>
-            <a:off x="365760" y="457200"/>
-            <a:ext cx="8412480" cy="502920"/>
-          </a:xfrm>
-          <a:prstGeom prst="rect">
-            <a:avLst/>
-          </a:prstGeom>
-          <a:noFill/>
-          <a:ln/>
-        </p:spPr>
-        <p:txBody>
-          <a:bodyPr wrap="square" lIns="0" tIns="0" rIns="0" bIns="0" rtlCol="0" anchor="t"/>
-          <a:lstStyle/>
-          <a:p>
-            <a:pPr algn="l" indent="0" marL="0">
-              <a:buNone/>
-            </a:pPr>
-            <a:r>
-              <a:rPr lang="en-US" sz="2600" b="1" dirty="0">
+          </a:p>
+        </p:txBody>
+      </p:sp>
+      <p:sp>
+        <p:nvSpPr>
+          <p:cNvPr id="8" name="Rectangle 7"/>
+          <p:cNvSpPr/>
+          <p:nvPr/>
+        </p:nvSpPr>
+        <p:spPr>
+          <a:xfrm>
+            <a:off x="411480" y="1234440"/>
+            <a:ext cx="2331720" cy="960120"/>
+          </a:xfrm>
+          <a:prstGeom prst="rect">
+            <a:avLst/>
+          </a:prstGeom>
+          <a:solidFill>
+            <a:srgbClr val="2D2D2D"/>
+          </a:solidFill>
+          <a:ln>
+            <a:noFill/>
+          </a:ln>
+          <a:effectLst/>
+        </p:spPr>
+        <p:style>
+          <a:lnRef idx="1">
+            <a:schemeClr val="accent1"/>
+          </a:lnRef>
+          <a:fillRef idx="3">
+            <a:schemeClr val="accent1"/>
+          </a:fillRef>
+          <a:effectRef idx="2">
+            <a:schemeClr val="accent1"/>
+          </a:effectRef>
+          <a:fontRef idx="minor">
+            <a:schemeClr val="lt1"/>
+          </a:fontRef>
+        </p:style>
+        <p:txBody>
+          <a:bodyPr rtlCol="0" anchor="ctr"/>
+          <a:lstStyle/>
+          <a:p>
+            <a:pPr algn="ctr"/>
+          </a:p>
+        </p:txBody>
+      </p:sp>
+      <p:sp>
+        <p:nvSpPr>
+          <p:cNvPr id="9" name="Rectangle 8"/>
+          <p:cNvSpPr/>
+          <p:nvPr/>
+        </p:nvSpPr>
+        <p:spPr>
+          <a:xfrm>
+            <a:off x="411480" y="1234440"/>
+            <a:ext cx="2331720" cy="54864"/>
+          </a:xfrm>
+          <a:prstGeom prst="rect">
+            <a:avLst/>
+          </a:prstGeom>
+          <a:solidFill>
+            <a:srgbClr val="ED6C23"/>
+          </a:solidFill>
+          <a:ln>
+            <a:noFill/>
+          </a:ln>
+          <a:effectLst/>
+        </p:spPr>
+        <p:style>
+          <a:lnRef idx="1">
+            <a:schemeClr val="accent1"/>
+          </a:lnRef>
+          <a:fillRef idx="3">
+            <a:schemeClr val="accent1"/>
+          </a:fillRef>
+          <a:effectRef idx="2">
+            <a:schemeClr val="accent1"/>
+          </a:effectRef>
+          <a:fontRef idx="minor">
+            <a:schemeClr val="lt1"/>
+          </a:fontRef>
+        </p:style>
+        <p:txBody>
+          <a:bodyPr rtlCol="0" anchor="ctr"/>
+          <a:lstStyle/>
+          <a:p>
+            <a:pPr algn="ctr"/>
+          </a:p>
+        </p:txBody>
+      </p:sp>
+      <p:sp>
+        <p:nvSpPr>
+          <p:cNvPr id="10" name="TextBox 9"/>
+          <p:cNvSpPr txBox="1"/>
+          <p:nvPr/>
+        </p:nvSpPr>
+        <p:spPr>
+          <a:xfrm>
+            <a:off x="548640" y="1399032"/>
+            <a:ext cx="2057400" cy="228600"/>
+          </a:xfrm>
+          <a:prstGeom prst="rect">
+            <a:avLst/>
+          </a:prstGeom>
+          <a:noFill/>
+        </p:spPr>
+        <p:txBody>
+          <a:bodyPr wrap="square" lIns="0" rIns="0" tIns="0" bIns="0" anchor="t">
+            <a:spAutoFit/>
+          </a:bodyPr>
+          <a:lstStyle/>
+          <a:p>
+            <a:pPr algn="l"/>
+            <a:r>
+              <a:rPr sz="1100" b="1" i="0">
                 <a:solidFill>
                   <a:srgbClr val="FFFFFF"/>
                 </a:solidFill>
-                <a:latin typeface="Arial" pitchFamily="34" charset="0"/>
-                <a:ea typeface="Arial" pitchFamily="34" charset="-122"/>
-                <a:cs typeface="Arial" pitchFamily="34" charset="-120"/>
-              </a:rPr>
-              <a:t>¿CÓMO NOS FUE ESTE MES?</a:t>
-            </a:r>
-            <a:endParaRPr lang="en-US" sz="5200" dirty="0"/>
-          </a:p>
-        </p:txBody>
-      </p:sp>
-      <p:sp>
-        <p:nvSpPr>
-          <p:cNvPr id="3006" name="Shape 3006"/>
-          <p:cNvSpPr txBox="1"/>
-          <p:nvPr/>
-        </p:nvSpPr>
-        <p:spPr>
-          <a:xfrm>
-            <a:off x="365760" y="1024128"/>
-            <a:ext cx="2103120" cy="822960"/>
-          </a:xfrm>
-          <a:prstGeom prst="rect">
-            <a:avLst/>
-          </a:prstGeom>
-          <a:noFill/>
-          <a:ln/>
-        </p:spPr>
-        <p:txBody>
-          <a:bodyPr wrap="square" lIns="0" tIns="0" rIns="0" bIns="0" rtlCol="0" anchor="t"/>
-          <a:lstStyle/>
-          <a:p>
-            <a:pPr algn="l" indent="0" marL="0">
-              <a:buNone/>
-            </a:pPr>
-            <a:r>
-              <a:rPr lang="en-US" sz="5400" b="1" dirty="0">
+                <a:latin typeface="Arial"/>
+              </a:rPr>
+              <a:t>METROS REPROCESADOS</a:t>
+            </a:r>
+          </a:p>
+        </p:txBody>
+      </p:sp>
+      <p:sp>
+        <p:nvSpPr>
+          <p:cNvPr id="11" name="TextBox 10"/>
+          <p:cNvSpPr txBox="1"/>
+          <p:nvPr/>
+        </p:nvSpPr>
+        <p:spPr>
+          <a:xfrm>
+            <a:off x="548640" y="1673352"/>
+            <a:ext cx="2057400" cy="457200"/>
+          </a:xfrm>
+          <a:prstGeom prst="rect">
+            <a:avLst/>
+          </a:prstGeom>
+          <a:noFill/>
+        </p:spPr>
+        <p:txBody>
+          <a:bodyPr wrap="square" lIns="0" rIns="0" tIns="0" bIns="0" anchor="t">
+            <a:spAutoFit/>
+          </a:bodyPr>
+          <a:lstStyle/>
+          <a:p>
+            <a:pPr algn="l"/>
+            <a:r>
+              <a:rPr sz="950" b="0" i="0">
+                <a:solidFill>
+                  <a:srgbClr val="D0D0D0"/>
+                </a:solidFill>
+                <a:latin typeface="Arial"/>
+              </a:rPr>
+              <a:t>Lo que tuvimos que volver a imprimir en el mes.</a:t>
+            </a:r>
+          </a:p>
+        </p:txBody>
+      </p:sp>
+      <p:sp>
+        <p:nvSpPr>
+          <p:cNvPr id="12" name="Rectangle 11"/>
+          <p:cNvSpPr/>
+          <p:nvPr/>
+        </p:nvSpPr>
+        <p:spPr>
+          <a:xfrm>
+            <a:off x="3154680" y="1234440"/>
+            <a:ext cx="2697480" cy="960120"/>
+          </a:xfrm>
+          <a:prstGeom prst="rect">
+            <a:avLst/>
+          </a:prstGeom>
+          <a:solidFill>
+            <a:srgbClr val="2D2D2D"/>
+          </a:solidFill>
+          <a:ln>
+            <a:noFill/>
+          </a:ln>
+          <a:effectLst/>
+        </p:spPr>
+        <p:style>
+          <a:lnRef idx="1">
+            <a:schemeClr val="accent1"/>
+          </a:lnRef>
+          <a:fillRef idx="3">
+            <a:schemeClr val="accent1"/>
+          </a:fillRef>
+          <a:effectRef idx="2">
+            <a:schemeClr val="accent1"/>
+          </a:effectRef>
+          <a:fontRef idx="minor">
+            <a:schemeClr val="lt1"/>
+          </a:fontRef>
+        </p:style>
+        <p:txBody>
+          <a:bodyPr rtlCol="0" anchor="ctr"/>
+          <a:lstStyle/>
+          <a:p>
+            <a:pPr algn="ctr"/>
+          </a:p>
+        </p:txBody>
+      </p:sp>
+      <p:sp>
+        <p:nvSpPr>
+          <p:cNvPr id="13" name="Rectangle 12"/>
+          <p:cNvSpPr/>
+          <p:nvPr/>
+        </p:nvSpPr>
+        <p:spPr>
+          <a:xfrm>
+            <a:off x="3154680" y="1234440"/>
+            <a:ext cx="2697480" cy="54864"/>
+          </a:xfrm>
+          <a:prstGeom prst="rect">
+            <a:avLst/>
+          </a:prstGeom>
+          <a:solidFill>
+            <a:srgbClr val="4A4A4A"/>
+          </a:solidFill>
+          <a:ln>
+            <a:noFill/>
+          </a:ln>
+          <a:effectLst/>
+        </p:spPr>
+        <p:style>
+          <a:lnRef idx="1">
+            <a:schemeClr val="accent1"/>
+          </a:lnRef>
+          <a:fillRef idx="3">
+            <a:schemeClr val="accent1"/>
+          </a:fillRef>
+          <a:effectRef idx="2">
+            <a:schemeClr val="accent1"/>
+          </a:effectRef>
+          <a:fontRef idx="minor">
+            <a:schemeClr val="lt1"/>
+          </a:fontRef>
+        </p:style>
+        <p:txBody>
+          <a:bodyPr rtlCol="0" anchor="ctr"/>
+          <a:lstStyle/>
+          <a:p>
+            <a:pPr algn="ctr"/>
+          </a:p>
+        </p:txBody>
+      </p:sp>
+      <p:sp>
+        <p:nvSpPr>
+          <p:cNvPr id="14" name="TextBox 13"/>
+          <p:cNvSpPr txBox="1"/>
+          <p:nvPr/>
+        </p:nvSpPr>
+        <p:spPr>
+          <a:xfrm>
+            <a:off x="3291840" y="1399032"/>
+            <a:ext cx="2423160" cy="228600"/>
+          </a:xfrm>
+          <a:prstGeom prst="rect">
+            <a:avLst/>
+          </a:prstGeom>
+          <a:noFill/>
+        </p:spPr>
+        <p:txBody>
+          <a:bodyPr wrap="square" lIns="0" rIns="0" tIns="0" bIns="0" anchor="t">
+            <a:spAutoFit/>
+          </a:bodyPr>
+          <a:lstStyle/>
+          <a:p>
+            <a:pPr algn="l"/>
+            <a:r>
+              <a:rPr sz="1100" b="1" i="0">
+                <a:solidFill>
+                  <a:srgbClr val="FFFFFF"/>
+                </a:solidFill>
+                <a:latin typeface="Arial"/>
+              </a:rPr>
+              <a:t>TOTAL IMPRESO</a:t>
+            </a:r>
+          </a:p>
+        </p:txBody>
+      </p:sp>
+      <p:sp>
+        <p:nvSpPr>
+          <p:cNvPr id="15" name="TextBox 14"/>
+          <p:cNvSpPr txBox="1"/>
+          <p:nvPr/>
+        </p:nvSpPr>
+        <p:spPr>
+          <a:xfrm>
+            <a:off x="3291840" y="1673352"/>
+            <a:ext cx="2423160" cy="457200"/>
+          </a:xfrm>
+          <a:prstGeom prst="rect">
+            <a:avLst/>
+          </a:prstGeom>
+          <a:noFill/>
+        </p:spPr>
+        <p:txBody>
+          <a:bodyPr wrap="square" lIns="0" rIns="0" tIns="0" bIns="0" anchor="t">
+            <a:spAutoFit/>
+          </a:bodyPr>
+          <a:lstStyle/>
+          <a:p>
+            <a:pPr algn="l"/>
+            <a:r>
+              <a:rPr sz="950" b="0" i="0">
+                <a:solidFill>
+                  <a:srgbClr val="D0D0D0"/>
+                </a:solidFill>
+                <a:latin typeface="Arial"/>
+              </a:rPr>
+              <a:t>Metros de producción + metros reprocesados.</a:t>
+            </a:r>
+          </a:p>
+        </p:txBody>
+      </p:sp>
+      <p:sp>
+        <p:nvSpPr>
+          <p:cNvPr id="16" name="Rectangle 15"/>
+          <p:cNvSpPr/>
+          <p:nvPr/>
+        </p:nvSpPr>
+        <p:spPr>
+          <a:xfrm>
+            <a:off x="6263640" y="1234440"/>
+            <a:ext cx="2514600" cy="960120"/>
+          </a:xfrm>
+          <a:prstGeom prst="rect">
+            <a:avLst/>
+          </a:prstGeom>
+          <a:solidFill>
+            <a:srgbClr val="2D2D2D"/>
+          </a:solidFill>
+          <a:ln>
+            <a:noFill/>
+          </a:ln>
+          <a:effectLst/>
+        </p:spPr>
+        <p:style>
+          <a:lnRef idx="1">
+            <a:schemeClr val="accent1"/>
+          </a:lnRef>
+          <a:fillRef idx="3">
+            <a:schemeClr val="accent1"/>
+          </a:fillRef>
+          <a:effectRef idx="2">
+            <a:schemeClr val="accent1"/>
+          </a:effectRef>
+          <a:fontRef idx="minor">
+            <a:schemeClr val="lt1"/>
+          </a:fontRef>
+        </p:style>
+        <p:txBody>
+          <a:bodyPr rtlCol="0" anchor="ctr"/>
+          <a:lstStyle/>
+          <a:p>
+            <a:pPr algn="ctr"/>
+          </a:p>
+        </p:txBody>
+      </p:sp>
+      <p:sp>
+        <p:nvSpPr>
+          <p:cNvPr id="17" name="Rectangle 16"/>
+          <p:cNvSpPr/>
+          <p:nvPr/>
+        </p:nvSpPr>
+        <p:spPr>
+          <a:xfrm>
+            <a:off x="6263640" y="1234440"/>
+            <a:ext cx="2514600" cy="54864"/>
+          </a:xfrm>
+          <a:prstGeom prst="rect">
+            <a:avLst/>
+          </a:prstGeom>
+          <a:solidFill>
+            <a:srgbClr val="1B7F4A"/>
+          </a:solidFill>
+          <a:ln>
+            <a:noFill/>
+          </a:ln>
+          <a:effectLst/>
+        </p:spPr>
+        <p:style>
+          <a:lnRef idx="1">
+            <a:schemeClr val="accent1"/>
+          </a:lnRef>
+          <a:fillRef idx="3">
+            <a:schemeClr val="accent1"/>
+          </a:fillRef>
+          <a:effectRef idx="2">
+            <a:schemeClr val="accent1"/>
+          </a:effectRef>
+          <a:fontRef idx="minor">
+            <a:schemeClr val="lt1"/>
+          </a:fontRef>
+        </p:style>
+        <p:txBody>
+          <a:bodyPr rtlCol="0" anchor="ctr"/>
+          <a:lstStyle/>
+          <a:p>
+            <a:pPr algn="ctr"/>
+          </a:p>
+        </p:txBody>
+      </p:sp>
+      <p:sp>
+        <p:nvSpPr>
+          <p:cNvPr id="18" name="TextBox 17"/>
+          <p:cNvSpPr txBox="1"/>
+          <p:nvPr/>
+        </p:nvSpPr>
+        <p:spPr>
+          <a:xfrm>
+            <a:off x="6400800" y="1399032"/>
+            <a:ext cx="2240280" cy="228600"/>
+          </a:xfrm>
+          <a:prstGeom prst="rect">
+            <a:avLst/>
+          </a:prstGeom>
+          <a:noFill/>
+        </p:spPr>
+        <p:txBody>
+          <a:bodyPr wrap="square" lIns="0" rIns="0" tIns="0" bIns="0" anchor="t">
+            <a:spAutoFit/>
+          </a:bodyPr>
+          <a:lstStyle/>
+          <a:p>
+            <a:pPr algn="l"/>
+            <a:r>
+              <a:rPr sz="1100" b="1" i="0">
+                <a:solidFill>
+                  <a:srgbClr val="FFFFFF"/>
+                </a:solidFill>
+                <a:latin typeface="Arial"/>
+              </a:rPr>
+              <a:t>% DE REPROCESO</a:t>
+            </a:r>
+          </a:p>
+        </p:txBody>
+      </p:sp>
+      <p:sp>
+        <p:nvSpPr>
+          <p:cNvPr id="19" name="TextBox 18"/>
+          <p:cNvSpPr txBox="1"/>
+          <p:nvPr/>
+        </p:nvSpPr>
+        <p:spPr>
+          <a:xfrm>
+            <a:off x="6400800" y="1673352"/>
+            <a:ext cx="2240280" cy="457200"/>
+          </a:xfrm>
+          <a:prstGeom prst="rect">
+            <a:avLst/>
+          </a:prstGeom>
+          <a:noFill/>
+        </p:spPr>
+        <p:txBody>
+          <a:bodyPr wrap="square" lIns="0" rIns="0" tIns="0" bIns="0" anchor="t">
+            <a:spAutoFit/>
+          </a:bodyPr>
+          <a:lstStyle/>
+          <a:p>
+            <a:pPr algn="l"/>
+            <a:r>
+              <a:rPr sz="950" b="0" i="0">
+                <a:solidFill>
+                  <a:srgbClr val="D0D0D0"/>
+                </a:solidFill>
+                <a:latin typeface="Arial"/>
+              </a:rPr>
+              <a:t>De cada 100 metros que imprimimos, cuántos fueron para repetir.</a:t>
+            </a:r>
+          </a:p>
+        </p:txBody>
+      </p:sp>
+      <p:sp>
+        <p:nvSpPr>
+          <p:cNvPr id="20" name="TextBox 19"/>
+          <p:cNvSpPr txBox="1"/>
+          <p:nvPr/>
+        </p:nvSpPr>
+        <p:spPr>
+          <a:xfrm>
+            <a:off x="2743200" y="1463040"/>
+            <a:ext cx="411480" cy="457200"/>
+          </a:xfrm>
+          <a:prstGeom prst="rect">
+            <a:avLst/>
+          </a:prstGeom>
+          <a:noFill/>
+        </p:spPr>
+        <p:txBody>
+          <a:bodyPr wrap="square" lIns="0" rIns="0" tIns="0" bIns="0" anchor="t">
+            <a:spAutoFit/>
+          </a:bodyPr>
+          <a:lstStyle/>
+          <a:p>
+            <a:pPr algn="ctr"/>
+            <a:r>
+              <a:rPr sz="2600" b="1" i="0">
+                <a:solidFill>
+                  <a:srgbClr val="ED6C23"/>
+                </a:solidFill>
+                <a:latin typeface="Arial"/>
+              </a:rPr>
+              <a:t>÷</a:t>
+            </a:r>
+          </a:p>
+        </p:txBody>
+      </p:sp>
+      <p:sp>
+        <p:nvSpPr>
+          <p:cNvPr id="21" name="TextBox 20"/>
+          <p:cNvSpPr txBox="1"/>
+          <p:nvPr/>
+        </p:nvSpPr>
+        <p:spPr>
+          <a:xfrm>
+            <a:off x="5852160" y="1463040"/>
+            <a:ext cx="411480" cy="457200"/>
+          </a:xfrm>
+          <a:prstGeom prst="rect">
+            <a:avLst/>
+          </a:prstGeom>
+          <a:noFill/>
+        </p:spPr>
+        <p:txBody>
+          <a:bodyPr wrap="square" lIns="0" rIns="0" tIns="0" bIns="0" anchor="t">
+            <a:spAutoFit/>
+          </a:bodyPr>
+          <a:lstStyle/>
+          <a:p>
+            <a:pPr algn="ctr"/>
+            <a:r>
+              <a:rPr sz="2600" b="1" i="0">
+                <a:solidFill>
+                  <a:srgbClr val="ED6C23"/>
+                </a:solidFill>
+                <a:latin typeface="Arial"/>
+              </a:rPr>
+              <a:t>=</a:t>
+            </a:r>
+          </a:p>
+        </p:txBody>
+      </p:sp>
+      <p:sp>
+        <p:nvSpPr>
+          <p:cNvPr id="22" name="TextBox 21"/>
+          <p:cNvSpPr txBox="1"/>
+          <p:nvPr/>
+        </p:nvSpPr>
+        <p:spPr>
+          <a:xfrm>
+            <a:off x="411480" y="2331720"/>
+            <a:ext cx="8366760" cy="228600"/>
+          </a:xfrm>
+          <a:prstGeom prst="rect">
+            <a:avLst/>
+          </a:prstGeom>
+          <a:noFill/>
+        </p:spPr>
+        <p:txBody>
+          <a:bodyPr wrap="square" lIns="0" rIns="0" tIns="0" bIns="0" anchor="t">
+            <a:spAutoFit/>
+          </a:bodyPr>
+          <a:lstStyle/>
+          <a:p>
+            <a:pPr algn="l"/>
+            <a:r>
+              <a:rPr sz="950" b="0" i="1">
+                <a:solidFill>
+                  <a:srgbClr val="9A9A9A"/>
+                </a:solidFill>
+                <a:latin typeface="Arial"/>
+              </a:rPr>
+              <a:t>Ejemplo: si en un mes imprimimos 100 metros y 6 fueron para repetir, el reproceso es 6%.  Los datos salen del Control de Ploteo.</a:t>
+            </a:r>
+          </a:p>
+        </p:txBody>
+      </p:sp>
+      <p:sp>
+        <p:nvSpPr>
+          <p:cNvPr id="23" name="TextBox 22"/>
+          <p:cNvSpPr txBox="1"/>
+          <p:nvPr/>
+        </p:nvSpPr>
+        <p:spPr>
+          <a:xfrm>
+            <a:off x="411480" y="2724912"/>
+            <a:ext cx="5486400" cy="228600"/>
+          </a:xfrm>
+          <a:prstGeom prst="rect">
+            <a:avLst/>
+          </a:prstGeom>
+          <a:noFill/>
+        </p:spPr>
+        <p:txBody>
+          <a:bodyPr wrap="square" lIns="0" rIns="0" tIns="0" bIns="0" anchor="t">
+            <a:spAutoFit/>
+          </a:bodyPr>
+          <a:lstStyle/>
+          <a:p>
+            <a:pPr algn="l"/>
+            <a:r>
+              <a:rPr sz="1000" b="1" i="0">
+                <a:solidFill>
+                  <a:srgbClr val="ED6C23"/>
+                </a:solidFill>
+                <a:latin typeface="Arial"/>
+              </a:rPr>
+              <a:t>CÓMO LEER EL RESULTADO</a:t>
+            </a:r>
+          </a:p>
+        </p:txBody>
+      </p:sp>
+      <p:sp>
+        <p:nvSpPr>
+          <p:cNvPr id="24" name="Rectangle 23"/>
+          <p:cNvSpPr/>
+          <p:nvPr/>
+        </p:nvSpPr>
+        <p:spPr>
+          <a:xfrm>
+            <a:off x="411480" y="2999232"/>
+            <a:ext cx="1783080" cy="566928"/>
+          </a:xfrm>
+          <a:prstGeom prst="rect">
+            <a:avLst/>
+          </a:prstGeom>
+          <a:solidFill>
+            <a:srgbClr val="1B7F4A"/>
+          </a:solidFill>
+          <a:ln>
+            <a:noFill/>
+          </a:ln>
+          <a:effectLst/>
+        </p:spPr>
+        <p:style>
+          <a:lnRef idx="1">
+            <a:schemeClr val="accent1"/>
+          </a:lnRef>
+          <a:fillRef idx="3">
+            <a:schemeClr val="accent1"/>
+          </a:fillRef>
+          <a:effectRef idx="2">
+            <a:schemeClr val="accent1"/>
+          </a:effectRef>
+          <a:fontRef idx="minor">
+            <a:schemeClr val="lt1"/>
+          </a:fontRef>
+        </p:style>
+        <p:txBody>
+          <a:bodyPr rtlCol="0" anchor="ctr"/>
+          <a:lstStyle/>
+          <a:p>
+            <a:pPr algn="ctr"/>
+          </a:p>
+        </p:txBody>
+      </p:sp>
+      <p:sp>
+        <p:nvSpPr>
+          <p:cNvPr id="25" name="TextBox 24"/>
+          <p:cNvSpPr txBox="1"/>
+          <p:nvPr/>
+        </p:nvSpPr>
+        <p:spPr>
+          <a:xfrm>
+            <a:off x="521208" y="3044952"/>
+            <a:ext cx="1563624" cy="502920"/>
+          </a:xfrm>
+          <a:prstGeom prst="rect">
+            <a:avLst/>
+          </a:prstGeom>
+          <a:noFill/>
+        </p:spPr>
+        <p:txBody>
+          <a:bodyPr wrap="square" lIns="0" rIns="0" tIns="0" bIns="0" anchor="ctr">
+            <a:spAutoFit/>
+          </a:bodyPr>
+          <a:lstStyle/>
+          <a:p>
+            <a:pPr algn="l"/>
+            <a:r>
+              <a:rPr sz="1100" b="1" i="0">
+                <a:solidFill>
+                  <a:srgbClr val="FFFFFF"/>
+                </a:solidFill>
+                <a:latin typeface="Arial"/>
+              </a:rPr>
+              <a:t>VERDE</a:t>
+            </a:r>
+          </a:p>
+          <a:p>
+            <a:pPr algn="l"/>
+            <a:r>
+              <a:rPr sz="950" b="0" i="0">
+                <a:solidFill>
+                  <a:srgbClr val="FFFFFF"/>
+                </a:solidFill>
+                <a:latin typeface="Arial"/>
+              </a:rPr>
+              <a:t>menos de 7%</a:t>
+            </a:r>
+          </a:p>
+        </p:txBody>
+      </p:sp>
+      <p:sp>
+        <p:nvSpPr>
+          <p:cNvPr id="26" name="Rectangle 25"/>
+          <p:cNvSpPr/>
+          <p:nvPr/>
+        </p:nvSpPr>
+        <p:spPr>
+          <a:xfrm>
+            <a:off x="2286000" y="2999232"/>
+            <a:ext cx="1783080" cy="566928"/>
+          </a:xfrm>
+          <a:prstGeom prst="rect">
+            <a:avLst/>
+          </a:prstGeom>
+          <a:solidFill>
+            <a:srgbClr val="ED6C23"/>
+          </a:solidFill>
+          <a:ln>
+            <a:noFill/>
+          </a:ln>
+          <a:effectLst/>
+        </p:spPr>
+        <p:style>
+          <a:lnRef idx="1">
+            <a:schemeClr val="accent1"/>
+          </a:lnRef>
+          <a:fillRef idx="3">
+            <a:schemeClr val="accent1"/>
+          </a:fillRef>
+          <a:effectRef idx="2">
+            <a:schemeClr val="accent1"/>
+          </a:effectRef>
+          <a:fontRef idx="minor">
+            <a:schemeClr val="lt1"/>
+          </a:fontRef>
+        </p:style>
+        <p:txBody>
+          <a:bodyPr rtlCol="0" anchor="ctr"/>
+          <a:lstStyle/>
+          <a:p>
+            <a:pPr algn="ctr"/>
+          </a:p>
+        </p:txBody>
+      </p:sp>
+      <p:sp>
+        <p:nvSpPr>
+          <p:cNvPr id="27" name="TextBox 26"/>
+          <p:cNvSpPr txBox="1"/>
+          <p:nvPr/>
+        </p:nvSpPr>
+        <p:spPr>
+          <a:xfrm>
+            <a:off x="2395728" y="3044952"/>
+            <a:ext cx="1563624" cy="502920"/>
+          </a:xfrm>
+          <a:prstGeom prst="rect">
+            <a:avLst/>
+          </a:prstGeom>
+          <a:noFill/>
+        </p:spPr>
+        <p:txBody>
+          <a:bodyPr wrap="square" lIns="0" rIns="0" tIns="0" bIns="0" anchor="ctr">
+            <a:spAutoFit/>
+          </a:bodyPr>
+          <a:lstStyle/>
+          <a:p>
+            <a:pPr algn="l"/>
+            <a:r>
+              <a:rPr sz="1100" b="1" i="0">
+                <a:solidFill>
+                  <a:srgbClr val="000000"/>
+                </a:solidFill>
+                <a:latin typeface="Arial"/>
+              </a:rPr>
+              <a:t>NARANJA</a:t>
+            </a:r>
+          </a:p>
+          <a:p>
+            <a:pPr algn="l"/>
+            <a:r>
+              <a:rPr sz="950" b="0" i="0">
+                <a:solidFill>
+                  <a:srgbClr val="000000"/>
+                </a:solidFill>
+                <a:latin typeface="Arial"/>
+              </a:rPr>
+              <a:t>entre 7% y 10%</a:t>
+            </a:r>
+          </a:p>
+        </p:txBody>
+      </p:sp>
+      <p:sp>
+        <p:nvSpPr>
+          <p:cNvPr id="28" name="Rectangle 27"/>
+          <p:cNvSpPr/>
+          <p:nvPr/>
+        </p:nvSpPr>
+        <p:spPr>
+          <a:xfrm>
+            <a:off x="4160520" y="2999232"/>
+            <a:ext cx="1783080" cy="566928"/>
+          </a:xfrm>
+          <a:prstGeom prst="rect">
+            <a:avLst/>
+          </a:prstGeom>
+          <a:solidFill>
+            <a:srgbClr val="C0392B"/>
+          </a:solidFill>
+          <a:ln>
+            <a:noFill/>
+          </a:ln>
+          <a:effectLst/>
+        </p:spPr>
+        <p:style>
+          <a:lnRef idx="1">
+            <a:schemeClr val="accent1"/>
+          </a:lnRef>
+          <a:fillRef idx="3">
+            <a:schemeClr val="accent1"/>
+          </a:fillRef>
+          <a:effectRef idx="2">
+            <a:schemeClr val="accent1"/>
+          </a:effectRef>
+          <a:fontRef idx="minor">
+            <a:schemeClr val="lt1"/>
+          </a:fontRef>
+        </p:style>
+        <p:txBody>
+          <a:bodyPr rtlCol="0" anchor="ctr"/>
+          <a:lstStyle/>
+          <a:p>
+            <a:pPr algn="ctr"/>
+          </a:p>
+        </p:txBody>
+      </p:sp>
+      <p:sp>
+        <p:nvSpPr>
+          <p:cNvPr id="29" name="TextBox 28"/>
+          <p:cNvSpPr txBox="1"/>
+          <p:nvPr/>
+        </p:nvSpPr>
+        <p:spPr>
+          <a:xfrm>
+            <a:off x="4270248" y="3044952"/>
+            <a:ext cx="1563624" cy="502920"/>
+          </a:xfrm>
+          <a:prstGeom prst="rect">
+            <a:avLst/>
+          </a:prstGeom>
+          <a:noFill/>
+        </p:spPr>
+        <p:txBody>
+          <a:bodyPr wrap="square" lIns="0" rIns="0" tIns="0" bIns="0" anchor="ctr">
+            <a:spAutoFit/>
+          </a:bodyPr>
+          <a:lstStyle/>
+          <a:p>
+            <a:pPr algn="l"/>
+            <a:r>
+              <a:rPr sz="1100" b="1" i="0">
+                <a:solidFill>
+                  <a:srgbClr val="FFFFFF"/>
+                </a:solidFill>
+                <a:latin typeface="Arial"/>
+              </a:rPr>
+              <a:t>ROJO</a:t>
+            </a:r>
+          </a:p>
+          <a:p>
+            <a:pPr algn="l"/>
+            <a:r>
+              <a:rPr sz="950" b="0" i="0">
+                <a:solidFill>
+                  <a:srgbClr val="FFFFFF"/>
+                </a:solidFill>
+                <a:latin typeface="Arial"/>
+              </a:rPr>
+              <a:t>más de 10%</a:t>
+            </a:r>
+          </a:p>
+        </p:txBody>
+      </p:sp>
+      <p:sp>
+        <p:nvSpPr>
+          <p:cNvPr id="30" name="Rectangle 29"/>
+          <p:cNvSpPr/>
+          <p:nvPr/>
+        </p:nvSpPr>
+        <p:spPr>
+          <a:xfrm>
+            <a:off x="6080760" y="2999232"/>
+            <a:ext cx="2697480" cy="566928"/>
+          </a:xfrm>
+          <a:prstGeom prst="rect">
+            <a:avLst/>
+          </a:prstGeom>
+          <a:solidFill>
+            <a:srgbClr val="2D2D2D"/>
+          </a:solidFill>
+          <a:ln w="12700">
+            <a:solidFill>
+              <a:srgbClr val="ED6C23"/>
+            </a:solidFill>
+          </a:ln>
+          <a:effectLst/>
+        </p:spPr>
+        <p:style>
+          <a:lnRef idx="1">
+            <a:schemeClr val="accent1"/>
+          </a:lnRef>
+          <a:fillRef idx="3">
+            <a:schemeClr val="accent1"/>
+          </a:fillRef>
+          <a:effectRef idx="2">
+            <a:schemeClr val="accent1"/>
+          </a:effectRef>
+          <a:fontRef idx="minor">
+            <a:schemeClr val="lt1"/>
+          </a:fontRef>
+        </p:style>
+        <p:txBody>
+          <a:bodyPr rtlCol="0" anchor="ctr"/>
+          <a:lstStyle/>
+          <a:p>
+            <a:pPr algn="ctr"/>
+          </a:p>
+        </p:txBody>
+      </p:sp>
+      <p:sp>
+        <p:nvSpPr>
+          <p:cNvPr id="31" name="TextBox 30"/>
+          <p:cNvSpPr txBox="1"/>
+          <p:nvPr/>
+        </p:nvSpPr>
+        <p:spPr>
+          <a:xfrm>
+            <a:off x="6199632" y="3044952"/>
+            <a:ext cx="2468880" cy="502920"/>
+          </a:xfrm>
+          <a:prstGeom prst="rect">
+            <a:avLst/>
+          </a:prstGeom>
+          <a:noFill/>
+        </p:spPr>
+        <p:txBody>
+          <a:bodyPr wrap="square" lIns="0" rIns="0" tIns="0" bIns="0" anchor="ctr">
+            <a:spAutoFit/>
+          </a:bodyPr>
+          <a:lstStyle/>
+          <a:p>
+            <a:pPr algn="l"/>
+            <a:r>
+              <a:rPr sz="1100" b="1" i="0">
+                <a:solidFill>
+                  <a:srgbClr val="ED6C23"/>
+                </a:solidFill>
+                <a:latin typeface="Arial"/>
+              </a:rPr>
+              <a:t>META DICIEMBRE: 5%</a:t>
+            </a:r>
+          </a:p>
+          <a:p>
+            <a:pPr algn="l"/>
+            <a:r>
+              <a:rPr sz="950" b="0" i="0">
+                <a:solidFill>
+                  <a:srgbClr val="D0D0D0"/>
+                </a:solidFill>
+                <a:latin typeface="Arial"/>
+              </a:rPr>
+              <a:t>1 de cada 20 metros</a:t>
+            </a:r>
+          </a:p>
+        </p:txBody>
+      </p:sp>
+      <p:sp>
+        <p:nvSpPr>
+          <p:cNvPr id="32" name="Rectangle 31"/>
+          <p:cNvSpPr/>
+          <p:nvPr/>
+        </p:nvSpPr>
+        <p:spPr>
+          <a:xfrm>
+            <a:off x="411480" y="3794760"/>
+            <a:ext cx="8366760" cy="777240"/>
+          </a:xfrm>
+          <a:prstGeom prst="rect">
+            <a:avLst/>
+          </a:prstGeom>
+          <a:solidFill>
+            <a:srgbClr val="1E1E1E"/>
+          </a:solidFill>
+          <a:ln>
+            <a:noFill/>
+          </a:ln>
+          <a:effectLst/>
+        </p:spPr>
+        <p:style>
+          <a:lnRef idx="1">
+            <a:schemeClr val="accent1"/>
+          </a:lnRef>
+          <a:fillRef idx="3">
+            <a:schemeClr val="accent1"/>
+          </a:fillRef>
+          <a:effectRef idx="2">
+            <a:schemeClr val="accent1"/>
+          </a:effectRef>
+          <a:fontRef idx="minor">
+            <a:schemeClr val="lt1"/>
+          </a:fontRef>
+        </p:style>
+        <p:txBody>
+          <a:bodyPr rtlCol="0" anchor="ctr"/>
+          <a:lstStyle/>
+          <a:p>
+            <a:pPr algn="ctr"/>
+          </a:p>
+        </p:txBody>
+      </p:sp>
+      <p:sp>
+        <p:nvSpPr>
+          <p:cNvPr id="33" name="TextBox 32"/>
+          <p:cNvSpPr txBox="1"/>
+          <p:nvPr/>
+        </p:nvSpPr>
+        <p:spPr>
+          <a:xfrm>
+            <a:off x="594360" y="3886200"/>
+            <a:ext cx="8046720" cy="640080"/>
+          </a:xfrm>
+          <a:prstGeom prst="rect">
+            <a:avLst/>
+          </a:prstGeom>
+          <a:noFill/>
+        </p:spPr>
+        <p:txBody>
+          <a:bodyPr wrap="square" lIns="0" rIns="0" tIns="0" bIns="0" anchor="ctr">
+            <a:spAutoFit/>
+          </a:bodyPr>
+          <a:lstStyle/>
+          <a:p>
+            <a:pPr algn="l"/>
+            <a:r>
+              <a:rPr sz="1050" b="1" i="0">
+                <a:solidFill>
+                  <a:srgbClr val="ED6C23"/>
+                </a:solidFill>
+                <a:latin typeface="Arial"/>
+              </a:rPr>
+              <a:t>Y ADEMÁS: </a:t>
+            </a:r>
+            <a:r>
+              <a:rPr sz="1050" b="0" i="0">
+                <a:solidFill>
+                  <a:srgbClr val="D0D0D0"/>
+                </a:solidFill>
+                <a:latin typeface="Arial"/>
+              </a:rPr>
+              <a:t>contamos cada pedido de reimpresión del chat PENDIENTES PMK y en qué etapa nació el error (armado de mesa, sublimación, corte, confección, diseño). Eso nos dice dónde mirar.</a:t>
+            </a:r>
+          </a:p>
+        </p:txBody>
+      </p:sp>
+    </p:spTree>
+  </p:cSld>
+  <p:clrMapOvr>
+    <a:masterClrMapping/>
+  </p:clrMapOvr>
+</p:sld>
+</file>
+
+<file path=ppt/slides/slide11.xml><?xml version="1.0" encoding="utf-8"?>
+<p:sld xmlns:a="http://schemas.openxmlformats.org/drawingml/2006/main" xmlns:p="http://schemas.openxmlformats.org/presentationml/2006/main" xmlns:r="http://schemas.openxmlformats.org/officeDocument/2006/relationships">
+  <p:cSld>
+    <p:spTree>
+      <p:nvGrpSpPr>
+        <p:cNvPr id="1" name=""/>
+        <p:cNvGrpSpPr/>
+        <p:nvPr/>
+      </p:nvGrpSpPr>
+      <p:grpSpPr/>
+      <p:sp>
+        <p:nvSpPr>
+          <p:cNvPr id="2" name="Rectangle 1"/>
+          <p:cNvSpPr/>
+          <p:nvPr/>
+        </p:nvSpPr>
+        <p:spPr>
+          <a:xfrm>
+            <a:off x="0" y="0"/>
+            <a:ext cx="9144000" cy="5143500"/>
+          </a:xfrm>
+          <a:prstGeom prst="rect">
+            <a:avLst/>
+          </a:prstGeom>
+          <a:solidFill>
+            <a:srgbClr val="000000"/>
+          </a:solidFill>
+          <a:ln>
+            <a:noFill/>
+          </a:ln>
+          <a:effectLst/>
+        </p:spPr>
+        <p:style>
+          <a:lnRef idx="1">
+            <a:schemeClr val="accent1"/>
+          </a:lnRef>
+          <a:fillRef idx="3">
+            <a:schemeClr val="accent1"/>
+          </a:fillRef>
+          <a:effectRef idx="2">
+            <a:schemeClr val="accent1"/>
+          </a:effectRef>
+          <a:fontRef idx="minor">
+            <a:schemeClr val="lt1"/>
+          </a:fontRef>
+        </p:style>
+        <p:txBody>
+          <a:bodyPr rtlCol="0" anchor="ctr"/>
+          <a:lstStyle/>
+          <a:p>
+            <a:pPr algn="ctr"/>
+          </a:p>
+        </p:txBody>
+      </p:sp>
+      <p:sp>
+        <p:nvSpPr>
+          <p:cNvPr id="3" name="Rectangle 2"/>
+          <p:cNvSpPr/>
+          <p:nvPr/>
+        </p:nvSpPr>
+        <p:spPr>
+          <a:xfrm>
+            <a:off x="0" y="0"/>
+            <a:ext cx="109728" cy="5143500"/>
+          </a:xfrm>
+          <a:prstGeom prst="rect">
+            <a:avLst/>
+          </a:prstGeom>
+          <a:solidFill>
+            <a:srgbClr val="ED6C23"/>
+          </a:solidFill>
+          <a:ln>
+            <a:noFill/>
+          </a:ln>
+          <a:effectLst/>
+        </p:spPr>
+        <p:style>
+          <a:lnRef idx="1">
+            <a:schemeClr val="accent1"/>
+          </a:lnRef>
+          <a:fillRef idx="3">
+            <a:schemeClr val="accent1"/>
+          </a:fillRef>
+          <a:effectRef idx="2">
+            <a:schemeClr val="accent1"/>
+          </a:effectRef>
+          <a:fontRef idx="minor">
+            <a:schemeClr val="lt1"/>
+          </a:fontRef>
+        </p:style>
+        <p:txBody>
+          <a:bodyPr rtlCol="0" anchor="ctr"/>
+          <a:lstStyle/>
+          <a:p>
+            <a:pPr algn="ctr"/>
+          </a:p>
+        </p:txBody>
+      </p:sp>
+      <p:sp>
+        <p:nvSpPr>
+          <p:cNvPr id="4" name="Rectangle 3"/>
+          <p:cNvSpPr/>
+          <p:nvPr/>
+        </p:nvSpPr>
+        <p:spPr>
+          <a:xfrm>
+            <a:off x="109728" y="5070348"/>
+            <a:ext cx="9034272" cy="73152"/>
+          </a:xfrm>
+          <a:prstGeom prst="rect">
+            <a:avLst/>
+          </a:prstGeom>
+          <a:solidFill>
+            <a:srgbClr val="ED6C23"/>
+          </a:solidFill>
+          <a:ln>
+            <a:noFill/>
+          </a:ln>
+          <a:effectLst/>
+        </p:spPr>
+        <p:style>
+          <a:lnRef idx="1">
+            <a:schemeClr val="accent1"/>
+          </a:lnRef>
+          <a:fillRef idx="3">
+            <a:schemeClr val="accent1"/>
+          </a:fillRef>
+          <a:effectRef idx="2">
+            <a:schemeClr val="accent1"/>
+          </a:effectRef>
+          <a:fontRef idx="minor">
+            <a:schemeClr val="lt1"/>
+          </a:fontRef>
+        </p:style>
+        <p:txBody>
+          <a:bodyPr rtlCol="0" anchor="ctr"/>
+          <a:lstStyle/>
+          <a:p>
+            <a:pPr algn="ctr"/>
+          </a:p>
+        </p:txBody>
+      </p:sp>
+      <p:sp>
+        <p:nvSpPr>
+          <p:cNvPr id="5" name="TextBox 4"/>
+          <p:cNvSpPr txBox="1"/>
+          <p:nvPr/>
+        </p:nvSpPr>
+        <p:spPr>
+          <a:xfrm>
+            <a:off x="411480" y="274320"/>
+            <a:ext cx="7772400" cy="228600"/>
+          </a:xfrm>
+          <a:prstGeom prst="rect">
+            <a:avLst/>
+          </a:prstGeom>
+          <a:noFill/>
+        </p:spPr>
+        <p:txBody>
+          <a:bodyPr wrap="square" lIns="0" rIns="0" tIns="0" bIns="0" anchor="t">
+            <a:spAutoFit/>
+          </a:bodyPr>
+          <a:lstStyle/>
+          <a:p>
+            <a:pPr algn="l"/>
+            <a:r>
+              <a:rPr sz="1050" b="1" i="0">
+                <a:solidFill>
+                  <a:srgbClr val="ED6C23"/>
+                </a:solidFill>
+                <a:latin typeface="Arial"/>
+              </a:rPr>
+              <a:t>2 · CÓMO VENIMOS</a:t>
+            </a:r>
+          </a:p>
+        </p:txBody>
+      </p:sp>
+      <p:sp>
+        <p:nvSpPr>
+          <p:cNvPr id="6" name="TextBox 5"/>
+          <p:cNvSpPr txBox="1"/>
+          <p:nvPr/>
+        </p:nvSpPr>
+        <p:spPr>
+          <a:xfrm>
+            <a:off x="411480" y="502920"/>
+            <a:ext cx="8321040" cy="502920"/>
+          </a:xfrm>
+          <a:prstGeom prst="rect">
+            <a:avLst/>
+          </a:prstGeom>
+          <a:noFill/>
+        </p:spPr>
+        <p:txBody>
+          <a:bodyPr wrap="square" lIns="0" rIns="0" tIns="0" bIns="0" anchor="t">
+            <a:spAutoFit/>
+          </a:bodyPr>
+          <a:lstStyle/>
+          <a:p>
+            <a:pPr algn="l"/>
+            <a:r>
+              <a:rPr sz="2400" b="1" i="0">
+                <a:solidFill>
+                  <a:srgbClr val="FFFFFF"/>
+                </a:solidFill>
+                <a:latin typeface="Arial"/>
+              </a:rPr>
+              <a:t>EL HISTORIAL, MES A MES</a:t>
+            </a:r>
+          </a:p>
+        </p:txBody>
+      </p:sp>
+      <p:sp>
+        <p:nvSpPr>
+          <p:cNvPr id="7" name="TextBox 6"/>
+          <p:cNvSpPr txBox="1"/>
+          <p:nvPr/>
+        </p:nvSpPr>
+        <p:spPr>
+          <a:xfrm>
+            <a:off x="5120640" y="4773168"/>
+            <a:ext cx="3657600" cy="182880"/>
+          </a:xfrm>
+          <a:prstGeom prst="rect">
+            <a:avLst/>
+          </a:prstGeom>
+          <a:noFill/>
+        </p:spPr>
+        <p:txBody>
+          <a:bodyPr wrap="square" lIns="0" rIns="0" tIns="0" bIns="0" anchor="t">
+            <a:spAutoFit/>
+          </a:bodyPr>
+          <a:lstStyle/>
+          <a:p>
+            <a:pPr algn="r"/>
+            <a:r>
+              <a:rPr sz="750" b="0" i="0">
+                <a:solidFill>
+                  <a:srgbClr val="9A9A9A"/>
+                </a:solidFill>
+                <a:latin typeface="Arial"/>
+              </a:rPr>
+              <a:t>EQUIPO PRODUCCIÓN  ·  SEPTIEMBRE 2026</a:t>
+            </a:r>
+          </a:p>
+        </p:txBody>
+      </p:sp>
+      <p:sp>
+        <p:nvSpPr>
+          <p:cNvPr id="8" name="Rectangle 7"/>
+          <p:cNvSpPr/>
+          <p:nvPr/>
+        </p:nvSpPr>
+        <p:spPr>
+          <a:xfrm>
+            <a:off x="411480" y="1188720"/>
+            <a:ext cx="8366760" cy="384048"/>
+          </a:xfrm>
+          <a:prstGeom prst="rect">
+            <a:avLst/>
+          </a:prstGeom>
+          <a:solidFill>
+            <a:srgbClr val="ED6C23"/>
+          </a:solidFill>
+          <a:ln>
+            <a:noFill/>
+          </a:ln>
+          <a:effectLst/>
+        </p:spPr>
+        <p:style>
+          <a:lnRef idx="1">
+            <a:schemeClr val="accent1"/>
+          </a:lnRef>
+          <a:fillRef idx="3">
+            <a:schemeClr val="accent1"/>
+          </a:fillRef>
+          <a:effectRef idx="2">
+            <a:schemeClr val="accent1"/>
+          </a:effectRef>
+          <a:fontRef idx="minor">
+            <a:schemeClr val="lt1"/>
+          </a:fontRef>
+        </p:style>
+        <p:txBody>
+          <a:bodyPr rtlCol="0" anchor="ctr"/>
+          <a:lstStyle/>
+          <a:p>
+            <a:pPr algn="ctr"/>
+          </a:p>
+        </p:txBody>
+      </p:sp>
+      <p:sp>
+        <p:nvSpPr>
+          <p:cNvPr id="9" name="TextBox 8"/>
+          <p:cNvSpPr txBox="1"/>
+          <p:nvPr/>
+        </p:nvSpPr>
+        <p:spPr>
+          <a:xfrm>
+            <a:off x="457200" y="1188720"/>
+            <a:ext cx="1600200" cy="384048"/>
+          </a:xfrm>
+          <a:prstGeom prst="rect">
+            <a:avLst/>
+          </a:prstGeom>
+          <a:noFill/>
+        </p:spPr>
+        <p:txBody>
+          <a:bodyPr wrap="square" lIns="0" rIns="0" tIns="0" bIns="0" anchor="ctr">
+            <a:spAutoFit/>
+          </a:bodyPr>
+          <a:lstStyle/>
+          <a:p>
+            <a:pPr algn="ctr"/>
+            <a:r>
+              <a:rPr sz="900" b="1" i="0">
+                <a:solidFill>
+                  <a:srgbClr val="000000"/>
+                </a:solidFill>
+                <a:latin typeface="Arial"/>
+              </a:rPr>
+              <a:t>MES</a:t>
+            </a:r>
+          </a:p>
+        </p:txBody>
+      </p:sp>
+      <p:sp>
+        <p:nvSpPr>
+          <p:cNvPr id="10" name="TextBox 9"/>
+          <p:cNvSpPr txBox="1"/>
+          <p:nvPr/>
+        </p:nvSpPr>
+        <p:spPr>
+          <a:xfrm>
+            <a:off x="2148840" y="1188720"/>
+            <a:ext cx="1508760" cy="384048"/>
+          </a:xfrm>
+          <a:prstGeom prst="rect">
+            <a:avLst/>
+          </a:prstGeom>
+          <a:noFill/>
+        </p:spPr>
+        <p:txBody>
+          <a:bodyPr wrap="square" lIns="0" rIns="0" tIns="0" bIns="0" anchor="ctr">
+            <a:spAutoFit/>
+          </a:bodyPr>
+          <a:lstStyle/>
+          <a:p>
+            <a:pPr algn="ctr"/>
+            <a:r>
+              <a:rPr sz="900" b="1" i="0">
+                <a:solidFill>
+                  <a:srgbClr val="000000"/>
+                </a:solidFill>
+                <a:latin typeface="Arial"/>
+              </a:rPr>
+              <a:t>METROS IMPRESOS</a:t>
+            </a:r>
+          </a:p>
+        </p:txBody>
+      </p:sp>
+      <p:sp>
+        <p:nvSpPr>
+          <p:cNvPr id="11" name="TextBox 10"/>
+          <p:cNvSpPr txBox="1"/>
+          <p:nvPr/>
+        </p:nvSpPr>
+        <p:spPr>
+          <a:xfrm>
+            <a:off x="3749040" y="1188720"/>
+            <a:ext cx="1600200" cy="384048"/>
+          </a:xfrm>
+          <a:prstGeom prst="rect">
+            <a:avLst/>
+          </a:prstGeom>
+          <a:noFill/>
+        </p:spPr>
+        <p:txBody>
+          <a:bodyPr wrap="square" lIns="0" rIns="0" tIns="0" bIns="0" anchor="ctr">
+            <a:spAutoFit/>
+          </a:bodyPr>
+          <a:lstStyle/>
+          <a:p>
+            <a:pPr algn="ctr"/>
+            <a:r>
+              <a:rPr sz="900" b="1" i="0">
+                <a:solidFill>
+                  <a:srgbClr val="000000"/>
+                </a:solidFill>
+                <a:latin typeface="Arial"/>
+              </a:rPr>
+              <a:t>METROS REPROCESADOS</a:t>
+            </a:r>
+          </a:p>
+        </p:txBody>
+      </p:sp>
+      <p:sp>
+        <p:nvSpPr>
+          <p:cNvPr id="12" name="TextBox 11"/>
+          <p:cNvSpPr txBox="1"/>
+          <p:nvPr/>
+        </p:nvSpPr>
+        <p:spPr>
+          <a:xfrm>
+            <a:off x="5440680" y="1188720"/>
+            <a:ext cx="1463040" cy="384048"/>
+          </a:xfrm>
+          <a:prstGeom prst="rect">
+            <a:avLst/>
+          </a:prstGeom>
+          <a:noFill/>
+        </p:spPr>
+        <p:txBody>
+          <a:bodyPr wrap="square" lIns="0" rIns="0" tIns="0" bIns="0" anchor="ctr">
+            <a:spAutoFit/>
+          </a:bodyPr>
+          <a:lstStyle/>
+          <a:p>
+            <a:pPr algn="ctr"/>
+            <a:r>
+              <a:rPr sz="900" b="1" i="0">
+                <a:solidFill>
+                  <a:srgbClr val="000000"/>
+                </a:solidFill>
+                <a:latin typeface="Arial"/>
+              </a:rPr>
+              <a:t>% REPROCESO</a:t>
+            </a:r>
+          </a:p>
+        </p:txBody>
+      </p:sp>
+      <p:sp>
+        <p:nvSpPr>
+          <p:cNvPr id="13" name="TextBox 12"/>
+          <p:cNvSpPr txBox="1"/>
+          <p:nvPr/>
+        </p:nvSpPr>
+        <p:spPr>
+          <a:xfrm>
+            <a:off x="6995160" y="1188720"/>
+            <a:ext cx="1737360" cy="384048"/>
+          </a:xfrm>
+          <a:prstGeom prst="rect">
+            <a:avLst/>
+          </a:prstGeom>
+          <a:noFill/>
+        </p:spPr>
+        <p:txBody>
+          <a:bodyPr wrap="square" lIns="0" rIns="0" tIns="0" bIns="0" anchor="ctr">
+            <a:spAutoFit/>
+          </a:bodyPr>
+          <a:lstStyle/>
+          <a:p>
+            <a:pPr algn="ctr"/>
+            <a:r>
+              <a:rPr sz="900" b="1" i="0">
+                <a:solidFill>
+                  <a:srgbClr val="000000"/>
+                </a:solidFill>
+                <a:latin typeface="Arial"/>
+              </a:rPr>
+              <a:t>PEDIDOS EN EL CHAT</a:t>
+            </a:r>
+          </a:p>
+        </p:txBody>
+      </p:sp>
+      <p:sp>
+        <p:nvSpPr>
+          <p:cNvPr id="14" name="Rectangle 13"/>
+          <p:cNvSpPr/>
+          <p:nvPr/>
+        </p:nvSpPr>
+        <p:spPr>
+          <a:xfrm>
+            <a:off x="411480" y="1627632"/>
+            <a:ext cx="8366760" cy="402336"/>
+          </a:xfrm>
+          <a:prstGeom prst="rect">
+            <a:avLst/>
+          </a:prstGeom>
+          <a:solidFill>
+            <a:srgbClr val="2D2D2D"/>
+          </a:solidFill>
+          <a:ln>
+            <a:noFill/>
+          </a:ln>
+          <a:effectLst/>
+        </p:spPr>
+        <p:style>
+          <a:lnRef idx="1">
+            <a:schemeClr val="accent1"/>
+          </a:lnRef>
+          <a:fillRef idx="3">
+            <a:schemeClr val="accent1"/>
+          </a:fillRef>
+          <a:effectRef idx="2">
+            <a:schemeClr val="accent1"/>
+          </a:effectRef>
+          <a:fontRef idx="minor">
+            <a:schemeClr val="lt1"/>
+          </a:fontRef>
+        </p:style>
+        <p:txBody>
+          <a:bodyPr rtlCol="0" anchor="ctr"/>
+          <a:lstStyle/>
+          <a:p>
+            <a:pPr algn="ctr"/>
+          </a:p>
+        </p:txBody>
+      </p:sp>
+      <p:sp>
+        <p:nvSpPr>
+          <p:cNvPr id="15" name="TextBox 14"/>
+          <p:cNvSpPr txBox="1"/>
+          <p:nvPr/>
+        </p:nvSpPr>
+        <p:spPr>
+          <a:xfrm>
+            <a:off x="548640" y="1627632"/>
+            <a:ext cx="1508760" cy="402336"/>
+          </a:xfrm>
+          <a:prstGeom prst="rect">
+            <a:avLst/>
+          </a:prstGeom>
+          <a:noFill/>
+        </p:spPr>
+        <p:txBody>
+          <a:bodyPr wrap="square" lIns="0" rIns="0" tIns="0" bIns="0" anchor="ctr">
+            <a:spAutoFit/>
+          </a:bodyPr>
+          <a:lstStyle/>
+          <a:p>
+            <a:pPr algn="l"/>
+            <a:r>
+              <a:rPr sz="1100" b="1" i="0">
+                <a:solidFill>
+                  <a:srgbClr val="FFFFFF"/>
+                </a:solidFill>
+                <a:latin typeface="Arial"/>
+              </a:rPr>
+              <a:t>MAYO</a:t>
+            </a:r>
+          </a:p>
+        </p:txBody>
+      </p:sp>
+      <p:sp>
+        <p:nvSpPr>
+          <p:cNvPr id="16" name="TextBox 15"/>
+          <p:cNvSpPr txBox="1"/>
+          <p:nvPr/>
+        </p:nvSpPr>
+        <p:spPr>
+          <a:xfrm>
+            <a:off x="2148840" y="1627632"/>
+            <a:ext cx="1417320" cy="402336"/>
+          </a:xfrm>
+          <a:prstGeom prst="rect">
+            <a:avLst/>
+          </a:prstGeom>
+          <a:noFill/>
+        </p:spPr>
+        <p:txBody>
+          <a:bodyPr wrap="square" lIns="0" rIns="0" tIns="0" bIns="0" anchor="ctr">
+            <a:spAutoFit/>
+          </a:bodyPr>
+          <a:lstStyle/>
+          <a:p>
+            <a:pPr algn="ctr"/>
+            <a:r>
+              <a:rPr sz="1100" b="0" i="0">
+                <a:solidFill>
+                  <a:srgbClr val="D0D0D0"/>
+                </a:solidFill>
+                <a:latin typeface="Arial"/>
+              </a:rPr>
+              <a:t>1.890 m</a:t>
+            </a:r>
+          </a:p>
+        </p:txBody>
+      </p:sp>
+      <p:sp>
+        <p:nvSpPr>
+          <p:cNvPr id="17" name="TextBox 16"/>
+          <p:cNvSpPr txBox="1"/>
+          <p:nvPr/>
+        </p:nvSpPr>
+        <p:spPr>
+          <a:xfrm>
+            <a:off x="3749040" y="1627632"/>
+            <a:ext cx="1508760" cy="402336"/>
+          </a:xfrm>
+          <a:prstGeom prst="rect">
+            <a:avLst/>
+          </a:prstGeom>
+          <a:noFill/>
+        </p:spPr>
+        <p:txBody>
+          <a:bodyPr wrap="square" lIns="0" rIns="0" tIns="0" bIns="0" anchor="ctr">
+            <a:spAutoFit/>
+          </a:bodyPr>
+          <a:lstStyle/>
+          <a:p>
+            <a:pPr algn="ctr"/>
+            <a:r>
+              <a:rPr sz="1100" b="0" i="0">
+                <a:solidFill>
+                  <a:srgbClr val="D0D0D0"/>
+                </a:solidFill>
+                <a:latin typeface="Arial"/>
+              </a:rPr>
+              <a:t>133 m</a:t>
+            </a:r>
+          </a:p>
+        </p:txBody>
+      </p:sp>
+      <p:sp>
+        <p:nvSpPr>
+          <p:cNvPr id="18" name="TextBox 17"/>
+          <p:cNvSpPr txBox="1"/>
+          <p:nvPr/>
+        </p:nvSpPr>
+        <p:spPr>
+          <a:xfrm>
+            <a:off x="5440680" y="1627632"/>
+            <a:ext cx="1371600" cy="402336"/>
+          </a:xfrm>
+          <a:prstGeom prst="rect">
+            <a:avLst/>
+          </a:prstGeom>
+          <a:noFill/>
+        </p:spPr>
+        <p:txBody>
+          <a:bodyPr wrap="square" lIns="0" rIns="0" tIns="0" bIns="0" anchor="ctr">
+            <a:spAutoFit/>
+          </a:bodyPr>
+          <a:lstStyle/>
+          <a:p>
+            <a:pPr algn="ctr"/>
+            <a:r>
+              <a:rPr sz="1200" b="1" i="0">
                 <a:solidFill>
                   <a:srgbClr val="27AE60"/>
                 </a:solidFill>
-                <a:latin typeface="Arial" pitchFamily="34" charset="0"/>
-                <a:ea typeface="Arial" pitchFamily="34" charset="-122"/>
-                <a:cs typeface="Arial" pitchFamily="34" charset="-120"/>
-              </a:rPr>
-              <a:t>5,7%</a:t>
-            </a:r>
-            <a:endParaRPr lang="en-US" sz="2200" dirty="0"/>
-          </a:p>
-        </p:txBody>
-      </p:sp>
-      <p:sp>
-        <p:nvSpPr>
-          <p:cNvPr id="3007" name="Shape 3007"/>
-          <p:cNvSpPr txBox="1"/>
-          <p:nvPr/>
-        </p:nvSpPr>
-        <p:spPr>
-          <a:xfrm>
-            <a:off x="2395728" y="1188720"/>
-            <a:ext cx="1920240" cy="566928"/>
-          </a:xfrm>
-          <a:prstGeom prst="rect">
-            <a:avLst/>
-          </a:prstGeom>
-          <a:noFill/>
-          <a:ln/>
-        </p:spPr>
-        <p:txBody>
-          <a:bodyPr wrap="square" lIns="0" tIns="0" rIns="0" bIns="0" rtlCol="0" anchor="t"/>
-          <a:lstStyle/>
-          <a:p>
-            <a:pPr algn="l" indent="0" marL="0">
-              <a:buNone/>
-            </a:pPr>
-            <a:r>
-              <a:rPr lang="en-US" sz="1100" b="1" dirty="0">
+                <a:latin typeface="Arial"/>
+              </a:rPr>
+              <a:t>6,6%</a:t>
+            </a:r>
+          </a:p>
+        </p:txBody>
+      </p:sp>
+      <p:sp>
+        <p:nvSpPr>
+          <p:cNvPr id="19" name="TextBox 18"/>
+          <p:cNvSpPr txBox="1"/>
+          <p:nvPr/>
+        </p:nvSpPr>
+        <p:spPr>
+          <a:xfrm>
+            <a:off x="6995160" y="1627632"/>
+            <a:ext cx="1645920" cy="402336"/>
+          </a:xfrm>
+          <a:prstGeom prst="rect">
+            <a:avLst/>
+          </a:prstGeom>
+          <a:noFill/>
+        </p:spPr>
+        <p:txBody>
+          <a:bodyPr wrap="square" lIns="0" rIns="0" tIns="0" bIns="0" anchor="ctr">
+            <a:spAutoFit/>
+          </a:bodyPr>
+          <a:lstStyle/>
+          <a:p>
+            <a:pPr algn="ctr"/>
+            <a:r>
+              <a:rPr sz="1100" b="0" i="0">
+                <a:solidFill>
+                  <a:srgbClr val="D0D0D0"/>
+                </a:solidFill>
+                <a:latin typeface="Arial"/>
+              </a:rPr>
+              <a:t>25</a:t>
+            </a:r>
+          </a:p>
+        </p:txBody>
+      </p:sp>
+      <p:sp>
+        <p:nvSpPr>
+          <p:cNvPr id="20" name="Rectangle 19"/>
+          <p:cNvSpPr/>
+          <p:nvPr/>
+        </p:nvSpPr>
+        <p:spPr>
+          <a:xfrm>
+            <a:off x="411480" y="2066544"/>
+            <a:ext cx="8366760" cy="402336"/>
+          </a:xfrm>
+          <a:prstGeom prst="rect">
+            <a:avLst/>
+          </a:prstGeom>
+          <a:solidFill>
+            <a:srgbClr val="1E1E1E"/>
+          </a:solidFill>
+          <a:ln>
+            <a:noFill/>
+          </a:ln>
+          <a:effectLst/>
+        </p:spPr>
+        <p:style>
+          <a:lnRef idx="1">
+            <a:schemeClr val="accent1"/>
+          </a:lnRef>
+          <a:fillRef idx="3">
+            <a:schemeClr val="accent1"/>
+          </a:fillRef>
+          <a:effectRef idx="2">
+            <a:schemeClr val="accent1"/>
+          </a:effectRef>
+          <a:fontRef idx="minor">
+            <a:schemeClr val="lt1"/>
+          </a:fontRef>
+        </p:style>
+        <p:txBody>
+          <a:bodyPr rtlCol="0" anchor="ctr"/>
+          <a:lstStyle/>
+          <a:p>
+            <a:pPr algn="ctr"/>
+          </a:p>
+        </p:txBody>
+      </p:sp>
+      <p:sp>
+        <p:nvSpPr>
+          <p:cNvPr id="21" name="TextBox 20"/>
+          <p:cNvSpPr txBox="1"/>
+          <p:nvPr/>
+        </p:nvSpPr>
+        <p:spPr>
+          <a:xfrm>
+            <a:off x="548640" y="2066544"/>
+            <a:ext cx="1508760" cy="402336"/>
+          </a:xfrm>
+          <a:prstGeom prst="rect">
+            <a:avLst/>
+          </a:prstGeom>
+          <a:noFill/>
+        </p:spPr>
+        <p:txBody>
+          <a:bodyPr wrap="square" lIns="0" rIns="0" tIns="0" bIns="0" anchor="ctr">
+            <a:spAutoFit/>
+          </a:bodyPr>
+          <a:lstStyle/>
+          <a:p>
+            <a:pPr algn="l"/>
+            <a:r>
+              <a:rPr sz="1100" b="1" i="0">
                 <a:solidFill>
                   <a:srgbClr val="FFFFFF"/>
                 </a:solidFill>
-                <a:latin typeface="Arial" pitchFamily="34" charset="0"/>
-                <a:ea typeface="Arial" pitchFamily="34" charset="-122"/>
-                <a:cs typeface="Arial" pitchFamily="34" charset="-120"/>
-              </a:rPr>
-              <a:t>DE REPROCESO</a:t>
-            </a:r>
-            <a:endParaRPr lang="en-US" sz="750" dirty="0"/>
-          </a:p>
-          <a:p>
-            <a:pPr algn="l" indent="0" marL="0">
-              <a:buNone/>
-            </a:pPr>
-            <a:r>
-              <a:rPr lang="en-US" sz="950" b="1" dirty="0">
-                <a:solidFill>
-                  <a:srgbClr val="27AE60"/>
-                </a:solidFill>
-                <a:latin typeface="Arial" pitchFamily="34" charset="0"/>
-                <a:ea typeface="Arial" pitchFamily="34" charset="-122"/>
-                <a:cs typeface="Arial" pitchFamily="34" charset="-120"/>
-              </a:rPr>
-              <a:t>Meta del mes: ≤11%  ✓</a:t>
-            </a:r>
-            <a:endParaRPr lang="en-US" sz="750" dirty="0"/>
-          </a:p>
-        </p:txBody>
-      </p:sp>
-      <p:sp>
-        <p:nvSpPr>
-          <p:cNvPr id="3008" name="Shape 3008"/>
-          <p:cNvSpPr txBox="1"/>
-          <p:nvPr/>
-        </p:nvSpPr>
-        <p:spPr>
-          <a:xfrm>
-            <a:off x="365760" y="1883664"/>
-            <a:ext cx="3977640" cy="420624"/>
-          </a:xfrm>
-          <a:prstGeom prst="rect">
-            <a:avLst/>
-          </a:prstGeom>
-          <a:noFill/>
-          <a:ln/>
-        </p:spPr>
-        <p:txBody>
-          <a:bodyPr wrap="square" lIns="0" tIns="0" rIns="0" bIns="0" rtlCol="0" anchor="t"/>
-          <a:lstStyle/>
-          <a:p>
-            <a:pPr algn="l" indent="0" marL="0">
-              <a:buNone/>
-            </a:pPr>
-            <a:r>
-              <a:rPr lang="en-US" sz="1050" dirty="0">
+                <a:latin typeface="Arial"/>
+              </a:rPr>
+              <a:t>JUNIO</a:t>
+            </a:r>
+          </a:p>
+        </p:txBody>
+      </p:sp>
+      <p:sp>
+        <p:nvSpPr>
+          <p:cNvPr id="22" name="TextBox 21"/>
+          <p:cNvSpPr txBox="1"/>
+          <p:nvPr/>
+        </p:nvSpPr>
+        <p:spPr>
+          <a:xfrm>
+            <a:off x="2148840" y="2066544"/>
+            <a:ext cx="1417320" cy="402336"/>
+          </a:xfrm>
+          <a:prstGeom prst="rect">
+            <a:avLst/>
+          </a:prstGeom>
+          <a:noFill/>
+        </p:spPr>
+        <p:txBody>
+          <a:bodyPr wrap="square" lIns="0" rIns="0" tIns="0" bIns="0" anchor="ctr">
+            <a:spAutoFit/>
+          </a:bodyPr>
+          <a:lstStyle/>
+          <a:p>
+            <a:pPr algn="ctr"/>
+            <a:r>
+              <a:rPr sz="1100" b="0" i="0">
+                <a:solidFill>
+                  <a:srgbClr val="D0D0D0"/>
+                </a:solidFill>
+                <a:latin typeface="Arial"/>
+              </a:rPr>
+              <a:t>1.864 m</a:t>
+            </a:r>
+          </a:p>
+        </p:txBody>
+      </p:sp>
+      <p:sp>
+        <p:nvSpPr>
+          <p:cNvPr id="23" name="TextBox 22"/>
+          <p:cNvSpPr txBox="1"/>
+          <p:nvPr/>
+        </p:nvSpPr>
+        <p:spPr>
+          <a:xfrm>
+            <a:off x="3749040" y="2066544"/>
+            <a:ext cx="1508760" cy="402336"/>
+          </a:xfrm>
+          <a:prstGeom prst="rect">
+            <a:avLst/>
+          </a:prstGeom>
+          <a:noFill/>
+        </p:spPr>
+        <p:txBody>
+          <a:bodyPr wrap="square" lIns="0" rIns="0" tIns="0" bIns="0" anchor="ctr">
+            <a:spAutoFit/>
+          </a:bodyPr>
+          <a:lstStyle/>
+          <a:p>
+            <a:pPr algn="ctr"/>
+            <a:r>
+              <a:rPr sz="1100" b="0" i="0">
+                <a:solidFill>
+                  <a:srgbClr val="D0D0D0"/>
+                </a:solidFill>
+                <a:latin typeface="Arial"/>
+              </a:rPr>
+              <a:t>149 m</a:t>
+            </a:r>
+          </a:p>
+        </p:txBody>
+      </p:sp>
+      <p:sp>
+        <p:nvSpPr>
+          <p:cNvPr id="24" name="TextBox 23"/>
+          <p:cNvSpPr txBox="1"/>
+          <p:nvPr/>
+        </p:nvSpPr>
+        <p:spPr>
+          <a:xfrm>
+            <a:off x="5440680" y="2066544"/>
+            <a:ext cx="1371600" cy="402336"/>
+          </a:xfrm>
+          <a:prstGeom prst="rect">
+            <a:avLst/>
+          </a:prstGeom>
+          <a:noFill/>
+        </p:spPr>
+        <p:txBody>
+          <a:bodyPr wrap="square" lIns="0" rIns="0" tIns="0" bIns="0" anchor="ctr">
+            <a:spAutoFit/>
+          </a:bodyPr>
+          <a:lstStyle/>
+          <a:p>
+            <a:pPr algn="ctr"/>
+            <a:r>
+              <a:rPr sz="1200" b="1" i="0">
+                <a:solidFill>
+                  <a:srgbClr val="ED6C23"/>
+                </a:solidFill>
+                <a:latin typeface="Arial"/>
+              </a:rPr>
+              <a:t>7,4%</a:t>
+            </a:r>
+          </a:p>
+        </p:txBody>
+      </p:sp>
+      <p:sp>
+        <p:nvSpPr>
+          <p:cNvPr id="25" name="TextBox 24"/>
+          <p:cNvSpPr txBox="1"/>
+          <p:nvPr/>
+        </p:nvSpPr>
+        <p:spPr>
+          <a:xfrm>
+            <a:off x="6995160" y="2066544"/>
+            <a:ext cx="1645920" cy="402336"/>
+          </a:xfrm>
+          <a:prstGeom prst="rect">
+            <a:avLst/>
+          </a:prstGeom>
+          <a:noFill/>
+        </p:spPr>
+        <p:txBody>
+          <a:bodyPr wrap="square" lIns="0" rIns="0" tIns="0" bIns="0" anchor="ctr">
+            <a:spAutoFit/>
+          </a:bodyPr>
+          <a:lstStyle/>
+          <a:p>
+            <a:pPr algn="ctr"/>
+            <a:r>
+              <a:rPr sz="1100" b="0" i="0">
+                <a:solidFill>
+                  <a:srgbClr val="D0D0D0"/>
+                </a:solidFill>
+                <a:latin typeface="Arial"/>
+              </a:rPr>
+              <a:t>55</a:t>
+            </a:r>
+          </a:p>
+        </p:txBody>
+      </p:sp>
+      <p:sp>
+        <p:nvSpPr>
+          <p:cNvPr id="26" name="Rectangle 25"/>
+          <p:cNvSpPr/>
+          <p:nvPr/>
+        </p:nvSpPr>
+        <p:spPr>
+          <a:xfrm>
+            <a:off x="411480" y="2505456"/>
+            <a:ext cx="8366760" cy="402336"/>
+          </a:xfrm>
+          <a:prstGeom prst="rect">
+            <a:avLst/>
+          </a:prstGeom>
+          <a:solidFill>
+            <a:srgbClr val="2D2D2D"/>
+          </a:solidFill>
+          <a:ln>
+            <a:noFill/>
+          </a:ln>
+          <a:effectLst/>
+        </p:spPr>
+        <p:style>
+          <a:lnRef idx="1">
+            <a:schemeClr val="accent1"/>
+          </a:lnRef>
+          <a:fillRef idx="3">
+            <a:schemeClr val="accent1"/>
+          </a:fillRef>
+          <a:effectRef idx="2">
+            <a:schemeClr val="accent1"/>
+          </a:effectRef>
+          <a:fontRef idx="minor">
+            <a:schemeClr val="lt1"/>
+          </a:fontRef>
+        </p:style>
+        <p:txBody>
+          <a:bodyPr rtlCol="0" anchor="ctr"/>
+          <a:lstStyle/>
+          <a:p>
+            <a:pPr algn="ctr"/>
+          </a:p>
+        </p:txBody>
+      </p:sp>
+      <p:sp>
+        <p:nvSpPr>
+          <p:cNvPr id="27" name="TextBox 26"/>
+          <p:cNvSpPr txBox="1"/>
+          <p:nvPr/>
+        </p:nvSpPr>
+        <p:spPr>
+          <a:xfrm>
+            <a:off x="548640" y="2505456"/>
+            <a:ext cx="1508760" cy="402336"/>
+          </a:xfrm>
+          <a:prstGeom prst="rect">
+            <a:avLst/>
+          </a:prstGeom>
+          <a:noFill/>
+        </p:spPr>
+        <p:txBody>
+          <a:bodyPr wrap="square" lIns="0" rIns="0" tIns="0" bIns="0" anchor="ctr">
+            <a:spAutoFit/>
+          </a:bodyPr>
+          <a:lstStyle/>
+          <a:p>
+            <a:pPr algn="l"/>
+            <a:r>
+              <a:rPr sz="1100" b="1" i="0">
                 <a:solidFill>
                   <a:srgbClr val="FFFFFF"/>
                 </a:solidFill>
-                <a:latin typeface="Arial" pitchFamily="34" charset="0"/>
-                <a:ea typeface="Arial" pitchFamily="34" charset="-122"/>
-                <a:cs typeface="Arial" pitchFamily="34" charset="-120"/>
-              </a:rPr>
-              <a:t>De cada 100 metros que imprimimos, menos de 6 fueron para repetir. En agosto eran 14.</a:t>
-            </a:r>
-            <a:endParaRPr lang="en-US" sz="800" dirty="0"/>
-          </a:p>
-        </p:txBody>
-      </p:sp>
-      <p:sp>
-        <p:nvSpPr>
-          <p:cNvPr id="3009" name="Shape 3009"/>
-          <p:cNvSpPr txBox="1"/>
-          <p:nvPr/>
-        </p:nvSpPr>
-        <p:spPr>
-          <a:xfrm>
-            <a:off x="365760" y="2377440"/>
-            <a:ext cx="3931920" cy="182880"/>
-          </a:xfrm>
-          <a:prstGeom prst="rect">
-            <a:avLst/>
-          </a:prstGeom>
-          <a:noFill/>
-          <a:ln/>
-        </p:spPr>
-        <p:txBody>
-          <a:bodyPr wrap="square" lIns="0" tIns="0" rIns="0" bIns="0" rtlCol="0" anchor="t"/>
-          <a:lstStyle/>
-          <a:p>
-            <a:pPr algn="l" indent="0" marL="0">
-              <a:buNone/>
-            </a:pPr>
-            <a:r>
-              <a:rPr lang="en-US" sz="750" b="1" dirty="0">
+                <a:latin typeface="Arial"/>
+              </a:rPr>
+              <a:t>JULIO*</a:t>
+            </a:r>
+          </a:p>
+        </p:txBody>
+      </p:sp>
+      <p:sp>
+        <p:nvSpPr>
+          <p:cNvPr id="28" name="TextBox 27"/>
+          <p:cNvSpPr txBox="1"/>
+          <p:nvPr/>
+        </p:nvSpPr>
+        <p:spPr>
+          <a:xfrm>
+            <a:off x="2148840" y="2505456"/>
+            <a:ext cx="1417320" cy="402336"/>
+          </a:xfrm>
+          <a:prstGeom prst="rect">
+            <a:avLst/>
+          </a:prstGeom>
+          <a:noFill/>
+        </p:spPr>
+        <p:txBody>
+          <a:bodyPr wrap="square" lIns="0" rIns="0" tIns="0" bIns="0" anchor="ctr">
+            <a:spAutoFit/>
+          </a:bodyPr>
+          <a:lstStyle/>
+          <a:p>
+            <a:pPr algn="ctr"/>
+            <a:r>
+              <a:rPr sz="1100" b="0" i="0">
+                <a:solidFill>
+                  <a:srgbClr val="D0D0D0"/>
+                </a:solidFill>
+                <a:latin typeface="Arial"/>
+              </a:rPr>
+              <a:t>1.901 m</a:t>
+            </a:r>
+          </a:p>
+        </p:txBody>
+      </p:sp>
+      <p:sp>
+        <p:nvSpPr>
+          <p:cNvPr id="29" name="TextBox 28"/>
+          <p:cNvSpPr txBox="1"/>
+          <p:nvPr/>
+        </p:nvSpPr>
+        <p:spPr>
+          <a:xfrm>
+            <a:off x="3749040" y="2505456"/>
+            <a:ext cx="1508760" cy="402336"/>
+          </a:xfrm>
+          <a:prstGeom prst="rect">
+            <a:avLst/>
+          </a:prstGeom>
+          <a:noFill/>
+        </p:spPr>
+        <p:txBody>
+          <a:bodyPr wrap="square" lIns="0" rIns="0" tIns="0" bIns="0" anchor="ctr">
+            <a:spAutoFit/>
+          </a:bodyPr>
+          <a:lstStyle/>
+          <a:p>
+            <a:pPr algn="ctr"/>
+            <a:r>
+              <a:rPr sz="1100" b="0" i="0">
+                <a:solidFill>
+                  <a:srgbClr val="D0D0D0"/>
+                </a:solidFill>
+                <a:latin typeface="Arial"/>
+              </a:rPr>
+              <a:t>245 m</a:t>
+            </a:r>
+          </a:p>
+        </p:txBody>
+      </p:sp>
+      <p:sp>
+        <p:nvSpPr>
+          <p:cNvPr id="30" name="TextBox 29"/>
+          <p:cNvSpPr txBox="1"/>
+          <p:nvPr/>
+        </p:nvSpPr>
+        <p:spPr>
+          <a:xfrm>
+            <a:off x="5440680" y="2505456"/>
+            <a:ext cx="1371600" cy="402336"/>
+          </a:xfrm>
+          <a:prstGeom prst="rect">
+            <a:avLst/>
+          </a:prstGeom>
+          <a:noFill/>
+        </p:spPr>
+        <p:txBody>
+          <a:bodyPr wrap="square" lIns="0" rIns="0" tIns="0" bIns="0" anchor="ctr">
+            <a:spAutoFit/>
+          </a:bodyPr>
+          <a:lstStyle/>
+          <a:p>
+            <a:pPr algn="ctr"/>
+            <a:r>
+              <a:rPr sz="1200" b="1" i="0">
+                <a:solidFill>
+                  <a:srgbClr val="E74C3C"/>
+                </a:solidFill>
+                <a:latin typeface="Arial"/>
+              </a:rPr>
+              <a:t>11,4%</a:t>
+            </a:r>
+          </a:p>
+        </p:txBody>
+      </p:sp>
+      <p:sp>
+        <p:nvSpPr>
+          <p:cNvPr id="31" name="TextBox 30"/>
+          <p:cNvSpPr txBox="1"/>
+          <p:nvPr/>
+        </p:nvSpPr>
+        <p:spPr>
+          <a:xfrm>
+            <a:off x="6995160" y="2505456"/>
+            <a:ext cx="1645920" cy="402336"/>
+          </a:xfrm>
+          <a:prstGeom prst="rect">
+            <a:avLst/>
+          </a:prstGeom>
+          <a:noFill/>
+        </p:spPr>
+        <p:txBody>
+          <a:bodyPr wrap="square" lIns="0" rIns="0" tIns="0" bIns="0" anchor="ctr">
+            <a:spAutoFit/>
+          </a:bodyPr>
+          <a:lstStyle/>
+          <a:p>
+            <a:pPr algn="ctr"/>
+            <a:r>
+              <a:rPr sz="1100" b="0" i="0">
+                <a:solidFill>
+                  <a:srgbClr val="D0D0D0"/>
+                </a:solidFill>
+                <a:latin typeface="Arial"/>
+              </a:rPr>
+              <a:t>48</a:t>
+            </a:r>
+          </a:p>
+        </p:txBody>
+      </p:sp>
+      <p:sp>
+        <p:nvSpPr>
+          <p:cNvPr id="32" name="Rectangle 31"/>
+          <p:cNvSpPr/>
+          <p:nvPr/>
+        </p:nvSpPr>
+        <p:spPr>
+          <a:xfrm>
+            <a:off x="411480" y="2944368"/>
+            <a:ext cx="8366760" cy="402336"/>
+          </a:xfrm>
+          <a:prstGeom prst="rect">
+            <a:avLst/>
+          </a:prstGeom>
+          <a:solidFill>
+            <a:srgbClr val="1E1E1E"/>
+          </a:solidFill>
+          <a:ln>
+            <a:noFill/>
+          </a:ln>
+          <a:effectLst/>
+        </p:spPr>
+        <p:style>
+          <a:lnRef idx="1">
+            <a:schemeClr val="accent1"/>
+          </a:lnRef>
+          <a:fillRef idx="3">
+            <a:schemeClr val="accent1"/>
+          </a:fillRef>
+          <a:effectRef idx="2">
+            <a:schemeClr val="accent1"/>
+          </a:effectRef>
+          <a:fontRef idx="minor">
+            <a:schemeClr val="lt1"/>
+          </a:fontRef>
+        </p:style>
+        <p:txBody>
+          <a:bodyPr rtlCol="0" anchor="ctr"/>
+          <a:lstStyle/>
+          <a:p>
+            <a:pPr algn="ctr"/>
+          </a:p>
+        </p:txBody>
+      </p:sp>
+      <p:sp>
+        <p:nvSpPr>
+          <p:cNvPr id="33" name="TextBox 32"/>
+          <p:cNvSpPr txBox="1"/>
+          <p:nvPr/>
+        </p:nvSpPr>
+        <p:spPr>
+          <a:xfrm>
+            <a:off x="548640" y="2944368"/>
+            <a:ext cx="1508760" cy="402336"/>
+          </a:xfrm>
+          <a:prstGeom prst="rect">
+            <a:avLst/>
+          </a:prstGeom>
+          <a:noFill/>
+        </p:spPr>
+        <p:txBody>
+          <a:bodyPr wrap="square" lIns="0" rIns="0" tIns="0" bIns="0" anchor="ctr">
+            <a:spAutoFit/>
+          </a:bodyPr>
+          <a:lstStyle/>
+          <a:p>
+            <a:pPr algn="l"/>
+            <a:r>
+              <a:rPr sz="1100" b="1" i="0">
+                <a:solidFill>
+                  <a:srgbClr val="FFFFFF"/>
+                </a:solidFill>
+                <a:latin typeface="Arial"/>
+              </a:rPr>
+              <a:t>AGOSTO</a:t>
+            </a:r>
+          </a:p>
+        </p:txBody>
+      </p:sp>
+      <p:sp>
+        <p:nvSpPr>
+          <p:cNvPr id="34" name="TextBox 33"/>
+          <p:cNvSpPr txBox="1"/>
+          <p:nvPr/>
+        </p:nvSpPr>
+        <p:spPr>
+          <a:xfrm>
+            <a:off x="2148840" y="2944368"/>
+            <a:ext cx="1417320" cy="402336"/>
+          </a:xfrm>
+          <a:prstGeom prst="rect">
+            <a:avLst/>
+          </a:prstGeom>
+          <a:noFill/>
+        </p:spPr>
+        <p:txBody>
+          <a:bodyPr wrap="square" lIns="0" rIns="0" tIns="0" bIns="0" anchor="ctr">
+            <a:spAutoFit/>
+          </a:bodyPr>
+          <a:lstStyle/>
+          <a:p>
+            <a:pPr algn="ctr"/>
+            <a:r>
+              <a:rPr sz="1100" b="0" i="0">
+                <a:solidFill>
+                  <a:srgbClr val="D0D0D0"/>
+                </a:solidFill>
+                <a:latin typeface="Arial"/>
+              </a:rPr>
+              <a:t>1.722 m</a:t>
+            </a:r>
+          </a:p>
+        </p:txBody>
+      </p:sp>
+      <p:sp>
+        <p:nvSpPr>
+          <p:cNvPr id="35" name="TextBox 34"/>
+          <p:cNvSpPr txBox="1"/>
+          <p:nvPr/>
+        </p:nvSpPr>
+        <p:spPr>
+          <a:xfrm>
+            <a:off x="3749040" y="2944368"/>
+            <a:ext cx="1508760" cy="402336"/>
+          </a:xfrm>
+          <a:prstGeom prst="rect">
+            <a:avLst/>
+          </a:prstGeom>
+          <a:noFill/>
+        </p:spPr>
+        <p:txBody>
+          <a:bodyPr wrap="square" lIns="0" rIns="0" tIns="0" bIns="0" anchor="ctr">
+            <a:spAutoFit/>
+          </a:bodyPr>
+          <a:lstStyle/>
+          <a:p>
+            <a:pPr algn="ctr"/>
+            <a:r>
+              <a:rPr sz="1100" b="0" i="0">
+                <a:solidFill>
+                  <a:srgbClr val="D0D0D0"/>
+                </a:solidFill>
+                <a:latin typeface="Arial"/>
+              </a:rPr>
+              <a:t>279 m</a:t>
+            </a:r>
+          </a:p>
+        </p:txBody>
+      </p:sp>
+      <p:sp>
+        <p:nvSpPr>
+          <p:cNvPr id="36" name="TextBox 35"/>
+          <p:cNvSpPr txBox="1"/>
+          <p:nvPr/>
+        </p:nvSpPr>
+        <p:spPr>
+          <a:xfrm>
+            <a:off x="5440680" y="2944368"/>
+            <a:ext cx="1371600" cy="402336"/>
+          </a:xfrm>
+          <a:prstGeom prst="rect">
+            <a:avLst/>
+          </a:prstGeom>
+          <a:noFill/>
+        </p:spPr>
+        <p:txBody>
+          <a:bodyPr wrap="square" lIns="0" rIns="0" tIns="0" bIns="0" anchor="ctr">
+            <a:spAutoFit/>
+          </a:bodyPr>
+          <a:lstStyle/>
+          <a:p>
+            <a:pPr algn="ctr"/>
+            <a:r>
+              <a:rPr sz="1200" b="1" i="0">
+                <a:solidFill>
+                  <a:srgbClr val="E74C3C"/>
+                </a:solidFill>
+                <a:latin typeface="Arial"/>
+              </a:rPr>
+              <a:t>13,9%</a:t>
+            </a:r>
+          </a:p>
+        </p:txBody>
+      </p:sp>
+      <p:sp>
+        <p:nvSpPr>
+          <p:cNvPr id="37" name="TextBox 36"/>
+          <p:cNvSpPr txBox="1"/>
+          <p:nvPr/>
+        </p:nvSpPr>
+        <p:spPr>
+          <a:xfrm>
+            <a:off x="6995160" y="2944368"/>
+            <a:ext cx="1645920" cy="402336"/>
+          </a:xfrm>
+          <a:prstGeom prst="rect">
+            <a:avLst/>
+          </a:prstGeom>
+          <a:noFill/>
+        </p:spPr>
+        <p:txBody>
+          <a:bodyPr wrap="square" lIns="0" rIns="0" tIns="0" bIns="0" anchor="ctr">
+            <a:spAutoFit/>
+          </a:bodyPr>
+          <a:lstStyle/>
+          <a:p>
+            <a:pPr algn="ctr"/>
+            <a:r>
+              <a:rPr sz="1100" b="0" i="0">
+                <a:solidFill>
+                  <a:srgbClr val="D0D0D0"/>
+                </a:solidFill>
+                <a:latin typeface="Arial"/>
+              </a:rPr>
+              <a:t>57</a:t>
+            </a:r>
+          </a:p>
+        </p:txBody>
+      </p:sp>
+      <p:sp>
+        <p:nvSpPr>
+          <p:cNvPr id="38" name="Rectangle 37"/>
+          <p:cNvSpPr/>
+          <p:nvPr/>
+        </p:nvSpPr>
+        <p:spPr>
+          <a:xfrm>
+            <a:off x="411480" y="3383280"/>
+            <a:ext cx="8366760" cy="402336"/>
+          </a:xfrm>
+          <a:prstGeom prst="rect">
+            <a:avLst/>
+          </a:prstGeom>
+          <a:noFill/>
+          <a:ln w="15875">
+            <a:solidFill>
+              <a:srgbClr val="ED6C23"/>
+            </a:solidFill>
+          </a:ln>
+          <a:effectLst/>
+        </p:spPr>
+        <p:style>
+          <a:lnRef idx="1">
+            <a:schemeClr val="accent1"/>
+          </a:lnRef>
+          <a:fillRef idx="3">
+            <a:schemeClr val="accent1"/>
+          </a:fillRef>
+          <a:effectRef idx="2">
+            <a:schemeClr val="accent1"/>
+          </a:effectRef>
+          <a:fontRef idx="minor">
+            <a:schemeClr val="lt1"/>
+          </a:fontRef>
+        </p:style>
+        <p:txBody>
+          <a:bodyPr rtlCol="0" anchor="ctr"/>
+          <a:lstStyle/>
+          <a:p>
+            <a:pPr algn="ctr"/>
+          </a:p>
+        </p:txBody>
+      </p:sp>
+      <p:sp>
+        <p:nvSpPr>
+          <p:cNvPr id="39" name="TextBox 38"/>
+          <p:cNvSpPr txBox="1"/>
+          <p:nvPr/>
+        </p:nvSpPr>
+        <p:spPr>
+          <a:xfrm>
+            <a:off x="548640" y="3383280"/>
+            <a:ext cx="1554480" cy="402336"/>
+          </a:xfrm>
+          <a:prstGeom prst="rect">
+            <a:avLst/>
+          </a:prstGeom>
+          <a:noFill/>
+        </p:spPr>
+        <p:txBody>
+          <a:bodyPr wrap="square" lIns="0" rIns="0" tIns="0" bIns="0" anchor="ctr">
+            <a:spAutoFit/>
+          </a:bodyPr>
+          <a:lstStyle/>
+          <a:p>
+            <a:pPr algn="l"/>
+            <a:r>
+              <a:rPr sz="1100" b="1" i="0">
+                <a:solidFill>
+                  <a:srgbClr val="ED6C23"/>
+                </a:solidFill>
+                <a:latin typeface="Arial"/>
+              </a:rPr>
+              <a:t>SEPTIEMBRE</a:t>
+            </a:r>
+          </a:p>
+        </p:txBody>
+      </p:sp>
+      <p:sp>
+        <p:nvSpPr>
+          <p:cNvPr id="40" name="TextBox 39"/>
+          <p:cNvSpPr txBox="1"/>
+          <p:nvPr/>
+        </p:nvSpPr>
+        <p:spPr>
+          <a:xfrm>
+            <a:off x="2148840" y="3383280"/>
+            <a:ext cx="1508760" cy="402336"/>
+          </a:xfrm>
+          <a:prstGeom prst="rect">
+            <a:avLst/>
+          </a:prstGeom>
+          <a:noFill/>
+        </p:spPr>
+        <p:txBody>
+          <a:bodyPr wrap="square" lIns="0" rIns="0" tIns="0" bIns="0" anchor="ctr">
+            <a:spAutoFit/>
+          </a:bodyPr>
+          <a:lstStyle/>
+          <a:p>
+            <a:pPr algn="ctr"/>
+            <a:r>
+              <a:rPr sz="1500" b="1" i="0">
+                <a:solidFill>
+                  <a:srgbClr val="ED6C23"/>
+                </a:solidFill>
+                <a:latin typeface="Arial"/>
+              </a:rPr>
+              <a:t>?</a:t>
+            </a:r>
+          </a:p>
+        </p:txBody>
+      </p:sp>
+      <p:sp>
+        <p:nvSpPr>
+          <p:cNvPr id="41" name="TextBox 40"/>
+          <p:cNvSpPr txBox="1"/>
+          <p:nvPr/>
+        </p:nvSpPr>
+        <p:spPr>
+          <a:xfrm>
+            <a:off x="3749040" y="3383280"/>
+            <a:ext cx="1600200" cy="402336"/>
+          </a:xfrm>
+          <a:prstGeom prst="rect">
+            <a:avLst/>
+          </a:prstGeom>
+          <a:noFill/>
+        </p:spPr>
+        <p:txBody>
+          <a:bodyPr wrap="square" lIns="0" rIns="0" tIns="0" bIns="0" anchor="ctr">
+            <a:spAutoFit/>
+          </a:bodyPr>
+          <a:lstStyle/>
+          <a:p>
+            <a:pPr algn="ctr"/>
+            <a:r>
+              <a:rPr sz="1500" b="1" i="0">
+                <a:solidFill>
+                  <a:srgbClr val="ED6C23"/>
+                </a:solidFill>
+                <a:latin typeface="Arial"/>
+              </a:rPr>
+              <a:t>?</a:t>
+            </a:r>
+          </a:p>
+        </p:txBody>
+      </p:sp>
+      <p:sp>
+        <p:nvSpPr>
+          <p:cNvPr id="42" name="TextBox 41"/>
+          <p:cNvSpPr txBox="1"/>
+          <p:nvPr/>
+        </p:nvSpPr>
+        <p:spPr>
+          <a:xfrm>
+            <a:off x="5440680" y="3383280"/>
+            <a:ext cx="1463040" cy="402336"/>
+          </a:xfrm>
+          <a:prstGeom prst="rect">
+            <a:avLst/>
+          </a:prstGeom>
+          <a:noFill/>
+        </p:spPr>
+        <p:txBody>
+          <a:bodyPr wrap="square" lIns="0" rIns="0" tIns="0" bIns="0" anchor="ctr">
+            <a:spAutoFit/>
+          </a:bodyPr>
+          <a:lstStyle/>
+          <a:p>
+            <a:pPr algn="ctr"/>
+            <a:r>
+              <a:rPr sz="1500" b="1" i="0">
+                <a:solidFill>
+                  <a:srgbClr val="ED6C23"/>
+                </a:solidFill>
+                <a:latin typeface="Arial"/>
+              </a:rPr>
+              <a:t>?</a:t>
+            </a:r>
+          </a:p>
+        </p:txBody>
+      </p:sp>
+      <p:sp>
+        <p:nvSpPr>
+          <p:cNvPr id="43" name="TextBox 42"/>
+          <p:cNvSpPr txBox="1"/>
+          <p:nvPr/>
+        </p:nvSpPr>
+        <p:spPr>
+          <a:xfrm>
+            <a:off x="6995160" y="3383280"/>
+            <a:ext cx="1737360" cy="402336"/>
+          </a:xfrm>
+          <a:prstGeom prst="rect">
+            <a:avLst/>
+          </a:prstGeom>
+          <a:noFill/>
+        </p:spPr>
+        <p:txBody>
+          <a:bodyPr wrap="square" lIns="0" rIns="0" tIns="0" bIns="0" anchor="ctr">
+            <a:spAutoFit/>
+          </a:bodyPr>
+          <a:lstStyle/>
+          <a:p>
+            <a:pPr algn="ctr"/>
+            <a:r>
+              <a:rPr sz="1500" b="1" i="0">
+                <a:solidFill>
+                  <a:srgbClr val="ED6C23"/>
+                </a:solidFill>
+                <a:latin typeface="Arial"/>
+              </a:rPr>
+              <a:t>?</a:t>
+            </a:r>
+          </a:p>
+        </p:txBody>
+      </p:sp>
+      <p:sp>
+        <p:nvSpPr>
+          <p:cNvPr id="44" name="TextBox 43"/>
+          <p:cNvSpPr txBox="1"/>
+          <p:nvPr/>
+        </p:nvSpPr>
+        <p:spPr>
+          <a:xfrm>
+            <a:off x="411480" y="3986784"/>
+            <a:ext cx="8366760" cy="457200"/>
+          </a:xfrm>
+          <a:prstGeom prst="rect">
+            <a:avLst/>
+          </a:prstGeom>
+          <a:noFill/>
+        </p:spPr>
+        <p:txBody>
+          <a:bodyPr wrap="square" lIns="0" rIns="0" tIns="0" bIns="0" anchor="t">
+            <a:spAutoFit/>
+          </a:bodyPr>
+          <a:lstStyle/>
+          <a:p>
+            <a:pPr algn="l"/>
+            <a:r>
+              <a:rPr sz="1100" b="1" i="0">
+                <a:solidFill>
+                  <a:srgbClr val="FFFFFF"/>
+                </a:solidFill>
+                <a:latin typeface="Arial"/>
+              </a:rPr>
+              <a:t>En 4 meses el reproceso se duplicó: </a:t>
+            </a:r>
+            <a:r>
+              <a:rPr sz="1100" b="0" i="0">
+                <a:solidFill>
+                  <a:srgbClr val="D0D0D0"/>
+                </a:solidFill>
+                <a:latin typeface="Arial"/>
+              </a:rPr>
+              <a:t>de 6,6% en mayo a 13,9% en agosto. Los metros repetidos pasaron de 133 a 279 al mes. Septiembre, al final.</a:t>
+            </a:r>
+          </a:p>
+        </p:txBody>
+      </p:sp>
+      <p:sp>
+        <p:nvSpPr>
+          <p:cNvPr id="45" name="TextBox 44"/>
+          <p:cNvSpPr txBox="1"/>
+          <p:nvPr/>
+        </p:nvSpPr>
+        <p:spPr>
+          <a:xfrm>
+            <a:off x="411480" y="4553712"/>
+            <a:ext cx="8229600" cy="182880"/>
+          </a:xfrm>
+          <a:prstGeom prst="rect">
+            <a:avLst/>
+          </a:prstGeom>
+          <a:noFill/>
+        </p:spPr>
+        <p:txBody>
+          <a:bodyPr wrap="square" lIns="0" rIns="0" tIns="0" bIns="0" anchor="t">
+            <a:spAutoFit/>
+          </a:bodyPr>
+          <a:lstStyle/>
+          <a:p>
+            <a:pPr algn="l"/>
+            <a:r>
+              <a:rPr sz="750" b="0" i="1">
                 <a:solidFill>
                   <a:srgbClr val="9A9A9A"/>
                 </a:solidFill>
-                <a:latin typeface="Arial" pitchFamily="34" charset="0"/>
-                <a:ea typeface="Arial" pitchFamily="34" charset="-122"/>
-                <a:cs typeface="Arial" pitchFamily="34" charset="-120"/>
-              </a:rPr>
-              <a:t>% DE REPROCESO POR MES</a:t>
-            </a:r>
-            <a:endParaRPr lang="en-US" sz="750" dirty="0"/>
+                <a:latin typeface="Arial"/>
+              </a:rPr>
+              <a:t>* Julio estimado (el registro de ploteo de ese mes quedó incompleto).  Mayo: el chat de pendientes comenzó el 19-may.</a:t>
+            </a:r>
+          </a:p>
+        </p:txBody>
+      </p:sp>
+    </p:spTree>
+  </p:cSld>
+  <p:clrMapOvr>
+    <a:masterClrMapping/>
+  </p:clrMapOvr>
+</p:sld>
+</file>
+
+<file path=ppt/slides/slide12.xml><?xml version="1.0" encoding="utf-8"?>
+<p:sld xmlns:a="http://schemas.openxmlformats.org/drawingml/2006/main" xmlns:p="http://schemas.openxmlformats.org/presentationml/2006/main" xmlns:r="http://schemas.openxmlformats.org/officeDocument/2006/relationships">
+  <p:cSld>
+    <p:spTree>
+      <p:nvGrpSpPr>
+        <p:cNvPr id="1" name=""/>
+        <p:cNvGrpSpPr/>
+        <p:nvPr/>
+      </p:nvGrpSpPr>
+      <p:grpSpPr/>
+      <p:sp>
+        <p:nvSpPr>
+          <p:cNvPr id="2" name="Rectangle 1"/>
+          <p:cNvSpPr/>
+          <p:nvPr/>
+        </p:nvSpPr>
+        <p:spPr>
+          <a:xfrm>
+            <a:off x="0" y="0"/>
+            <a:ext cx="9144000" cy="5143500"/>
+          </a:xfrm>
+          <a:prstGeom prst="rect">
+            <a:avLst/>
+          </a:prstGeom>
+          <a:solidFill>
+            <a:srgbClr val="000000"/>
+          </a:solidFill>
+          <a:ln>
+            <a:noFill/>
+          </a:ln>
+          <a:effectLst/>
+        </p:spPr>
+        <p:style>
+          <a:lnRef idx="1">
+            <a:schemeClr val="accent1"/>
+          </a:lnRef>
+          <a:fillRef idx="3">
+            <a:schemeClr val="accent1"/>
+          </a:fillRef>
+          <a:effectRef idx="2">
+            <a:schemeClr val="accent1"/>
+          </a:effectRef>
+          <a:fontRef idx="minor">
+            <a:schemeClr val="lt1"/>
+          </a:fontRef>
+        </p:style>
+        <p:txBody>
+          <a:bodyPr rtlCol="0" anchor="ctr"/>
+          <a:lstStyle/>
+          <a:p>
+            <a:pPr algn="ctr"/>
+          </a:p>
+        </p:txBody>
+      </p:sp>
+      <p:sp>
+        <p:nvSpPr>
+          <p:cNvPr id="3" name="Rectangle 2"/>
+          <p:cNvSpPr/>
+          <p:nvPr/>
+        </p:nvSpPr>
+        <p:spPr>
+          <a:xfrm>
+            <a:off x="0" y="0"/>
+            <a:ext cx="109728" cy="5143500"/>
+          </a:xfrm>
+          <a:prstGeom prst="rect">
+            <a:avLst/>
+          </a:prstGeom>
+          <a:solidFill>
+            <a:srgbClr val="ED6C23"/>
+          </a:solidFill>
+          <a:ln>
+            <a:noFill/>
+          </a:ln>
+          <a:effectLst/>
+        </p:spPr>
+        <p:style>
+          <a:lnRef idx="1">
+            <a:schemeClr val="accent1"/>
+          </a:lnRef>
+          <a:fillRef idx="3">
+            <a:schemeClr val="accent1"/>
+          </a:fillRef>
+          <a:effectRef idx="2">
+            <a:schemeClr val="accent1"/>
+          </a:effectRef>
+          <a:fontRef idx="minor">
+            <a:schemeClr val="lt1"/>
+          </a:fontRef>
+        </p:style>
+        <p:txBody>
+          <a:bodyPr rtlCol="0" anchor="ctr"/>
+          <a:lstStyle/>
+          <a:p>
+            <a:pPr algn="ctr"/>
+          </a:p>
+        </p:txBody>
+      </p:sp>
+      <p:sp>
+        <p:nvSpPr>
+          <p:cNvPr id="4" name="Rectangle 3"/>
+          <p:cNvSpPr/>
+          <p:nvPr/>
+        </p:nvSpPr>
+        <p:spPr>
+          <a:xfrm>
+            <a:off x="109728" y="5070348"/>
+            <a:ext cx="9034272" cy="73152"/>
+          </a:xfrm>
+          <a:prstGeom prst="rect">
+            <a:avLst/>
+          </a:prstGeom>
+          <a:solidFill>
+            <a:srgbClr val="ED6C23"/>
+          </a:solidFill>
+          <a:ln>
+            <a:noFill/>
+          </a:ln>
+          <a:effectLst/>
+        </p:spPr>
+        <p:style>
+          <a:lnRef idx="1">
+            <a:schemeClr val="accent1"/>
+          </a:lnRef>
+          <a:fillRef idx="3">
+            <a:schemeClr val="accent1"/>
+          </a:fillRef>
+          <a:effectRef idx="2">
+            <a:schemeClr val="accent1"/>
+          </a:effectRef>
+          <a:fontRef idx="minor">
+            <a:schemeClr val="lt1"/>
+          </a:fontRef>
+        </p:style>
+        <p:txBody>
+          <a:bodyPr rtlCol="0" anchor="ctr"/>
+          <a:lstStyle/>
+          <a:p>
+            <a:pPr algn="ctr"/>
+          </a:p>
+        </p:txBody>
+      </p:sp>
+      <p:sp>
+        <p:nvSpPr>
+          <p:cNvPr id="5" name="TextBox 4"/>
+          <p:cNvSpPr txBox="1"/>
+          <p:nvPr/>
+        </p:nvSpPr>
+        <p:spPr>
+          <a:xfrm>
+            <a:off x="411480" y="274320"/>
+            <a:ext cx="7772400" cy="228600"/>
+          </a:xfrm>
+          <a:prstGeom prst="rect">
+            <a:avLst/>
+          </a:prstGeom>
+          <a:noFill/>
+        </p:spPr>
+        <p:txBody>
+          <a:bodyPr wrap="square" lIns="0" rIns="0" tIns="0" bIns="0" anchor="t">
+            <a:spAutoFit/>
+          </a:bodyPr>
+          <a:lstStyle/>
+          <a:p>
+            <a:pPr algn="l"/>
+            <a:r>
+              <a:rPr sz="1050" b="1" i="0">
+                <a:solidFill>
+                  <a:srgbClr val="ED6C23"/>
+                </a:solidFill>
+                <a:latin typeface="Arial"/>
+              </a:rPr>
+              <a:t>3 · LA META QUE NOS PUSIMOS</a:t>
+            </a:r>
+          </a:p>
+        </p:txBody>
+      </p:sp>
+      <p:sp>
+        <p:nvSpPr>
+          <p:cNvPr id="6" name="TextBox 5"/>
+          <p:cNvSpPr txBox="1"/>
+          <p:nvPr/>
+        </p:nvSpPr>
+        <p:spPr>
+          <a:xfrm>
+            <a:off x="411480" y="502920"/>
+            <a:ext cx="8321040" cy="502920"/>
+          </a:xfrm>
+          <a:prstGeom prst="rect">
+            <a:avLst/>
+          </a:prstGeom>
+          <a:noFill/>
+        </p:spPr>
+        <p:txBody>
+          <a:bodyPr wrap="square" lIns="0" rIns="0" tIns="0" bIns="0" anchor="t">
+            <a:spAutoFit/>
+          </a:bodyPr>
+          <a:lstStyle/>
+          <a:p>
+            <a:pPr algn="l"/>
+            <a:r>
+              <a:rPr sz="2400" b="1" i="0">
+                <a:solidFill>
+                  <a:srgbClr val="FFFFFF"/>
+                </a:solidFill>
+                <a:latin typeface="Arial"/>
+              </a:rPr>
+              <a:t>DESPUÉS DE AGOSTO, UNA HOJA DE RUTA</a:t>
+            </a:r>
+          </a:p>
+        </p:txBody>
+      </p:sp>
+      <p:sp>
+        <p:nvSpPr>
+          <p:cNvPr id="7" name="TextBox 6"/>
+          <p:cNvSpPr txBox="1"/>
+          <p:nvPr/>
+        </p:nvSpPr>
+        <p:spPr>
+          <a:xfrm>
+            <a:off x="5120640" y="4773168"/>
+            <a:ext cx="3657600" cy="182880"/>
+          </a:xfrm>
+          <a:prstGeom prst="rect">
+            <a:avLst/>
+          </a:prstGeom>
+          <a:noFill/>
+        </p:spPr>
+        <p:txBody>
+          <a:bodyPr wrap="square" lIns="0" rIns="0" tIns="0" bIns="0" anchor="t">
+            <a:spAutoFit/>
+          </a:bodyPr>
+          <a:lstStyle/>
+          <a:p>
+            <a:pPr algn="r"/>
+            <a:r>
+              <a:rPr sz="750" b="0" i="0">
+                <a:solidFill>
+                  <a:srgbClr val="9A9A9A"/>
+                </a:solidFill>
+                <a:latin typeface="Arial"/>
+              </a:rPr>
+              <a:t>EQUIPO PRODUCCIÓN  ·  SEPTIEMBRE 2026</a:t>
+            </a:r>
+          </a:p>
+        </p:txBody>
+      </p:sp>
+      <p:sp>
+        <p:nvSpPr>
+          <p:cNvPr id="8" name="TextBox 7"/>
+          <p:cNvSpPr txBox="1"/>
+          <p:nvPr/>
+        </p:nvSpPr>
+        <p:spPr>
+          <a:xfrm>
+            <a:off x="411480" y="1115568"/>
+            <a:ext cx="5120640" cy="228600"/>
+          </a:xfrm>
+          <a:prstGeom prst="rect">
+            <a:avLst/>
+          </a:prstGeom>
+          <a:noFill/>
+        </p:spPr>
+        <p:txBody>
+          <a:bodyPr wrap="square" lIns="0" rIns="0" tIns="0" bIns="0" anchor="t">
+            <a:spAutoFit/>
+          </a:bodyPr>
+          <a:lstStyle/>
+          <a:p>
+            <a:pPr algn="l"/>
+            <a:r>
+              <a:rPr sz="900" b="1" i="0">
+                <a:solidFill>
+                  <a:srgbClr val="9A9A9A"/>
+                </a:solidFill>
+                <a:latin typeface="Arial"/>
+              </a:rPr>
+              <a:t>% DE REPROCESO REAL (MAY–AGO) Y METAS (SEP–DIC)</a:t>
+            </a:r>
           </a:p>
         </p:txBody>
       </p:sp>
       <p:graphicFrame>
         <p:nvGraphicFramePr>
-          <p:cNvPr id="3010" name="Chart 3009"/>
+          <p:cNvPr id="9" name="Chart 8"/>
           <p:cNvGraphicFramePr>
             <a:graphicFrameLocks noGrp="1"/>
           </p:cNvGraphicFramePr>
           <p:nvPr/>
         </p:nvGraphicFramePr>
         <p:xfrm>
-          <a:off x="274320" y="2542032"/>
-          <a:ext cx="4069080" cy="1645920"/>
+          <a:off x="274320" y="1325880"/>
+          <a:ext cx="5394960" cy="3154680"/>
         </p:xfrm>
         <a:graphic>
           <a:graphicData uri="http://schemas.openxmlformats.org/drawingml/2006/chart">
@@ -1434,53 +5689,84 @@
       </p:graphicFrame>
       <p:sp>
         <p:nvSpPr>
-          <p:cNvPr id="3010" name="Shape 3010"/>
-          <p:cNvSpPr txBox="1"/>
-          <p:nvPr/>
-        </p:nvSpPr>
-        <p:spPr>
-          <a:xfrm>
-            <a:off x="365760" y="4133088"/>
-            <a:ext cx="3931920" cy="146304"/>
-          </a:xfrm>
-          <a:prstGeom prst="rect">
-            <a:avLst/>
-          </a:prstGeom>
-          <a:noFill/>
-          <a:ln/>
-        </p:spPr>
-        <p:txBody>
-          <a:bodyPr wrap="square" lIns="0" tIns="0" rIns="0" bIns="0" rtlCol="0" anchor="t"/>
-          <a:lstStyle/>
-          <a:p>
-            <a:pPr algn="l" indent="0" marL="0">
-              <a:buNone/>
-            </a:pPr>
-            <a:r>
-              <a:rPr lang="en-US" sz="650" i="1" dirty="0">
+          <p:cNvPr id="10" name="TextBox 9"/>
+          <p:cNvSpPr txBox="1"/>
+          <p:nvPr/>
+        </p:nvSpPr>
+        <p:spPr>
+          <a:xfrm>
+            <a:off x="411480" y="4553712"/>
+            <a:ext cx="5029200" cy="182880"/>
+          </a:xfrm>
+          <a:prstGeom prst="rect">
+            <a:avLst/>
+          </a:prstGeom>
+          <a:noFill/>
+        </p:spPr>
+        <p:txBody>
+          <a:bodyPr wrap="square" lIns="0" rIns="0" tIns="0" bIns="0" anchor="t">
+            <a:spAutoFit/>
+          </a:bodyPr>
+          <a:lstStyle/>
+          <a:p>
+            <a:pPr algn="l"/>
+            <a:r>
+              <a:rPr sz="750" b="0" i="1">
                 <a:solidFill>
                   <a:srgbClr val="9A9A9A"/>
                 </a:solidFill>
-                <a:latin typeface="Arial" pitchFamily="34" charset="0"/>
-                <a:ea typeface="Arial" pitchFamily="34" charset="-122"/>
-                <a:cs typeface="Arial" pitchFamily="34" charset="-120"/>
-              </a:rPr>
-              <a:t>* Julio estimado</a:t>
-            </a:r>
-            <a:endParaRPr lang="en-US" sz="700" dirty="0"/>
-          </a:p>
-        </p:txBody>
-      </p:sp>
-      <p:sp>
-        <p:nvSpPr>
-          <p:cNvPr id="3011" name="Shape 3011"/>
+                <a:latin typeface="Arial"/>
+              </a:rPr>
+              <a:t>* Julio estimado.  Barras con borde = meta del mes.</a:t>
+            </a:r>
+          </a:p>
+        </p:txBody>
+      </p:sp>
+      <p:sp>
+        <p:nvSpPr>
+          <p:cNvPr id="11" name="TextBox 10"/>
+          <p:cNvSpPr txBox="1"/>
+          <p:nvPr/>
+        </p:nvSpPr>
+        <p:spPr>
+          <a:xfrm>
+            <a:off x="5897880" y="1188720"/>
+            <a:ext cx="2880360" cy="777240"/>
+          </a:xfrm>
+          <a:prstGeom prst="rect">
+            <a:avLst/>
+          </a:prstGeom>
+          <a:noFill/>
+        </p:spPr>
+        <p:txBody>
+          <a:bodyPr wrap="square" lIns="0" rIns="0" tIns="0" bIns="0" anchor="t">
+            <a:spAutoFit/>
+          </a:bodyPr>
+          <a:lstStyle/>
+          <a:p>
+            <a:pPr algn="l"/>
+            <a:r>
+              <a:rPr sz="1500" b="1" i="0">
+                <a:solidFill>
+                  <a:srgbClr val="FFFFFF"/>
+                </a:solidFill>
+                <a:latin typeface="Arial"/>
+              </a:rPr>
+              <a:t>Bajar mes a mes hasta llegar al 5% en diciembre.</a:t>
+            </a:r>
+          </a:p>
+        </p:txBody>
+      </p:sp>
+      <p:sp>
+        <p:nvSpPr>
+          <p:cNvPr id="12" name="Rectangle 11"/>
           <p:cNvSpPr/>
           <p:nvPr/>
         </p:nvSpPr>
         <p:spPr>
           <a:xfrm>
-            <a:off x="4572000" y="1024128"/>
-            <a:ext cx="4224528" cy="987552"/>
+            <a:off x="5897880" y="2057400"/>
+            <a:ext cx="2880360" cy="365760"/>
           </a:xfrm>
           <a:prstGeom prst="rect">
             <a:avLst/>
@@ -1488,168 +5774,113 @@
           <a:solidFill>
             <a:srgbClr val="2D2D2D"/>
           </a:solidFill>
-          <a:ln/>
-        </p:spPr>
-        <p:txBody>
-          <a:bodyPr/>
-          <a:p/>
-        </p:txBody>
-      </p:sp>
-      <p:sp>
-        <p:nvSpPr>
-          <p:cNvPr id="3012" name="Shape 3012"/>
+          <a:ln>
+            <a:noFill/>
+          </a:ln>
+          <a:effectLst/>
+        </p:spPr>
+        <p:style>
+          <a:lnRef idx="1">
+            <a:schemeClr val="accent1"/>
+          </a:lnRef>
+          <a:fillRef idx="3">
+            <a:schemeClr val="accent1"/>
+          </a:fillRef>
+          <a:effectRef idx="2">
+            <a:schemeClr val="accent1"/>
+          </a:effectRef>
+          <a:fontRef idx="minor">
+            <a:schemeClr val="lt1"/>
+          </a:fontRef>
+        </p:style>
+        <p:txBody>
+          <a:bodyPr rtlCol="0" anchor="ctr"/>
+          <a:lstStyle/>
+          <a:p>
+            <a:pPr algn="ctr"/>
+          </a:p>
+        </p:txBody>
+      </p:sp>
+      <p:sp>
+        <p:nvSpPr>
+          <p:cNvPr id="13" name="TextBox 12"/>
+          <p:cNvSpPr txBox="1"/>
+          <p:nvPr/>
+        </p:nvSpPr>
+        <p:spPr>
+          <a:xfrm>
+            <a:off x="6035040" y="2057400"/>
+            <a:ext cx="1371600" cy="365760"/>
+          </a:xfrm>
+          <a:prstGeom prst="rect">
+            <a:avLst/>
+          </a:prstGeom>
+          <a:noFill/>
+        </p:spPr>
+        <p:txBody>
+          <a:bodyPr wrap="square" lIns="0" rIns="0" tIns="0" bIns="0" anchor="ctr">
+            <a:spAutoFit/>
+          </a:bodyPr>
+          <a:lstStyle/>
+          <a:p>
+            <a:pPr algn="l"/>
+            <a:r>
+              <a:rPr sz="1050" b="1" i="0">
+                <a:solidFill>
+                  <a:srgbClr val="FFFFFF"/>
+                </a:solidFill>
+                <a:latin typeface="Arial"/>
+              </a:rPr>
+              <a:t>SEPTIEMBRE</a:t>
+            </a:r>
+          </a:p>
+        </p:txBody>
+      </p:sp>
+      <p:sp>
+        <p:nvSpPr>
+          <p:cNvPr id="14" name="TextBox 13"/>
+          <p:cNvSpPr txBox="1"/>
+          <p:nvPr/>
+        </p:nvSpPr>
+        <p:spPr>
+          <a:xfrm>
+            <a:off x="7315200" y="2057400"/>
+            <a:ext cx="1325880" cy="365760"/>
+          </a:xfrm>
+          <a:prstGeom prst="rect">
+            <a:avLst/>
+          </a:prstGeom>
+          <a:noFill/>
+        </p:spPr>
+        <p:txBody>
+          <a:bodyPr wrap="square" lIns="0" rIns="0" tIns="0" bIns="0" anchor="ctr">
+            <a:spAutoFit/>
+          </a:bodyPr>
+          <a:lstStyle/>
+          <a:p>
+            <a:pPr algn="r"/>
+            <a:r>
+              <a:rPr sz="1050" b="1" i="0">
+                <a:solidFill>
+                  <a:srgbClr val="ED6C23"/>
+                </a:solidFill>
+                <a:latin typeface="Arial"/>
+              </a:rPr>
+              <a:t>≤11%  ·  ≤235 m</a:t>
+            </a:r>
+          </a:p>
+        </p:txBody>
+      </p:sp>
+      <p:sp>
+        <p:nvSpPr>
+          <p:cNvPr id="15" name="Rectangle 14"/>
           <p:cNvSpPr/>
           <p:nvPr/>
         </p:nvSpPr>
         <p:spPr>
           <a:xfrm>
-            <a:off x="4572000" y="1024128"/>
-            <a:ext cx="4224528" cy="45720"/>
-          </a:xfrm>
-          <a:prstGeom prst="rect">
-            <a:avLst/>
-          </a:prstGeom>
-          <a:solidFill>
-            <a:srgbClr val="1B7F4A"/>
-          </a:solidFill>
-          <a:ln/>
-        </p:spPr>
-        <p:txBody>
-          <a:bodyPr/>
-          <a:p/>
-        </p:txBody>
-      </p:sp>
-      <p:sp>
-        <p:nvSpPr>
-          <p:cNvPr id="3013" name="Shape 3013"/>
-          <p:cNvSpPr txBox="1"/>
-          <p:nvPr/>
-        </p:nvSpPr>
-        <p:spPr>
-          <a:xfrm>
-            <a:off x="4718304" y="1133856"/>
-            <a:ext cx="3931920" cy="201168"/>
-          </a:xfrm>
-          <a:prstGeom prst="rect">
-            <a:avLst/>
-          </a:prstGeom>
-          <a:noFill/>
-          <a:ln/>
-        </p:spPr>
-        <p:txBody>
-          <a:bodyPr wrap="square" lIns="0" tIns="0" rIns="0" bIns="0" rtlCol="0" anchor="t"/>
-          <a:lstStyle/>
-          <a:p>
-            <a:pPr algn="l" indent="0" marL="0">
-              <a:buNone/>
-            </a:pPr>
-            <a:r>
-              <a:rPr lang="en-US" sz="900" b="1" dirty="0">
-                <a:solidFill>
-                  <a:srgbClr val="27AE60"/>
-                </a:solidFill>
-                <a:latin typeface="Arial" pitchFamily="34" charset="0"/>
-                <a:ea typeface="Arial" pitchFamily="34" charset="-122"/>
-                <a:cs typeface="Arial" pitchFamily="34" charset="-120"/>
-              </a:rPr>
-              <a:t>LO QUE HICIMOS BIEN</a:t>
-            </a:r>
-            <a:endParaRPr lang="en-US" sz="750" dirty="0"/>
-          </a:p>
-        </p:txBody>
-      </p:sp>
-      <p:sp>
-        <p:nvSpPr>
-          <p:cNvPr id="3014" name="Shape 3014"/>
-          <p:cNvSpPr txBox="1"/>
-          <p:nvPr/>
-        </p:nvSpPr>
-        <p:spPr>
-          <a:xfrm>
-            <a:off x="4718304" y="1371600"/>
-            <a:ext cx="3931920" cy="566928"/>
-          </a:xfrm>
-          <a:prstGeom prst="rect">
-            <a:avLst/>
-          </a:prstGeom>
-          <a:noFill/>
-          <a:ln/>
-        </p:spPr>
-        <p:txBody>
-          <a:bodyPr wrap="square" lIns="0" tIns="0" rIns="0" bIns="0" rtlCol="0" anchor="t"/>
-          <a:lstStyle/>
-          <a:p>
-            <a:pPr algn="l" indent="0" marL="0">
-              <a:spcAft>
-                <a:spcPts val="400"/>
-              </a:spcAft>
-              <a:buNone/>
-            </a:pPr>
-            <a:r>
-              <a:rPr lang="en-US" sz="900" dirty="0">
-                <a:solidFill>
-                  <a:srgbClr val="FFFFFF"/>
-                </a:solidFill>
-                <a:latin typeface="Arial" pitchFamily="34" charset="0"/>
-                <a:ea typeface="Arial" pitchFamily="34" charset="-122"/>
-                <a:cs typeface="Arial" pitchFamily="34" charset="-120"/>
-              </a:rPr>
-              <a:t>✓  Repetimos 127 m: menos de la mitad que en agosto (279 m).</a:t>
-            </a:r>
-            <a:endParaRPr lang="en-US" sz="800" dirty="0"/>
-          </a:p>
-          <a:p>
-            <a:pPr algn="l" indent="0" marL="0">
-              <a:spcAft>
-                <a:spcPts val="400"/>
-              </a:spcAft>
-              <a:buNone/>
-            </a:pPr>
-            <a:r>
-              <a:rPr lang="en-US" sz="900" dirty="0">
-                <a:solidFill>
-                  <a:srgbClr val="FFFFFF"/>
-                </a:solidFill>
-                <a:latin typeface="Arial" pitchFamily="34" charset="0"/>
-                <a:ea typeface="Arial" pitchFamily="34" charset="-122"/>
-                <a:cs typeface="Arial" pitchFamily="34" charset="-120"/>
-              </a:rPr>
-              <a:t>✓  Fue el mes de mayor producción: 2.098 m impresos.</a:t>
-            </a:r>
-            <a:endParaRPr lang="en-US" sz="800" dirty="0"/>
-          </a:p>
-          <a:p>
-            <a:pPr algn="l" indent="0" marL="0">
-              <a:spcAft>
-                <a:spcPts val="400"/>
-              </a:spcAft>
-              <a:buNone/>
-            </a:pPr>
-            <a:r>
-              <a:rPr lang="en-US" sz="900" dirty="0">
-                <a:solidFill>
-                  <a:srgbClr val="FFFFFF"/>
-                </a:solidFill>
-                <a:latin typeface="Arial" pitchFamily="34" charset="0"/>
-                <a:ea typeface="Arial" pitchFamily="34" charset="-122"/>
-                <a:cs typeface="Arial" pitchFamily="34" charset="-120"/>
-              </a:rPr>
-              <a:t>✓  Cumplimos la meta del mes (≤11%) con holgura.</a:t>
-            </a:r>
-            <a:endParaRPr lang="en-US" sz="800" dirty="0"/>
-          </a:p>
-        </p:txBody>
-      </p:sp>
-      <p:sp>
-        <p:nvSpPr>
-          <p:cNvPr id="3015" name="Shape 3015"/>
-          <p:cNvSpPr/>
-          <p:nvPr/>
-        </p:nvSpPr>
-        <p:spPr>
-          <a:xfrm>
-            <a:off x="4572000" y="2121408"/>
-            <a:ext cx="4224528" cy="1499616"/>
+            <a:off x="5897880" y="2487168"/>
+            <a:ext cx="2880360" cy="365760"/>
           </a:xfrm>
           <a:prstGeom prst="rect">
             <a:avLst/>
@@ -1657,23 +5888,227 @@
           <a:solidFill>
             <a:srgbClr val="2D2D2D"/>
           </a:solidFill>
-          <a:ln/>
-        </p:spPr>
-        <p:txBody>
-          <a:bodyPr/>
-          <a:p/>
-        </p:txBody>
-      </p:sp>
-      <p:sp>
-        <p:nvSpPr>
-          <p:cNvPr id="3016" name="Shape 3016"/>
+          <a:ln>
+            <a:noFill/>
+          </a:ln>
+          <a:effectLst/>
+        </p:spPr>
+        <p:style>
+          <a:lnRef idx="1">
+            <a:schemeClr val="accent1"/>
+          </a:lnRef>
+          <a:fillRef idx="3">
+            <a:schemeClr val="accent1"/>
+          </a:fillRef>
+          <a:effectRef idx="2">
+            <a:schemeClr val="accent1"/>
+          </a:effectRef>
+          <a:fontRef idx="minor">
+            <a:schemeClr val="lt1"/>
+          </a:fontRef>
+        </p:style>
+        <p:txBody>
+          <a:bodyPr rtlCol="0" anchor="ctr"/>
+          <a:lstStyle/>
+          <a:p>
+            <a:pPr algn="ctr"/>
+          </a:p>
+        </p:txBody>
+      </p:sp>
+      <p:sp>
+        <p:nvSpPr>
+          <p:cNvPr id="16" name="TextBox 15"/>
+          <p:cNvSpPr txBox="1"/>
+          <p:nvPr/>
+        </p:nvSpPr>
+        <p:spPr>
+          <a:xfrm>
+            <a:off x="6035040" y="2487168"/>
+            <a:ext cx="1371600" cy="365760"/>
+          </a:xfrm>
+          <a:prstGeom prst="rect">
+            <a:avLst/>
+          </a:prstGeom>
+          <a:noFill/>
+        </p:spPr>
+        <p:txBody>
+          <a:bodyPr wrap="square" lIns="0" rIns="0" tIns="0" bIns="0" anchor="ctr">
+            <a:spAutoFit/>
+          </a:bodyPr>
+          <a:lstStyle/>
+          <a:p>
+            <a:pPr algn="l"/>
+            <a:r>
+              <a:rPr sz="1050" b="1" i="0">
+                <a:solidFill>
+                  <a:srgbClr val="FFFFFF"/>
+                </a:solidFill>
+                <a:latin typeface="Arial"/>
+              </a:rPr>
+              <a:t>OCTUBRE</a:t>
+            </a:r>
+          </a:p>
+        </p:txBody>
+      </p:sp>
+      <p:sp>
+        <p:nvSpPr>
+          <p:cNvPr id="17" name="TextBox 16"/>
+          <p:cNvSpPr txBox="1"/>
+          <p:nvPr/>
+        </p:nvSpPr>
+        <p:spPr>
+          <a:xfrm>
+            <a:off x="7315200" y="2487168"/>
+            <a:ext cx="1325880" cy="365760"/>
+          </a:xfrm>
+          <a:prstGeom prst="rect">
+            <a:avLst/>
+          </a:prstGeom>
+          <a:noFill/>
+        </p:spPr>
+        <p:txBody>
+          <a:bodyPr wrap="square" lIns="0" rIns="0" tIns="0" bIns="0" anchor="ctr">
+            <a:spAutoFit/>
+          </a:bodyPr>
+          <a:lstStyle/>
+          <a:p>
+            <a:pPr algn="r"/>
+            <a:r>
+              <a:rPr sz="1050" b="1" i="0">
+                <a:solidFill>
+                  <a:srgbClr val="ED6C23"/>
+                </a:solidFill>
+                <a:latin typeface="Arial"/>
+              </a:rPr>
+              <a:t>≤8%  ·  ≤165 m</a:t>
+            </a:r>
+          </a:p>
+        </p:txBody>
+      </p:sp>
+      <p:sp>
+        <p:nvSpPr>
+          <p:cNvPr id="18" name="Rectangle 17"/>
           <p:cNvSpPr/>
           <p:nvPr/>
         </p:nvSpPr>
         <p:spPr>
           <a:xfrm>
-            <a:off x="4572000" y="2121408"/>
-            <a:ext cx="4224528" cy="45720"/>
+            <a:off x="5897880" y="2916936"/>
+            <a:ext cx="2880360" cy="365760"/>
+          </a:xfrm>
+          <a:prstGeom prst="rect">
+            <a:avLst/>
+          </a:prstGeom>
+          <a:solidFill>
+            <a:srgbClr val="2D2D2D"/>
+          </a:solidFill>
+          <a:ln>
+            <a:noFill/>
+          </a:ln>
+          <a:effectLst/>
+        </p:spPr>
+        <p:style>
+          <a:lnRef idx="1">
+            <a:schemeClr val="accent1"/>
+          </a:lnRef>
+          <a:fillRef idx="3">
+            <a:schemeClr val="accent1"/>
+          </a:fillRef>
+          <a:effectRef idx="2">
+            <a:schemeClr val="accent1"/>
+          </a:effectRef>
+          <a:fontRef idx="minor">
+            <a:schemeClr val="lt1"/>
+          </a:fontRef>
+        </p:style>
+        <p:txBody>
+          <a:bodyPr rtlCol="0" anchor="ctr"/>
+          <a:lstStyle/>
+          <a:p>
+            <a:pPr algn="ctr"/>
+          </a:p>
+        </p:txBody>
+      </p:sp>
+      <p:sp>
+        <p:nvSpPr>
+          <p:cNvPr id="19" name="TextBox 18"/>
+          <p:cNvSpPr txBox="1"/>
+          <p:nvPr/>
+        </p:nvSpPr>
+        <p:spPr>
+          <a:xfrm>
+            <a:off x="6035040" y="2916936"/>
+            <a:ext cx="1371600" cy="365760"/>
+          </a:xfrm>
+          <a:prstGeom prst="rect">
+            <a:avLst/>
+          </a:prstGeom>
+          <a:noFill/>
+        </p:spPr>
+        <p:txBody>
+          <a:bodyPr wrap="square" lIns="0" rIns="0" tIns="0" bIns="0" anchor="ctr">
+            <a:spAutoFit/>
+          </a:bodyPr>
+          <a:lstStyle/>
+          <a:p>
+            <a:pPr algn="l"/>
+            <a:r>
+              <a:rPr sz="1050" b="1" i="0">
+                <a:solidFill>
+                  <a:srgbClr val="FFFFFF"/>
+                </a:solidFill>
+                <a:latin typeface="Arial"/>
+              </a:rPr>
+              <a:t>NOVIEMBRE</a:t>
+            </a:r>
+          </a:p>
+        </p:txBody>
+      </p:sp>
+      <p:sp>
+        <p:nvSpPr>
+          <p:cNvPr id="20" name="TextBox 19"/>
+          <p:cNvSpPr txBox="1"/>
+          <p:nvPr/>
+        </p:nvSpPr>
+        <p:spPr>
+          <a:xfrm>
+            <a:off x="7315200" y="2916936"/>
+            <a:ext cx="1325880" cy="365760"/>
+          </a:xfrm>
+          <a:prstGeom prst="rect">
+            <a:avLst/>
+          </a:prstGeom>
+          <a:noFill/>
+        </p:spPr>
+        <p:txBody>
+          <a:bodyPr wrap="square" lIns="0" rIns="0" tIns="0" bIns="0" anchor="ctr">
+            <a:spAutoFit/>
+          </a:bodyPr>
+          <a:lstStyle/>
+          <a:p>
+            <a:pPr algn="r"/>
+            <a:r>
+              <a:rPr sz="1050" b="1" i="0">
+                <a:solidFill>
+                  <a:srgbClr val="ED6C23"/>
+                </a:solidFill>
+                <a:latin typeface="Arial"/>
+              </a:rPr>
+              <a:t>≤6%  ·  ≤121 m</a:t>
+            </a:r>
+          </a:p>
+        </p:txBody>
+      </p:sp>
+      <p:sp>
+        <p:nvSpPr>
+          <p:cNvPr id="21" name="Rectangle 20"/>
+          <p:cNvSpPr/>
+          <p:nvPr/>
+        </p:nvSpPr>
+        <p:spPr>
+          <a:xfrm>
+            <a:off x="5897880" y="3346704"/>
+            <a:ext cx="2880360" cy="365760"/>
           </a:xfrm>
           <a:prstGeom prst="rect">
             <a:avLst/>
@@ -1681,207 +6116,1611 @@
           <a:solidFill>
             <a:srgbClr val="ED6C23"/>
           </a:solidFill>
-          <a:ln/>
-        </p:spPr>
-        <p:txBody>
-          <a:bodyPr/>
-          <a:p/>
-        </p:txBody>
-      </p:sp>
-      <p:sp>
-        <p:nvSpPr>
-          <p:cNvPr id="3017" name="Shape 3017"/>
-          <p:cNvSpPr txBox="1"/>
-          <p:nvPr/>
-        </p:nvSpPr>
-        <p:spPr>
-          <a:xfrm>
-            <a:off x="4718304" y="2231136"/>
-            <a:ext cx="3931920" cy="201168"/>
-          </a:xfrm>
-          <a:prstGeom prst="rect">
-            <a:avLst/>
-          </a:prstGeom>
-          <a:noFill/>
-          <a:ln/>
-        </p:spPr>
-        <p:txBody>
-          <a:bodyPr wrap="square" lIns="0" tIns="0" rIns="0" bIns="0" rtlCol="0" anchor="t"/>
-          <a:lstStyle/>
-          <a:p>
-            <a:pPr algn="l" indent="0" marL="0">
-              <a:buNone/>
-            </a:pPr>
-            <a:r>
-              <a:rPr lang="en-US" sz="900" b="1" dirty="0">
+          <a:ln>
+            <a:noFill/>
+          </a:ln>
+          <a:effectLst/>
+        </p:spPr>
+        <p:style>
+          <a:lnRef idx="1">
+            <a:schemeClr val="accent1"/>
+          </a:lnRef>
+          <a:fillRef idx="3">
+            <a:schemeClr val="accent1"/>
+          </a:fillRef>
+          <a:effectRef idx="2">
+            <a:schemeClr val="accent1"/>
+          </a:effectRef>
+          <a:fontRef idx="minor">
+            <a:schemeClr val="lt1"/>
+          </a:fontRef>
+        </p:style>
+        <p:txBody>
+          <a:bodyPr rtlCol="0" anchor="ctr"/>
+          <a:lstStyle/>
+          <a:p>
+            <a:pPr algn="ctr"/>
+          </a:p>
+        </p:txBody>
+      </p:sp>
+      <p:sp>
+        <p:nvSpPr>
+          <p:cNvPr id="22" name="TextBox 21"/>
+          <p:cNvSpPr txBox="1"/>
+          <p:nvPr/>
+        </p:nvSpPr>
+        <p:spPr>
+          <a:xfrm>
+            <a:off x="6035040" y="3346704"/>
+            <a:ext cx="1371600" cy="365760"/>
+          </a:xfrm>
+          <a:prstGeom prst="rect">
+            <a:avLst/>
+          </a:prstGeom>
+          <a:noFill/>
+        </p:spPr>
+        <p:txBody>
+          <a:bodyPr wrap="square" lIns="0" rIns="0" tIns="0" bIns="0" anchor="ctr">
+            <a:spAutoFit/>
+          </a:bodyPr>
+          <a:lstStyle/>
+          <a:p>
+            <a:pPr algn="l"/>
+            <a:r>
+              <a:rPr sz="1050" b="1" i="0">
+                <a:solidFill>
+                  <a:srgbClr val="000000"/>
+                </a:solidFill>
+                <a:latin typeface="Arial"/>
+              </a:rPr>
+              <a:t>DICIEMBRE</a:t>
+            </a:r>
+          </a:p>
+        </p:txBody>
+      </p:sp>
+      <p:sp>
+        <p:nvSpPr>
+          <p:cNvPr id="23" name="TextBox 22"/>
+          <p:cNvSpPr txBox="1"/>
+          <p:nvPr/>
+        </p:nvSpPr>
+        <p:spPr>
+          <a:xfrm>
+            <a:off x="7315200" y="3346704"/>
+            <a:ext cx="1325880" cy="365760"/>
+          </a:xfrm>
+          <a:prstGeom prst="rect">
+            <a:avLst/>
+          </a:prstGeom>
+          <a:noFill/>
+        </p:spPr>
+        <p:txBody>
+          <a:bodyPr wrap="square" lIns="0" rIns="0" tIns="0" bIns="0" anchor="ctr">
+            <a:spAutoFit/>
+          </a:bodyPr>
+          <a:lstStyle/>
+          <a:p>
+            <a:pPr algn="r"/>
+            <a:r>
+              <a:rPr sz="1050" b="1" i="0">
+                <a:solidFill>
+                  <a:srgbClr val="000000"/>
+                </a:solidFill>
+                <a:latin typeface="Arial"/>
+              </a:rPr>
+              <a:t>≤5%  ·  ≤100 m</a:t>
+            </a:r>
+          </a:p>
+        </p:txBody>
+      </p:sp>
+      <p:sp>
+        <p:nvSpPr>
+          <p:cNvPr id="24" name="Rectangle 23"/>
+          <p:cNvSpPr/>
+          <p:nvPr/>
+        </p:nvSpPr>
+        <p:spPr>
+          <a:xfrm>
+            <a:off x="5897880" y="3858768"/>
+            <a:ext cx="2880360" cy="640080"/>
+          </a:xfrm>
+          <a:prstGeom prst="rect">
+            <a:avLst/>
+          </a:prstGeom>
+          <a:solidFill>
+            <a:srgbClr val="1E1E1E"/>
+          </a:solidFill>
+          <a:ln w="12700">
+            <a:solidFill>
+              <a:srgbClr val="ED6C23"/>
+            </a:solidFill>
+          </a:ln>
+          <a:effectLst/>
+        </p:spPr>
+        <p:style>
+          <a:lnRef idx="1">
+            <a:schemeClr val="accent1"/>
+          </a:lnRef>
+          <a:fillRef idx="3">
+            <a:schemeClr val="accent1"/>
+          </a:fillRef>
+          <a:effectRef idx="2">
+            <a:schemeClr val="accent1"/>
+          </a:effectRef>
+          <a:fontRef idx="minor">
+            <a:schemeClr val="lt1"/>
+          </a:fontRef>
+        </p:style>
+        <p:txBody>
+          <a:bodyPr rtlCol="0" anchor="ctr"/>
+          <a:lstStyle/>
+          <a:p>
+            <a:pPr algn="ctr"/>
+          </a:p>
+        </p:txBody>
+      </p:sp>
+      <p:sp>
+        <p:nvSpPr>
+          <p:cNvPr id="25" name="TextBox 24"/>
+          <p:cNvSpPr txBox="1"/>
+          <p:nvPr/>
+        </p:nvSpPr>
+        <p:spPr>
+          <a:xfrm>
+            <a:off x="6035040" y="3858768"/>
+            <a:ext cx="2606040" cy="640080"/>
+          </a:xfrm>
+          <a:prstGeom prst="rect">
+            <a:avLst/>
+          </a:prstGeom>
+          <a:noFill/>
+        </p:spPr>
+        <p:txBody>
+          <a:bodyPr wrap="square" lIns="0" rIns="0" tIns="0" bIns="0" anchor="ctr">
+            <a:spAutoFit/>
+          </a:bodyPr>
+          <a:lstStyle/>
+          <a:p>
+            <a:pPr algn="l"/>
+            <a:r>
+              <a:rPr sz="1100" b="1" i="0">
+                <a:solidFill>
+                  <a:srgbClr val="FFFFFF"/>
+                </a:solidFill>
+                <a:latin typeface="Arial"/>
+              </a:rPr>
+              <a:t>Septiembre era la primera prueba:</a:t>
+            </a:r>
+          </a:p>
+          <a:p>
+            <a:pPr algn="l"/>
+            <a:r>
+              <a:rPr sz="1300" b="1" i="0">
                 <a:solidFill>
                   <a:srgbClr val="ED6C23"/>
                 </a:solidFill>
-                <a:latin typeface="Arial" pitchFamily="34" charset="0"/>
-                <a:ea typeface="Arial" pitchFamily="34" charset="-122"/>
-                <a:cs typeface="Arial" pitchFamily="34" charset="-120"/>
-              </a:rPr>
-              <a:t>NUESTRO SIGUIENTE PASO</a:t>
-            </a:r>
-            <a:endParaRPr lang="en-US" sz="750" dirty="0"/>
-          </a:p>
-        </p:txBody>
-      </p:sp>
-      <p:sp>
-        <p:nvSpPr>
-          <p:cNvPr id="3018" name="Shape 3018"/>
-          <p:cNvSpPr txBox="1"/>
-          <p:nvPr/>
-        </p:nvSpPr>
-        <p:spPr>
-          <a:xfrm>
-            <a:off x="4718304" y="2468880"/>
-            <a:ext cx="3931920" cy="1078992"/>
-          </a:xfrm>
-          <a:prstGeom prst="rect">
-            <a:avLst/>
-          </a:prstGeom>
-          <a:noFill/>
-          <a:ln/>
-        </p:spPr>
-        <p:txBody>
-          <a:bodyPr wrap="square" lIns="0" tIns="0" rIns="0" bIns="0" rtlCol="0" anchor="t"/>
-          <a:lstStyle/>
-          <a:p>
-            <a:pPr algn="l" indent="0" marL="0">
-              <a:spcAft>
-                <a:spcPts val="400"/>
-              </a:spcAft>
-              <a:buNone/>
-            </a:pPr>
-            <a:r>
-              <a:rPr lang="en-US" sz="900" dirty="0">
+                <a:latin typeface="Arial"/>
+              </a:rPr>
+              <a:t>¿lo logramos?</a:t>
+            </a:r>
+          </a:p>
+        </p:txBody>
+      </p:sp>
+    </p:spTree>
+  </p:cSld>
+  <p:clrMapOvr>
+    <a:masterClrMapping/>
+  </p:clrMapOvr>
+</p:sld>
+</file>
+
+<file path=ppt/slides/slide13.xml><?xml version="1.0" encoding="utf-8"?>
+<p:sld xmlns:a="http://schemas.openxmlformats.org/drawingml/2006/main" xmlns:p="http://schemas.openxmlformats.org/presentationml/2006/main" xmlns:r="http://schemas.openxmlformats.org/officeDocument/2006/relationships">
+  <p:cSld>
+    <p:spTree>
+      <p:nvGrpSpPr>
+        <p:cNvPr id="1" name=""/>
+        <p:cNvGrpSpPr/>
+        <p:nvPr/>
+      </p:nvGrpSpPr>
+      <p:grpSpPr/>
+      <p:sp>
+        <p:nvSpPr>
+          <p:cNvPr id="2" name="Rectangle 1"/>
+          <p:cNvSpPr/>
+          <p:nvPr/>
+        </p:nvSpPr>
+        <p:spPr>
+          <a:xfrm>
+            <a:off x="0" y="0"/>
+            <a:ext cx="9144000" cy="5143500"/>
+          </a:xfrm>
+          <a:prstGeom prst="rect">
+            <a:avLst/>
+          </a:prstGeom>
+          <a:solidFill>
+            <a:srgbClr val="000000"/>
+          </a:solidFill>
+          <a:ln>
+            <a:noFill/>
+          </a:ln>
+          <a:effectLst/>
+        </p:spPr>
+        <p:style>
+          <a:lnRef idx="1">
+            <a:schemeClr val="accent1"/>
+          </a:lnRef>
+          <a:fillRef idx="3">
+            <a:schemeClr val="accent1"/>
+          </a:fillRef>
+          <a:effectRef idx="2">
+            <a:schemeClr val="accent1"/>
+          </a:effectRef>
+          <a:fontRef idx="minor">
+            <a:schemeClr val="lt1"/>
+          </a:fontRef>
+        </p:style>
+        <p:txBody>
+          <a:bodyPr rtlCol="0" anchor="ctr"/>
+          <a:lstStyle/>
+          <a:p>
+            <a:pPr algn="ctr"/>
+          </a:p>
+        </p:txBody>
+      </p:sp>
+      <p:sp>
+        <p:nvSpPr>
+          <p:cNvPr id="3" name="Rectangle 2"/>
+          <p:cNvSpPr/>
+          <p:nvPr/>
+        </p:nvSpPr>
+        <p:spPr>
+          <a:xfrm>
+            <a:off x="0" y="0"/>
+            <a:ext cx="109728" cy="5143500"/>
+          </a:xfrm>
+          <a:prstGeom prst="rect">
+            <a:avLst/>
+          </a:prstGeom>
+          <a:solidFill>
+            <a:srgbClr val="ED6C23"/>
+          </a:solidFill>
+          <a:ln>
+            <a:noFill/>
+          </a:ln>
+          <a:effectLst/>
+        </p:spPr>
+        <p:style>
+          <a:lnRef idx="1">
+            <a:schemeClr val="accent1"/>
+          </a:lnRef>
+          <a:fillRef idx="3">
+            <a:schemeClr val="accent1"/>
+          </a:fillRef>
+          <a:effectRef idx="2">
+            <a:schemeClr val="accent1"/>
+          </a:effectRef>
+          <a:fontRef idx="minor">
+            <a:schemeClr val="lt1"/>
+          </a:fontRef>
+        </p:style>
+        <p:txBody>
+          <a:bodyPr rtlCol="0" anchor="ctr"/>
+          <a:lstStyle/>
+          <a:p>
+            <a:pPr algn="ctr"/>
+          </a:p>
+        </p:txBody>
+      </p:sp>
+      <p:sp>
+        <p:nvSpPr>
+          <p:cNvPr id="4" name="Rectangle 3"/>
+          <p:cNvSpPr/>
+          <p:nvPr/>
+        </p:nvSpPr>
+        <p:spPr>
+          <a:xfrm>
+            <a:off x="109728" y="5070348"/>
+            <a:ext cx="9034272" cy="73152"/>
+          </a:xfrm>
+          <a:prstGeom prst="rect">
+            <a:avLst/>
+          </a:prstGeom>
+          <a:solidFill>
+            <a:srgbClr val="ED6C23"/>
+          </a:solidFill>
+          <a:ln>
+            <a:noFill/>
+          </a:ln>
+          <a:effectLst/>
+        </p:spPr>
+        <p:style>
+          <a:lnRef idx="1">
+            <a:schemeClr val="accent1"/>
+          </a:lnRef>
+          <a:fillRef idx="3">
+            <a:schemeClr val="accent1"/>
+          </a:fillRef>
+          <a:effectRef idx="2">
+            <a:schemeClr val="accent1"/>
+          </a:effectRef>
+          <a:fontRef idx="minor">
+            <a:schemeClr val="lt1"/>
+          </a:fontRef>
+        </p:style>
+        <p:txBody>
+          <a:bodyPr rtlCol="0" anchor="ctr"/>
+          <a:lstStyle/>
+          <a:p>
+            <a:pPr algn="ctr"/>
+          </a:p>
+        </p:txBody>
+      </p:sp>
+      <p:sp>
+        <p:nvSpPr>
+          <p:cNvPr id="5" name="TextBox 4"/>
+          <p:cNvSpPr txBox="1"/>
+          <p:nvPr/>
+        </p:nvSpPr>
+        <p:spPr>
+          <a:xfrm>
+            <a:off x="411480" y="274320"/>
+            <a:ext cx="7772400" cy="228600"/>
+          </a:xfrm>
+          <a:prstGeom prst="rect">
+            <a:avLst/>
+          </a:prstGeom>
+          <a:noFill/>
+        </p:spPr>
+        <p:txBody>
+          <a:bodyPr wrap="square" lIns="0" rIns="0" tIns="0" bIns="0" anchor="t">
+            <a:spAutoFit/>
+          </a:bodyPr>
+          <a:lstStyle/>
+          <a:p>
+            <a:pPr algn="l"/>
+            <a:r>
+              <a:rPr sz="1050" b="1" i="0">
+                <a:solidFill>
+                  <a:srgbClr val="ED6C23"/>
+                </a:solidFill>
+                <a:latin typeface="Arial"/>
+              </a:rPr>
+              <a:t>4 · QUÉ PASÓ EN SEPTIEMBRE</a:t>
+            </a:r>
+          </a:p>
+        </p:txBody>
+      </p:sp>
+      <p:sp>
+        <p:nvSpPr>
+          <p:cNvPr id="6" name="TextBox 5"/>
+          <p:cNvSpPr txBox="1"/>
+          <p:nvPr/>
+        </p:nvSpPr>
+        <p:spPr>
+          <a:xfrm>
+            <a:off x="411480" y="502920"/>
+            <a:ext cx="8321040" cy="502920"/>
+          </a:xfrm>
+          <a:prstGeom prst="rect">
+            <a:avLst/>
+          </a:prstGeom>
+          <a:noFill/>
+        </p:spPr>
+        <p:txBody>
+          <a:bodyPr wrap="square" lIns="0" rIns="0" tIns="0" bIns="0" anchor="t">
+            <a:spAutoFit/>
+          </a:bodyPr>
+          <a:lstStyle/>
+          <a:p>
+            <a:pPr algn="l"/>
+            <a:r>
+              <a:rPr sz="2400" b="1" i="0">
                 <a:solidFill>
                   <a:srgbClr val="FFFFFF"/>
                 </a:solidFill>
-                <a:latin typeface="Arial" pitchFamily="34" charset="0"/>
-                <a:ea typeface="Arial" pitchFamily="34" charset="-122"/>
-                <a:cs typeface="Arial" pitchFamily="34" charset="-120"/>
-              </a:rPr>
-              <a:t>→  Aún hubo 51 pedidos de reimpresión (57 en agosto): los errores son más chicos, pero siguen apareciendo.</a:t>
-            </a:r>
-            <a:endParaRPr lang="en-US" sz="800" dirty="0"/>
-          </a:p>
-          <a:p>
-            <a:pPr algn="l" indent="0" marL="0">
-              <a:spcAft>
-                <a:spcPts val="400"/>
-              </a:spcAft>
-              <a:buNone/>
-            </a:pPr>
-            <a:r>
-              <a:rPr lang="en-US" sz="900" dirty="0">
+                <a:latin typeface="Arial"/>
+              </a:rPr>
+              <a:t>SEPTIEMBRE EN NÚMEROS</a:t>
+            </a:r>
+          </a:p>
+        </p:txBody>
+      </p:sp>
+      <p:sp>
+        <p:nvSpPr>
+          <p:cNvPr id="7" name="TextBox 6"/>
+          <p:cNvSpPr txBox="1"/>
+          <p:nvPr/>
+        </p:nvSpPr>
+        <p:spPr>
+          <a:xfrm>
+            <a:off x="5120640" y="4773168"/>
+            <a:ext cx="3657600" cy="182880"/>
+          </a:xfrm>
+          <a:prstGeom prst="rect">
+            <a:avLst/>
+          </a:prstGeom>
+          <a:noFill/>
+        </p:spPr>
+        <p:txBody>
+          <a:bodyPr wrap="square" lIns="0" rIns="0" tIns="0" bIns="0" anchor="t">
+            <a:spAutoFit/>
+          </a:bodyPr>
+          <a:lstStyle/>
+          <a:p>
+            <a:pPr algn="r"/>
+            <a:r>
+              <a:rPr sz="750" b="0" i="0">
+                <a:solidFill>
+                  <a:srgbClr val="9A9A9A"/>
+                </a:solidFill>
+                <a:latin typeface="Arial"/>
+              </a:rPr>
+              <a:t>EQUIPO PRODUCCIÓN  ·  SEPTIEMBRE 2026</a:t>
+            </a:r>
+          </a:p>
+        </p:txBody>
+      </p:sp>
+      <p:sp>
+        <p:nvSpPr>
+          <p:cNvPr id="8" name="Rectangle 7"/>
+          <p:cNvSpPr/>
+          <p:nvPr/>
+        </p:nvSpPr>
+        <p:spPr>
+          <a:xfrm>
+            <a:off x="411480" y="1143000"/>
+            <a:ext cx="2377440" cy="960120"/>
+          </a:xfrm>
+          <a:prstGeom prst="rect">
+            <a:avLst/>
+          </a:prstGeom>
+          <a:solidFill>
+            <a:srgbClr val="2D2D2D"/>
+          </a:solidFill>
+          <a:ln>
+            <a:noFill/>
+          </a:ln>
+          <a:effectLst/>
+        </p:spPr>
+        <p:style>
+          <a:lnRef idx="1">
+            <a:schemeClr val="accent1"/>
+          </a:lnRef>
+          <a:fillRef idx="3">
+            <a:schemeClr val="accent1"/>
+          </a:fillRef>
+          <a:effectRef idx="2">
+            <a:schemeClr val="accent1"/>
+          </a:effectRef>
+          <a:fontRef idx="minor">
+            <a:schemeClr val="lt1"/>
+          </a:fontRef>
+        </p:style>
+        <p:txBody>
+          <a:bodyPr rtlCol="0" anchor="ctr"/>
+          <a:lstStyle/>
+          <a:p>
+            <a:pPr algn="ctr"/>
+          </a:p>
+        </p:txBody>
+      </p:sp>
+      <p:sp>
+        <p:nvSpPr>
+          <p:cNvPr id="9" name="TextBox 8"/>
+          <p:cNvSpPr txBox="1"/>
+          <p:nvPr/>
+        </p:nvSpPr>
+        <p:spPr>
+          <a:xfrm>
+            <a:off x="548640" y="1207008"/>
+            <a:ext cx="2103120" cy="457200"/>
+          </a:xfrm>
+          <a:prstGeom prst="rect">
+            <a:avLst/>
+          </a:prstGeom>
+          <a:noFill/>
+        </p:spPr>
+        <p:txBody>
+          <a:bodyPr wrap="square" lIns="0" rIns="0" tIns="0" bIns="0" anchor="t">
+            <a:spAutoFit/>
+          </a:bodyPr>
+          <a:lstStyle/>
+          <a:p>
+            <a:pPr algn="l"/>
+            <a:r>
+              <a:rPr sz="2600" b="1" i="0">
                 <a:solidFill>
                   <a:srgbClr val="FFFFFF"/>
                 </a:solidFill>
-                <a:latin typeface="Arial" pitchFamily="34" charset="0"/>
-                <a:ea typeface="Arial" pitchFamily="34" charset="-122"/>
-                <a:cs typeface="Arial" pitchFamily="34" charset="-120"/>
-              </a:rPr>
-              <a:t>→  Foco de octubre: sublimación (12 casos) y armado de mesa / papel (10 casos).</a:t>
-            </a:r>
-            <a:endParaRPr lang="en-US" sz="800" dirty="0"/>
-          </a:p>
-          <a:p>
-            <a:pPr algn="l" indent="0" marL="0">
-              <a:spcAft>
-                <a:spcPts val="400"/>
-              </a:spcAft>
-              <a:buNone/>
-            </a:pPr>
-            <a:r>
-              <a:rPr lang="en-US" sz="900" dirty="0">
+                <a:latin typeface="Arial"/>
+              </a:rPr>
+              <a:t>2.098 m</a:t>
+            </a:r>
+          </a:p>
+        </p:txBody>
+      </p:sp>
+      <p:sp>
+        <p:nvSpPr>
+          <p:cNvPr id="10" name="TextBox 9"/>
+          <p:cNvSpPr txBox="1"/>
+          <p:nvPr/>
+        </p:nvSpPr>
+        <p:spPr>
+          <a:xfrm>
+            <a:off x="548640" y="1664208"/>
+            <a:ext cx="2103120" cy="411480"/>
+          </a:xfrm>
+          <a:prstGeom prst="rect">
+            <a:avLst/>
+          </a:prstGeom>
+          <a:noFill/>
+        </p:spPr>
+        <p:txBody>
+          <a:bodyPr wrap="square" lIns="0" rIns="0" tIns="0" bIns="0" anchor="t">
+            <a:spAutoFit/>
+          </a:bodyPr>
+          <a:lstStyle/>
+          <a:p>
+            <a:pPr algn="l"/>
+            <a:r>
+              <a:rPr sz="900" b="0" i="0">
+                <a:solidFill>
+                  <a:srgbClr val="D0D0D0"/>
+                </a:solidFill>
+                <a:latin typeface="Arial"/>
+              </a:rPr>
+              <a:t>impresos: el mes de mayor producción desde mayo</a:t>
+            </a:r>
+          </a:p>
+        </p:txBody>
+      </p:sp>
+      <p:sp>
+        <p:nvSpPr>
+          <p:cNvPr id="11" name="Rectangle 10"/>
+          <p:cNvSpPr/>
+          <p:nvPr/>
+        </p:nvSpPr>
+        <p:spPr>
+          <a:xfrm>
+            <a:off x="2926080" y="1143000"/>
+            <a:ext cx="2377440" cy="960120"/>
+          </a:xfrm>
+          <a:prstGeom prst="rect">
+            <a:avLst/>
+          </a:prstGeom>
+          <a:solidFill>
+            <a:srgbClr val="2D2D2D"/>
+          </a:solidFill>
+          <a:ln>
+            <a:noFill/>
+          </a:ln>
+          <a:effectLst/>
+        </p:spPr>
+        <p:style>
+          <a:lnRef idx="1">
+            <a:schemeClr val="accent1"/>
+          </a:lnRef>
+          <a:fillRef idx="3">
+            <a:schemeClr val="accent1"/>
+          </a:fillRef>
+          <a:effectRef idx="2">
+            <a:schemeClr val="accent1"/>
+          </a:effectRef>
+          <a:fontRef idx="minor">
+            <a:schemeClr val="lt1"/>
+          </a:fontRef>
+        </p:style>
+        <p:txBody>
+          <a:bodyPr rtlCol="0" anchor="ctr"/>
+          <a:lstStyle/>
+          <a:p>
+            <a:pPr algn="ctr"/>
+          </a:p>
+        </p:txBody>
+      </p:sp>
+      <p:sp>
+        <p:nvSpPr>
+          <p:cNvPr id="12" name="TextBox 11"/>
+          <p:cNvSpPr txBox="1"/>
+          <p:nvPr/>
+        </p:nvSpPr>
+        <p:spPr>
+          <a:xfrm>
+            <a:off x="3063240" y="1207008"/>
+            <a:ext cx="2103120" cy="457200"/>
+          </a:xfrm>
+          <a:prstGeom prst="rect">
+            <a:avLst/>
+          </a:prstGeom>
+          <a:noFill/>
+        </p:spPr>
+        <p:txBody>
+          <a:bodyPr wrap="square" lIns="0" rIns="0" tIns="0" bIns="0" anchor="t">
+            <a:spAutoFit/>
+          </a:bodyPr>
+          <a:lstStyle/>
+          <a:p>
+            <a:pPr algn="l"/>
+            <a:r>
+              <a:rPr sz="2600" b="1" i="0">
+                <a:solidFill>
+                  <a:srgbClr val="ED6C23"/>
+                </a:solidFill>
+                <a:latin typeface="Arial"/>
+              </a:rPr>
+              <a:t>51</a:t>
+            </a:r>
+          </a:p>
+        </p:txBody>
+      </p:sp>
+      <p:sp>
+        <p:nvSpPr>
+          <p:cNvPr id="13" name="TextBox 12"/>
+          <p:cNvSpPr txBox="1"/>
+          <p:nvPr/>
+        </p:nvSpPr>
+        <p:spPr>
+          <a:xfrm>
+            <a:off x="3063240" y="1664208"/>
+            <a:ext cx="2103120" cy="411480"/>
+          </a:xfrm>
+          <a:prstGeom prst="rect">
+            <a:avLst/>
+          </a:prstGeom>
+          <a:noFill/>
+        </p:spPr>
+        <p:txBody>
+          <a:bodyPr wrap="square" lIns="0" rIns="0" tIns="0" bIns="0" anchor="t">
+            <a:spAutoFit/>
+          </a:bodyPr>
+          <a:lstStyle/>
+          <a:p>
+            <a:pPr algn="l"/>
+            <a:r>
+              <a:rPr sz="900" b="0" i="0">
+                <a:solidFill>
+                  <a:srgbClr val="D0D0D0"/>
+                </a:solidFill>
+                <a:latin typeface="Arial"/>
+              </a:rPr>
+              <a:t>pedidos de reimpresión en el chat (57 en agosto)</a:t>
+            </a:r>
+          </a:p>
+        </p:txBody>
+      </p:sp>
+      <p:sp>
+        <p:nvSpPr>
+          <p:cNvPr id="14" name="TextBox 13"/>
+          <p:cNvSpPr txBox="1"/>
+          <p:nvPr/>
+        </p:nvSpPr>
+        <p:spPr>
+          <a:xfrm>
+            <a:off x="411480" y="2240280"/>
+            <a:ext cx="4937760" cy="228600"/>
+          </a:xfrm>
+          <a:prstGeom prst="rect">
+            <a:avLst/>
+          </a:prstGeom>
+          <a:noFill/>
+        </p:spPr>
+        <p:txBody>
+          <a:bodyPr wrap="square" lIns="0" rIns="0" tIns="0" bIns="0" anchor="t">
+            <a:spAutoFit/>
+          </a:bodyPr>
+          <a:lstStyle/>
+          <a:p>
+            <a:pPr algn="l"/>
+            <a:r>
+              <a:rPr sz="900" b="1" i="0">
+                <a:solidFill>
+                  <a:srgbClr val="9A9A9A"/>
+                </a:solidFill>
+                <a:latin typeface="Arial"/>
+              </a:rPr>
+              <a:t>¿EN QUÉ ETAPA NACIÓ CADA PEDIDO?  </a:t>
+            </a:r>
+            <a:r>
+              <a:rPr sz="900" b="1" i="0">
+                <a:solidFill>
+                  <a:srgbClr val="8A8A8A"/>
+                </a:solidFill>
+                <a:latin typeface="Arial"/>
+              </a:rPr>
+              <a:t>agosto</a:t>
+            </a:r>
+            <a:r>
+              <a:rPr sz="900" b="1" i="0">
+                <a:solidFill>
+                  <a:srgbClr val="9A9A9A"/>
+                </a:solidFill>
+                <a:latin typeface="Arial"/>
+              </a:rPr>
+              <a:t>  vs  </a:t>
+            </a:r>
+            <a:r>
+              <a:rPr sz="900" b="1" i="0">
+                <a:solidFill>
+                  <a:srgbClr val="ED6C23"/>
+                </a:solidFill>
+                <a:latin typeface="Arial"/>
+              </a:rPr>
+              <a:t>septiembre</a:t>
+            </a:r>
+          </a:p>
+        </p:txBody>
+      </p:sp>
+      <p:graphicFrame>
+        <p:nvGraphicFramePr>
+          <p:cNvPr id="15" name="Chart 14"/>
+          <p:cNvGraphicFramePr>
+            <a:graphicFrameLocks noGrp="1"/>
+          </p:cNvGraphicFramePr>
+          <p:nvPr/>
+        </p:nvGraphicFramePr>
+        <p:xfrm>
+          <a:off x="274320" y="2450592"/>
+          <a:ext cx="5120640" cy="2121408"/>
+        </p:xfrm>
+        <a:graphic>
+          <a:graphicData uri="http://schemas.openxmlformats.org/drawingml/2006/chart">
+            <c:chart xmlns:c="http://schemas.openxmlformats.org/drawingml/2006/chart" r:id="rId2"/>
+          </a:graphicData>
+        </a:graphic>
+      </p:graphicFrame>
+      <p:sp>
+        <p:nvSpPr>
+          <p:cNvPr id="16" name="TextBox 15"/>
+          <p:cNvSpPr txBox="1"/>
+          <p:nvPr/>
+        </p:nvSpPr>
+        <p:spPr>
+          <a:xfrm>
+            <a:off x="5623560" y="1143000"/>
+            <a:ext cx="3154680" cy="228600"/>
+          </a:xfrm>
+          <a:prstGeom prst="rect">
+            <a:avLst/>
+          </a:prstGeom>
+          <a:noFill/>
+        </p:spPr>
+        <p:txBody>
+          <a:bodyPr wrap="square" lIns="0" rIns="0" tIns="0" bIns="0" anchor="t">
+            <a:spAutoFit/>
+          </a:bodyPr>
+          <a:lstStyle/>
+          <a:p>
+            <a:pPr algn="l"/>
+            <a:r>
+              <a:rPr sz="1000" b="1" i="0">
+                <a:solidFill>
+                  <a:srgbClr val="ED6C23"/>
+                </a:solidFill>
+                <a:latin typeface="Arial"/>
+              </a:rPr>
+              <a:t>LO QUE NOS DICEN LOS NÚMEROS</a:t>
+            </a:r>
+          </a:p>
+        </p:txBody>
+      </p:sp>
+      <p:sp>
+        <p:nvSpPr>
+          <p:cNvPr id="17" name="Rectangle 16"/>
+          <p:cNvSpPr/>
+          <p:nvPr/>
+        </p:nvSpPr>
+        <p:spPr>
+          <a:xfrm>
+            <a:off x="5623560" y="1463040"/>
+            <a:ext cx="3154680" cy="841248"/>
+          </a:xfrm>
+          <a:prstGeom prst="rect">
+            <a:avLst/>
+          </a:prstGeom>
+          <a:solidFill>
+            <a:srgbClr val="2D2D2D"/>
+          </a:solidFill>
+          <a:ln>
+            <a:noFill/>
+          </a:ln>
+          <a:effectLst/>
+        </p:spPr>
+        <p:style>
+          <a:lnRef idx="1">
+            <a:schemeClr val="accent1"/>
+          </a:lnRef>
+          <a:fillRef idx="3">
+            <a:schemeClr val="accent1"/>
+          </a:fillRef>
+          <a:effectRef idx="2">
+            <a:schemeClr val="accent1"/>
+          </a:effectRef>
+          <a:fontRef idx="minor">
+            <a:schemeClr val="lt1"/>
+          </a:fontRef>
+        </p:style>
+        <p:txBody>
+          <a:bodyPr rtlCol="0" anchor="ctr"/>
+          <a:lstStyle/>
+          <a:p>
+            <a:pPr algn="ctr"/>
+          </a:p>
+        </p:txBody>
+      </p:sp>
+      <p:sp>
+        <p:nvSpPr>
+          <p:cNvPr id="18" name="TextBox 17"/>
+          <p:cNvSpPr txBox="1"/>
+          <p:nvPr/>
+        </p:nvSpPr>
+        <p:spPr>
+          <a:xfrm>
+            <a:off x="5733288" y="1554480"/>
+            <a:ext cx="320040" cy="320040"/>
+          </a:xfrm>
+          <a:prstGeom prst="rect">
+            <a:avLst/>
+          </a:prstGeom>
+          <a:noFill/>
+        </p:spPr>
+        <p:txBody>
+          <a:bodyPr wrap="square" lIns="0" rIns="0" tIns="0" bIns="0" anchor="t">
+            <a:spAutoFit/>
+          </a:bodyPr>
+          <a:lstStyle/>
+          <a:p>
+            <a:pPr algn="ctr"/>
+            <a:r>
+              <a:rPr sz="1400" b="1" i="0">
+                <a:solidFill>
+                  <a:srgbClr val="27AE60"/>
+                </a:solidFill>
+                <a:latin typeface="Arial"/>
+              </a:rPr>
+              <a:t>▼</a:t>
+            </a:r>
+          </a:p>
+        </p:txBody>
+      </p:sp>
+      <p:sp>
+        <p:nvSpPr>
+          <p:cNvPr id="19" name="TextBox 18"/>
+          <p:cNvSpPr txBox="1"/>
+          <p:nvPr/>
+        </p:nvSpPr>
+        <p:spPr>
+          <a:xfrm>
+            <a:off x="6099048" y="1554480"/>
+            <a:ext cx="2560320" cy="228600"/>
+          </a:xfrm>
+          <a:prstGeom prst="rect">
+            <a:avLst/>
+          </a:prstGeom>
+          <a:noFill/>
+        </p:spPr>
+        <p:txBody>
+          <a:bodyPr wrap="square" lIns="0" rIns="0" tIns="0" bIns="0" anchor="t">
+            <a:spAutoFit/>
+          </a:bodyPr>
+          <a:lstStyle/>
+          <a:p>
+            <a:pPr algn="l"/>
+            <a:r>
+              <a:rPr sz="1000" b="1" i="0">
+                <a:solidFill>
+                  <a:srgbClr val="27AE60"/>
+                </a:solidFill>
+                <a:latin typeface="Arial"/>
+              </a:rPr>
+              <a:t>BAJARON</a:t>
+            </a:r>
+          </a:p>
+        </p:txBody>
+      </p:sp>
+      <p:sp>
+        <p:nvSpPr>
+          <p:cNvPr id="20" name="TextBox 19"/>
+          <p:cNvSpPr txBox="1"/>
+          <p:nvPr/>
+        </p:nvSpPr>
+        <p:spPr>
+          <a:xfrm>
+            <a:off x="6099048" y="1792224"/>
+            <a:ext cx="2587752" cy="502920"/>
+          </a:xfrm>
+          <a:prstGeom prst="rect">
+            <a:avLst/>
+          </a:prstGeom>
+          <a:noFill/>
+        </p:spPr>
+        <p:txBody>
+          <a:bodyPr wrap="square" lIns="0" rIns="0" tIns="0" bIns="0" anchor="t">
+            <a:spAutoFit/>
+          </a:bodyPr>
+          <a:lstStyle/>
+          <a:p>
+            <a:pPr algn="l"/>
+            <a:r>
+              <a:rPr sz="950" b="0" i="0">
+                <a:solidFill>
+                  <a:srgbClr val="D0D0D0"/>
+                </a:solidFill>
+                <a:latin typeface="Arial"/>
+              </a:rPr>
+              <a:t>Armado de mesa / papel (15 → 10), pendientes en taller (12 → 7) y faltó impresión (5 → 2).</a:t>
+            </a:r>
+          </a:p>
+        </p:txBody>
+      </p:sp>
+      <p:sp>
+        <p:nvSpPr>
+          <p:cNvPr id="21" name="Rectangle 20"/>
+          <p:cNvSpPr/>
+          <p:nvPr/>
+        </p:nvSpPr>
+        <p:spPr>
+          <a:xfrm>
+            <a:off x="5623560" y="2395728"/>
+            <a:ext cx="3154680" cy="841248"/>
+          </a:xfrm>
+          <a:prstGeom prst="rect">
+            <a:avLst/>
+          </a:prstGeom>
+          <a:solidFill>
+            <a:srgbClr val="2D2D2D"/>
+          </a:solidFill>
+          <a:ln>
+            <a:noFill/>
+          </a:ln>
+          <a:effectLst/>
+        </p:spPr>
+        <p:style>
+          <a:lnRef idx="1">
+            <a:schemeClr val="accent1"/>
+          </a:lnRef>
+          <a:fillRef idx="3">
+            <a:schemeClr val="accent1"/>
+          </a:fillRef>
+          <a:effectRef idx="2">
+            <a:schemeClr val="accent1"/>
+          </a:effectRef>
+          <a:fontRef idx="minor">
+            <a:schemeClr val="lt1"/>
+          </a:fontRef>
+        </p:style>
+        <p:txBody>
+          <a:bodyPr rtlCol="0" anchor="ctr"/>
+          <a:lstStyle/>
+          <a:p>
+            <a:pPr algn="ctr"/>
+          </a:p>
+        </p:txBody>
+      </p:sp>
+      <p:sp>
+        <p:nvSpPr>
+          <p:cNvPr id="22" name="TextBox 21"/>
+          <p:cNvSpPr txBox="1"/>
+          <p:nvPr/>
+        </p:nvSpPr>
+        <p:spPr>
+          <a:xfrm>
+            <a:off x="5733288" y="2487168"/>
+            <a:ext cx="320040" cy="320040"/>
+          </a:xfrm>
+          <a:prstGeom prst="rect">
+            <a:avLst/>
+          </a:prstGeom>
+          <a:noFill/>
+        </p:spPr>
+        <p:txBody>
+          <a:bodyPr wrap="square" lIns="0" rIns="0" tIns="0" bIns="0" anchor="t">
+            <a:spAutoFit/>
+          </a:bodyPr>
+          <a:lstStyle/>
+          <a:p>
+            <a:pPr algn="ctr"/>
+            <a:r>
+              <a:rPr sz="1400" b="1" i="0">
+                <a:solidFill>
+                  <a:srgbClr val="E74C3C"/>
+                </a:solidFill>
+                <a:latin typeface="Arial"/>
+              </a:rPr>
+              <a:t>▲</a:t>
+            </a:r>
+          </a:p>
+        </p:txBody>
+      </p:sp>
+      <p:sp>
+        <p:nvSpPr>
+          <p:cNvPr id="23" name="TextBox 22"/>
+          <p:cNvSpPr txBox="1"/>
+          <p:nvPr/>
+        </p:nvSpPr>
+        <p:spPr>
+          <a:xfrm>
+            <a:off x="6099048" y="2487168"/>
+            <a:ext cx="2560320" cy="228600"/>
+          </a:xfrm>
+          <a:prstGeom prst="rect">
+            <a:avLst/>
+          </a:prstGeom>
+          <a:noFill/>
+        </p:spPr>
+        <p:txBody>
+          <a:bodyPr wrap="square" lIns="0" rIns="0" tIns="0" bIns="0" anchor="t">
+            <a:spAutoFit/>
+          </a:bodyPr>
+          <a:lstStyle/>
+          <a:p>
+            <a:pPr algn="l"/>
+            <a:r>
+              <a:rPr sz="1000" b="1" i="0">
+                <a:solidFill>
+                  <a:srgbClr val="E74C3C"/>
+                </a:solidFill>
+                <a:latin typeface="Arial"/>
+              </a:rPr>
+              <a:t>SUBIERON</a:t>
+            </a:r>
+          </a:p>
+        </p:txBody>
+      </p:sp>
+      <p:sp>
+        <p:nvSpPr>
+          <p:cNvPr id="24" name="TextBox 23"/>
+          <p:cNvSpPr txBox="1"/>
+          <p:nvPr/>
+        </p:nvSpPr>
+        <p:spPr>
+          <a:xfrm>
+            <a:off x="6099048" y="2724912"/>
+            <a:ext cx="2587752" cy="502920"/>
+          </a:xfrm>
+          <a:prstGeom prst="rect">
+            <a:avLst/>
+          </a:prstGeom>
+          <a:noFill/>
+        </p:spPr>
+        <p:txBody>
+          <a:bodyPr wrap="square" lIns="0" rIns="0" tIns="0" bIns="0" anchor="t">
+            <a:spAutoFit/>
+          </a:bodyPr>
+          <a:lstStyle/>
+          <a:p>
+            <a:pPr algn="l"/>
+            <a:r>
+              <a:rPr sz="950" b="0" i="0">
+                <a:solidFill>
+                  <a:srgbClr val="D0D0D0"/>
+                </a:solidFill>
+                <a:latin typeface="Arial"/>
+              </a:rPr>
+              <a:t>Corte (4 → 7), diseño / ficha (5 → 7) y confección (4 → 6).</a:t>
+            </a:r>
+          </a:p>
+        </p:txBody>
+      </p:sp>
+      <p:sp>
+        <p:nvSpPr>
+          <p:cNvPr id="25" name="Rectangle 24"/>
+          <p:cNvSpPr/>
+          <p:nvPr/>
+        </p:nvSpPr>
+        <p:spPr>
+          <a:xfrm>
+            <a:off x="5623560" y="3328416"/>
+            <a:ext cx="3154680" cy="841248"/>
+          </a:xfrm>
+          <a:prstGeom prst="rect">
+            <a:avLst/>
+          </a:prstGeom>
+          <a:solidFill>
+            <a:srgbClr val="2D2D2D"/>
+          </a:solidFill>
+          <a:ln>
+            <a:noFill/>
+          </a:ln>
+          <a:effectLst/>
+        </p:spPr>
+        <p:style>
+          <a:lnRef idx="1">
+            <a:schemeClr val="accent1"/>
+          </a:lnRef>
+          <a:fillRef idx="3">
+            <a:schemeClr val="accent1"/>
+          </a:fillRef>
+          <a:effectRef idx="2">
+            <a:schemeClr val="accent1"/>
+          </a:effectRef>
+          <a:fontRef idx="minor">
+            <a:schemeClr val="lt1"/>
+          </a:fontRef>
+        </p:style>
+        <p:txBody>
+          <a:bodyPr rtlCol="0" anchor="ctr"/>
+          <a:lstStyle/>
+          <a:p>
+            <a:pPr algn="ctr"/>
+          </a:p>
+        </p:txBody>
+      </p:sp>
+      <p:sp>
+        <p:nvSpPr>
+          <p:cNvPr id="26" name="TextBox 25"/>
+          <p:cNvSpPr txBox="1"/>
+          <p:nvPr/>
+        </p:nvSpPr>
+        <p:spPr>
+          <a:xfrm>
+            <a:off x="5733288" y="3419856"/>
+            <a:ext cx="320040" cy="320040"/>
+          </a:xfrm>
+          <a:prstGeom prst="rect">
+            <a:avLst/>
+          </a:prstGeom>
+          <a:noFill/>
+        </p:spPr>
+        <p:txBody>
+          <a:bodyPr wrap="square" lIns="0" rIns="0" tIns="0" bIns="0" anchor="t">
+            <a:spAutoFit/>
+          </a:bodyPr>
+          <a:lstStyle/>
+          <a:p>
+            <a:pPr algn="ctr"/>
+            <a:r>
+              <a:rPr sz="1400" b="1" i="0">
+                <a:solidFill>
+                  <a:srgbClr val="ED6C23"/>
+                </a:solidFill>
+                <a:latin typeface="Arial"/>
+              </a:rPr>
+              <a:t>●</a:t>
+            </a:r>
+          </a:p>
+        </p:txBody>
+      </p:sp>
+      <p:sp>
+        <p:nvSpPr>
+          <p:cNvPr id="27" name="TextBox 26"/>
+          <p:cNvSpPr txBox="1"/>
+          <p:nvPr/>
+        </p:nvSpPr>
+        <p:spPr>
+          <a:xfrm>
+            <a:off x="6099048" y="3419856"/>
+            <a:ext cx="2560320" cy="228600"/>
+          </a:xfrm>
+          <a:prstGeom prst="rect">
+            <a:avLst/>
+          </a:prstGeom>
+          <a:noFill/>
+        </p:spPr>
+        <p:txBody>
+          <a:bodyPr wrap="square" lIns="0" rIns="0" tIns="0" bIns="0" anchor="t">
+            <a:spAutoFit/>
+          </a:bodyPr>
+          <a:lstStyle/>
+          <a:p>
+            <a:pPr algn="l"/>
+            <a:r>
+              <a:rPr sz="1000" b="1" i="0">
+                <a:solidFill>
+                  <a:srgbClr val="ED6C23"/>
+                </a:solidFill>
+                <a:latin typeface="Arial"/>
+              </a:rPr>
+              <a:t>SE MANTUVO</a:t>
+            </a:r>
+          </a:p>
+        </p:txBody>
+      </p:sp>
+      <p:sp>
+        <p:nvSpPr>
+          <p:cNvPr id="28" name="TextBox 27"/>
+          <p:cNvSpPr txBox="1"/>
+          <p:nvPr/>
+        </p:nvSpPr>
+        <p:spPr>
+          <a:xfrm>
+            <a:off x="6099048" y="3657600"/>
+            <a:ext cx="2587752" cy="502920"/>
+          </a:xfrm>
+          <a:prstGeom prst="rect">
+            <a:avLst/>
+          </a:prstGeom>
+          <a:noFill/>
+        </p:spPr>
+        <p:txBody>
+          <a:bodyPr wrap="square" lIns="0" rIns="0" tIns="0" bIns="0" anchor="t">
+            <a:spAutoFit/>
+          </a:bodyPr>
+          <a:lstStyle/>
+          <a:p>
+            <a:pPr algn="l"/>
+            <a:r>
+              <a:rPr sz="950" b="0" i="0">
+                <a:solidFill>
+                  <a:srgbClr val="D0D0D0"/>
+                </a:solidFill>
+                <a:latin typeface="Arial"/>
+              </a:rPr>
+              <a:t>Sublimación sigue en 12: es la etapa con más casos y el foco de octubre.</a:t>
+            </a:r>
+          </a:p>
+        </p:txBody>
+      </p:sp>
+      <p:sp>
+        <p:nvSpPr>
+          <p:cNvPr id="29" name="TextBox 28"/>
+          <p:cNvSpPr txBox="1"/>
+          <p:nvPr/>
+        </p:nvSpPr>
+        <p:spPr>
+          <a:xfrm>
+            <a:off x="5623560" y="4315968"/>
+            <a:ext cx="3154680" cy="228600"/>
+          </a:xfrm>
+          <a:prstGeom prst="rect">
+            <a:avLst/>
+          </a:prstGeom>
+          <a:noFill/>
+        </p:spPr>
+        <p:txBody>
+          <a:bodyPr wrap="square" lIns="0" rIns="0" tIns="0" bIns="0" anchor="t">
+            <a:spAutoFit/>
+          </a:bodyPr>
+          <a:lstStyle/>
+          <a:p>
+            <a:pPr algn="l"/>
+            <a:r>
+              <a:rPr sz="1050" b="1" i="0">
                 <a:solidFill>
                   <a:srgbClr val="FFFFFF"/>
                 </a:solidFill>
-                <a:latin typeface="Arial" pitchFamily="34" charset="0"/>
-                <a:ea typeface="Arial" pitchFamily="34" charset="-122"/>
-                <a:cs typeface="Arial" pitchFamily="34" charset="-120"/>
-              </a:rPr>
-              <a:t>→  Revisar el papel antes de sublimar: si el error se ve ahí, no perdemos tela ni calandra.</a:t>
-            </a:r>
-            <a:endParaRPr lang="en-US" sz="800" dirty="0"/>
-          </a:p>
-        </p:txBody>
-      </p:sp>
-      <p:sp>
-        <p:nvSpPr>
-          <p:cNvPr id="3019" name="Shape 3019"/>
+                <a:latin typeface="Arial"/>
+              </a:rPr>
+              <a:t>Más trabajo, menos pedidos. ¿Y el resultado?</a:t>
+            </a:r>
+          </a:p>
+        </p:txBody>
+      </p:sp>
+    </p:spTree>
+  </p:cSld>
+  <p:clrMapOvr>
+    <a:masterClrMapping/>
+  </p:clrMapOvr>
+</p:sld>
+</file>
+
+<file path=ppt/slides/slide14.xml><?xml version="1.0" encoding="utf-8"?>
+<p:sld xmlns:a="http://schemas.openxmlformats.org/drawingml/2006/main" xmlns:p="http://schemas.openxmlformats.org/presentationml/2006/main" xmlns:r="http://schemas.openxmlformats.org/officeDocument/2006/relationships">
+  <p:cSld>
+    <p:spTree>
+      <p:nvGrpSpPr>
+        <p:cNvPr id="1" name=""/>
+        <p:cNvGrpSpPr/>
+        <p:nvPr/>
+      </p:nvGrpSpPr>
+      <p:grpSpPr/>
+      <p:sp>
+        <p:nvSpPr>
+          <p:cNvPr id="2" name="Rectangle 1"/>
           <p:cNvSpPr/>
           <p:nvPr/>
         </p:nvSpPr>
         <p:spPr>
           <a:xfrm>
-            <a:off x="4572000" y="3730752"/>
-            <a:ext cx="4224528" cy="402336"/>
+            <a:off x="0" y="0"/>
+            <a:ext cx="9144000" cy="5143500"/>
           </a:xfrm>
           <a:prstGeom prst="rect">
             <a:avLst/>
           </a:prstGeom>
           <a:solidFill>
-            <a:srgbClr val="1A1A1A"/>
+            <a:srgbClr val="000000"/>
           </a:solidFill>
-          <a:ln/>
-        </p:spPr>
-        <p:txBody>
-          <a:bodyPr/>
-          <a:p/>
-        </p:txBody>
-      </p:sp>
-      <p:sp>
-        <p:nvSpPr>
-          <p:cNvPr id="3020" name="Shape 3020"/>
-          <p:cNvSpPr txBox="1"/>
-          <p:nvPr/>
-        </p:nvSpPr>
-        <p:spPr>
-          <a:xfrm>
-            <a:off x="4663440" y="3758184"/>
-            <a:ext cx="4041648" cy="347472"/>
-          </a:xfrm>
-          <a:prstGeom prst="rect">
-            <a:avLst/>
-          </a:prstGeom>
-          <a:noFill/>
-          <a:ln/>
-        </p:spPr>
-        <p:txBody>
-          <a:bodyPr wrap="square" lIns="0" tIns="0" rIns="0" bIns="0" rtlCol="0" anchor="ctr"/>
-          <a:lstStyle/>
-          <a:p>
-            <a:pPr algn="ctr" indent="0" marL="0">
-              <a:buNone/>
-            </a:pPr>
-            <a:r>
-              <a:rPr lang="en-US" sz="1150" b="1" dirty="0">
+          <a:ln>
+            <a:noFill/>
+          </a:ln>
+          <a:effectLst/>
+        </p:spPr>
+        <p:style>
+          <a:lnRef idx="1">
+            <a:schemeClr val="accent1"/>
+          </a:lnRef>
+          <a:fillRef idx="3">
+            <a:schemeClr val="accent1"/>
+          </a:fillRef>
+          <a:effectRef idx="2">
+            <a:schemeClr val="accent1"/>
+          </a:effectRef>
+          <a:fontRef idx="minor">
+            <a:schemeClr val="lt1"/>
+          </a:fontRef>
+        </p:style>
+        <p:txBody>
+          <a:bodyPr rtlCol="0" anchor="ctr"/>
+          <a:lstStyle/>
+          <a:p>
+            <a:pPr algn="ctr"/>
+          </a:p>
+        </p:txBody>
+      </p:sp>
+      <p:sp>
+        <p:nvSpPr>
+          <p:cNvPr id="3" name="Rectangle 2"/>
+          <p:cNvSpPr/>
+          <p:nvPr/>
+        </p:nvSpPr>
+        <p:spPr>
+          <a:xfrm>
+            <a:off x="0" y="0"/>
+            <a:ext cx="109728" cy="5143500"/>
+          </a:xfrm>
+          <a:prstGeom prst="rect">
+            <a:avLst/>
+          </a:prstGeom>
+          <a:solidFill>
+            <a:srgbClr val="ED6C23"/>
+          </a:solidFill>
+          <a:ln>
+            <a:noFill/>
+          </a:ln>
+          <a:effectLst/>
+        </p:spPr>
+        <p:style>
+          <a:lnRef idx="1">
+            <a:schemeClr val="accent1"/>
+          </a:lnRef>
+          <a:fillRef idx="3">
+            <a:schemeClr val="accent1"/>
+          </a:fillRef>
+          <a:effectRef idx="2">
+            <a:schemeClr val="accent1"/>
+          </a:effectRef>
+          <a:fontRef idx="minor">
+            <a:schemeClr val="lt1"/>
+          </a:fontRef>
+        </p:style>
+        <p:txBody>
+          <a:bodyPr rtlCol="0" anchor="ctr"/>
+          <a:lstStyle/>
+          <a:p>
+            <a:pPr algn="ctr"/>
+          </a:p>
+        </p:txBody>
+      </p:sp>
+      <p:sp>
+        <p:nvSpPr>
+          <p:cNvPr id="4" name="Rectangle 3"/>
+          <p:cNvSpPr/>
+          <p:nvPr/>
+        </p:nvSpPr>
+        <p:spPr>
+          <a:xfrm>
+            <a:off x="109728" y="5070348"/>
+            <a:ext cx="9034272" cy="73152"/>
+          </a:xfrm>
+          <a:prstGeom prst="rect">
+            <a:avLst/>
+          </a:prstGeom>
+          <a:solidFill>
+            <a:srgbClr val="ED6C23"/>
+          </a:solidFill>
+          <a:ln>
+            <a:noFill/>
+          </a:ln>
+          <a:effectLst/>
+        </p:spPr>
+        <p:style>
+          <a:lnRef idx="1">
+            <a:schemeClr val="accent1"/>
+          </a:lnRef>
+          <a:fillRef idx="3">
+            <a:schemeClr val="accent1"/>
+          </a:fillRef>
+          <a:effectRef idx="2">
+            <a:schemeClr val="accent1"/>
+          </a:effectRef>
+          <a:fontRef idx="minor">
+            <a:schemeClr val="lt1"/>
+          </a:fontRef>
+        </p:style>
+        <p:txBody>
+          <a:bodyPr rtlCol="0" anchor="ctr"/>
+          <a:lstStyle/>
+          <a:p>
+            <a:pPr algn="ctr"/>
+          </a:p>
+        </p:txBody>
+      </p:sp>
+      <p:sp>
+        <p:nvSpPr>
+          <p:cNvPr id="5" name="TextBox 4"/>
+          <p:cNvSpPr txBox="1"/>
+          <p:nvPr/>
+        </p:nvSpPr>
+        <p:spPr>
+          <a:xfrm>
+            <a:off x="411480" y="274320"/>
+            <a:ext cx="7772400" cy="228600"/>
+          </a:xfrm>
+          <a:prstGeom prst="rect">
+            <a:avLst/>
+          </a:prstGeom>
+          <a:noFill/>
+        </p:spPr>
+        <p:txBody>
+          <a:bodyPr wrap="square" lIns="0" rIns="0" tIns="0" bIns="0" anchor="t">
+            <a:spAutoFit/>
+          </a:bodyPr>
+          <a:lstStyle/>
+          <a:p>
+            <a:pPr algn="l"/>
+            <a:r>
+              <a:rPr sz="1050" b="1" i="0">
                 <a:solidFill>
                   <a:srgbClr val="ED6C23"/>
                 </a:solidFill>
-                <a:latin typeface="Arial" pitchFamily="34" charset="0"/>
-                <a:ea typeface="Arial" pitchFamily="34" charset="-122"/>
-                <a:cs typeface="Arial" pitchFamily="34" charset="-120"/>
-              </a:rPr>
-              <a:t>META OCTUBRE:   ≤8%   ·   ≤165 m de reproceso</a:t>
-            </a:r>
-            <a:endParaRPr lang="en-US" sz="700" dirty="0"/>
-          </a:p>
-        </p:txBody>
-      </p:sp>
-      <p:sp>
-        <p:nvSpPr>
-          <p:cNvPr id="3021" name="Mensaje final"/>
+                <a:latin typeface="Arial"/>
+              </a:rPr>
+              <a:t>5 · EL RESULTADO</a:t>
+            </a:r>
+          </a:p>
+        </p:txBody>
+      </p:sp>
+      <p:sp>
+        <p:nvSpPr>
+          <p:cNvPr id="6" name="TextBox 5"/>
+          <p:cNvSpPr txBox="1"/>
+          <p:nvPr/>
+        </p:nvSpPr>
+        <p:spPr>
+          <a:xfrm>
+            <a:off x="411480" y="502920"/>
+            <a:ext cx="8321040" cy="502920"/>
+          </a:xfrm>
+          <a:prstGeom prst="rect">
+            <a:avLst/>
+          </a:prstGeom>
+          <a:noFill/>
+        </p:spPr>
+        <p:txBody>
+          <a:bodyPr wrap="square" lIns="0" rIns="0" tIns="0" bIns="0" anchor="t">
+            <a:spAutoFit/>
+          </a:bodyPr>
+          <a:lstStyle/>
+          <a:p>
+            <a:pPr algn="l"/>
+            <a:r>
+              <a:rPr sz="2400" b="1" i="0">
+                <a:solidFill>
+                  <a:srgbClr val="FFFFFF"/>
+                </a:solidFill>
+                <a:latin typeface="Arial"/>
+              </a:rPr>
+              <a:t>¿Y CÓMO TERMINÓ SEPTIEMBRE?</a:t>
+            </a:r>
+          </a:p>
+        </p:txBody>
+      </p:sp>
+      <p:sp>
+        <p:nvSpPr>
+          <p:cNvPr id="7" name="TextBox 6"/>
+          <p:cNvSpPr txBox="1"/>
+          <p:nvPr/>
+        </p:nvSpPr>
+        <p:spPr>
+          <a:xfrm>
+            <a:off x="5120640" y="4773168"/>
+            <a:ext cx="3657600" cy="182880"/>
+          </a:xfrm>
+          <a:prstGeom prst="rect">
+            <a:avLst/>
+          </a:prstGeom>
+          <a:noFill/>
+        </p:spPr>
+        <p:txBody>
+          <a:bodyPr wrap="square" lIns="0" rIns="0" tIns="0" bIns="0" anchor="t">
+            <a:spAutoFit/>
+          </a:bodyPr>
+          <a:lstStyle/>
+          <a:p>
+            <a:pPr algn="r"/>
+            <a:r>
+              <a:rPr sz="750" b="0" i="0">
+                <a:solidFill>
+                  <a:srgbClr val="9A9A9A"/>
+                </a:solidFill>
+                <a:latin typeface="Arial"/>
+              </a:rPr>
+              <a:t>EQUIPO PRODUCCIÓN  ·  SEPTIEMBRE 2026</a:t>
+            </a:r>
+          </a:p>
+        </p:txBody>
+      </p:sp>
+      <p:sp>
+        <p:nvSpPr>
+          <p:cNvPr id="8" name="TextBox 7"/>
+          <p:cNvSpPr txBox="1"/>
+          <p:nvPr/>
+        </p:nvSpPr>
+        <p:spPr>
+          <a:xfrm>
+            <a:off x="411480" y="1051560"/>
+            <a:ext cx="3017520" cy="1051560"/>
+          </a:xfrm>
+          <a:prstGeom prst="rect">
+            <a:avLst/>
+          </a:prstGeom>
+          <a:noFill/>
+        </p:spPr>
+        <p:txBody>
+          <a:bodyPr wrap="square" lIns="0" rIns="0" tIns="0" bIns="0" anchor="t">
+            <a:spAutoFit/>
+          </a:bodyPr>
+          <a:lstStyle/>
+          <a:p>
+            <a:pPr algn="l"/>
+            <a:r>
+              <a:rPr sz="6600" b="1" i="0">
+                <a:solidFill>
+                  <a:srgbClr val="27AE60"/>
+                </a:solidFill>
+                <a:latin typeface="Arial"/>
+              </a:rPr>
+              <a:t>5,7%</a:t>
+            </a:r>
+          </a:p>
+        </p:txBody>
+      </p:sp>
+      <p:sp>
+        <p:nvSpPr>
+          <p:cNvPr id="9" name="TextBox 8"/>
+          <p:cNvSpPr txBox="1"/>
+          <p:nvPr/>
+        </p:nvSpPr>
+        <p:spPr>
+          <a:xfrm>
+            <a:off x="3429000" y="1261872"/>
+            <a:ext cx="2103120" cy="274320"/>
+          </a:xfrm>
+          <a:prstGeom prst="rect">
+            <a:avLst/>
+          </a:prstGeom>
+          <a:noFill/>
+        </p:spPr>
+        <p:txBody>
+          <a:bodyPr wrap="square" lIns="0" rIns="0" tIns="0" bIns="0" anchor="t">
+            <a:spAutoFit/>
+          </a:bodyPr>
+          <a:lstStyle/>
+          <a:p>
+            <a:pPr algn="l"/>
+            <a:r>
+              <a:rPr sz="1400" b="1" i="0">
+                <a:solidFill>
+                  <a:srgbClr val="FFFFFF"/>
+                </a:solidFill>
+                <a:latin typeface="Arial"/>
+              </a:rPr>
+              <a:t>DE REPROCESO</a:t>
+            </a:r>
+          </a:p>
+        </p:txBody>
+      </p:sp>
+      <p:sp>
+        <p:nvSpPr>
+          <p:cNvPr id="10" name="Rectangle 9"/>
           <p:cNvSpPr/>
           <p:nvPr/>
         </p:nvSpPr>
         <p:spPr>
           <a:xfrm>
-            <a:off x="365760" y="4279392"/>
-            <a:ext cx="8430768" cy="676656"/>
+            <a:off x="3429000" y="1627632"/>
+            <a:ext cx="2057400" cy="329184"/>
           </a:xfrm>
           <a:prstGeom prst="rect">
             <a:avLst/>
@@ -1909,30 +7748,773 @@
           </a:fontRef>
         </p:style>
         <p:txBody>
-          <a:bodyPr rtlCol="0" anchor="ctr" wrap="square" lIns="182880" rIns="182880" tIns="36576" bIns="36576"/>
+          <a:bodyPr rtlCol="0" anchor="ctr" wrap="square" lIns="0" rIns="0" tIns="0" bIns="0"/>
           <a:lstStyle/>
           <a:p>
             <a:pPr algn="ctr"/>
             <a:r>
-              <a:rPr sz="1500" b="1">
+              <a:rPr sz="1000" b="1" i="0">
                 <a:solidFill>
                   <a:srgbClr val="FFFFFF"/>
                 </a:solidFill>
                 <a:latin typeface="Arial"/>
               </a:rPr>
+              <a:t>META ≤11%  ✓  CUMPLIDA</a:t>
+            </a:r>
+          </a:p>
+        </p:txBody>
+      </p:sp>
+      <p:sp>
+        <p:nvSpPr>
+          <p:cNvPr id="11" name="TextBox 10"/>
+          <p:cNvSpPr txBox="1"/>
+          <p:nvPr/>
+        </p:nvSpPr>
+        <p:spPr>
+          <a:xfrm>
+            <a:off x="411480" y="2176272"/>
+            <a:ext cx="5120640" cy="411480"/>
+          </a:xfrm>
+          <a:prstGeom prst="rect">
+            <a:avLst/>
+          </a:prstGeom>
+          <a:noFill/>
+        </p:spPr>
+        <p:txBody>
+          <a:bodyPr wrap="square" lIns="0" rIns="0" tIns="0" bIns="0" anchor="t">
+            <a:spAutoFit/>
+          </a:bodyPr>
+          <a:lstStyle/>
+          <a:p>
+            <a:pPr algn="l"/>
+            <a:r>
+              <a:rPr sz="1150" b="0" i="0">
+                <a:solidFill>
+                  <a:srgbClr val="D0D0D0"/>
+                </a:solidFill>
+                <a:latin typeface="Arial"/>
+              </a:rPr>
+              <a:t>De cada 100 metros, menos de 6 fueron para repetir. En agosto eran 14.</a:t>
+            </a:r>
+          </a:p>
+        </p:txBody>
+      </p:sp>
+      <p:graphicFrame>
+        <p:nvGraphicFramePr>
+          <p:cNvPr id="12" name="Chart 11"/>
+          <p:cNvGraphicFramePr>
+            <a:graphicFrameLocks noGrp="1"/>
+          </p:cNvGraphicFramePr>
+          <p:nvPr/>
+        </p:nvGraphicFramePr>
+        <p:xfrm>
+          <a:off x="274320" y="2560320"/>
+          <a:ext cx="5303520" cy="1965960"/>
+        </p:xfrm>
+        <a:graphic>
+          <a:graphicData uri="http://schemas.openxmlformats.org/drawingml/2006/chart">
+            <c:chart xmlns:c="http://schemas.openxmlformats.org/drawingml/2006/chart" r:id="rId2"/>
+          </a:graphicData>
+        </a:graphic>
+      </p:graphicFrame>
+      <p:sp>
+        <p:nvSpPr>
+          <p:cNvPr id="13" name="TextBox 12"/>
+          <p:cNvSpPr txBox="1"/>
+          <p:nvPr/>
+        </p:nvSpPr>
+        <p:spPr>
+          <a:xfrm>
+            <a:off x="411480" y="4553712"/>
+            <a:ext cx="2743200" cy="182880"/>
+          </a:xfrm>
+          <a:prstGeom prst="rect">
+            <a:avLst/>
+          </a:prstGeom>
+          <a:noFill/>
+        </p:spPr>
+        <p:txBody>
+          <a:bodyPr wrap="square" lIns="0" rIns="0" tIns="0" bIns="0" anchor="t">
+            <a:spAutoFit/>
+          </a:bodyPr>
+          <a:lstStyle/>
+          <a:p>
+            <a:pPr algn="l"/>
+            <a:r>
+              <a:rPr sz="750" b="0" i="1">
+                <a:solidFill>
+                  <a:srgbClr val="9A9A9A"/>
+                </a:solidFill>
+                <a:latin typeface="Arial"/>
+              </a:rPr>
+              <a:t>* Julio estimado</a:t>
+            </a:r>
+          </a:p>
+        </p:txBody>
+      </p:sp>
+      <p:sp>
+        <p:nvSpPr>
+          <p:cNvPr id="14" name="Rectangle 13"/>
+          <p:cNvSpPr/>
+          <p:nvPr/>
+        </p:nvSpPr>
+        <p:spPr>
+          <a:xfrm>
+            <a:off x="5852160" y="1097280"/>
+            <a:ext cx="2926080" cy="1005840"/>
+          </a:xfrm>
+          <a:prstGeom prst="rect">
+            <a:avLst/>
+          </a:prstGeom>
+          <a:solidFill>
+            <a:srgbClr val="2D2D2D"/>
+          </a:solidFill>
+          <a:ln>
+            <a:noFill/>
+          </a:ln>
+          <a:effectLst/>
+        </p:spPr>
+        <p:style>
+          <a:lnRef idx="1">
+            <a:schemeClr val="accent1"/>
+          </a:lnRef>
+          <a:fillRef idx="3">
+            <a:schemeClr val="accent1"/>
+          </a:fillRef>
+          <a:effectRef idx="2">
+            <a:schemeClr val="accent1"/>
+          </a:effectRef>
+          <a:fontRef idx="minor">
+            <a:schemeClr val="lt1"/>
+          </a:fontRef>
+        </p:style>
+        <p:txBody>
+          <a:bodyPr rtlCol="0" anchor="ctr"/>
+          <a:lstStyle/>
+          <a:p>
+            <a:pPr algn="ctr"/>
+          </a:p>
+        </p:txBody>
+      </p:sp>
+      <p:sp>
+        <p:nvSpPr>
+          <p:cNvPr id="15" name="TextBox 14"/>
+          <p:cNvSpPr txBox="1"/>
+          <p:nvPr/>
+        </p:nvSpPr>
+        <p:spPr>
+          <a:xfrm>
+            <a:off x="6016752" y="1188720"/>
+            <a:ext cx="2651760" cy="457200"/>
+          </a:xfrm>
+          <a:prstGeom prst="rect">
+            <a:avLst/>
+          </a:prstGeom>
+          <a:noFill/>
+        </p:spPr>
+        <p:txBody>
+          <a:bodyPr wrap="square" lIns="0" rIns="0" tIns="0" bIns="0" anchor="t">
+            <a:spAutoFit/>
+          </a:bodyPr>
+          <a:lstStyle/>
+          <a:p>
+            <a:pPr algn="l"/>
+            <a:r>
+              <a:rPr sz="2400" b="1" i="0">
+                <a:solidFill>
+                  <a:srgbClr val="27AE60"/>
+                </a:solidFill>
+                <a:latin typeface="Arial"/>
+              </a:rPr>
+              <a:t>127 m</a:t>
+            </a:r>
+          </a:p>
+        </p:txBody>
+      </p:sp>
+      <p:sp>
+        <p:nvSpPr>
+          <p:cNvPr id="16" name="TextBox 15"/>
+          <p:cNvSpPr txBox="1"/>
+          <p:nvPr/>
+        </p:nvSpPr>
+        <p:spPr>
+          <a:xfrm>
+            <a:off x="6016752" y="1645920"/>
+            <a:ext cx="2651760" cy="411480"/>
+          </a:xfrm>
+          <a:prstGeom prst="rect">
+            <a:avLst/>
+          </a:prstGeom>
+          <a:noFill/>
+        </p:spPr>
+        <p:txBody>
+          <a:bodyPr wrap="square" lIns="0" rIns="0" tIns="0" bIns="0" anchor="t">
+            <a:spAutoFit/>
+          </a:bodyPr>
+          <a:lstStyle/>
+          <a:p>
+            <a:pPr algn="l"/>
+            <a:r>
+              <a:rPr sz="950" b="0" i="0">
+                <a:solidFill>
+                  <a:srgbClr val="D0D0D0"/>
+                </a:solidFill>
+                <a:latin typeface="Arial"/>
+              </a:rPr>
+              <a:t>repetidos en el mes (279 m en agosto): menos de la mitad</a:t>
+            </a:r>
+          </a:p>
+        </p:txBody>
+      </p:sp>
+      <p:sp>
+        <p:nvSpPr>
+          <p:cNvPr id="17" name="Rectangle 16"/>
+          <p:cNvSpPr/>
+          <p:nvPr/>
+        </p:nvSpPr>
+        <p:spPr>
+          <a:xfrm>
+            <a:off x="5852160" y="2212848"/>
+            <a:ext cx="2926080" cy="1005840"/>
+          </a:xfrm>
+          <a:prstGeom prst="rect">
+            <a:avLst/>
+          </a:prstGeom>
+          <a:solidFill>
+            <a:srgbClr val="2D2D2D"/>
+          </a:solidFill>
+          <a:ln>
+            <a:noFill/>
+          </a:ln>
+          <a:effectLst/>
+        </p:spPr>
+        <p:style>
+          <a:lnRef idx="1">
+            <a:schemeClr val="accent1"/>
+          </a:lnRef>
+          <a:fillRef idx="3">
+            <a:schemeClr val="accent1"/>
+          </a:fillRef>
+          <a:effectRef idx="2">
+            <a:schemeClr val="accent1"/>
+          </a:effectRef>
+          <a:fontRef idx="minor">
+            <a:schemeClr val="lt1"/>
+          </a:fontRef>
+        </p:style>
+        <p:txBody>
+          <a:bodyPr rtlCol="0" anchor="ctr"/>
+          <a:lstStyle/>
+          <a:p>
+            <a:pPr algn="ctr"/>
+          </a:p>
+        </p:txBody>
+      </p:sp>
+      <p:sp>
+        <p:nvSpPr>
+          <p:cNvPr id="18" name="TextBox 17"/>
+          <p:cNvSpPr txBox="1"/>
+          <p:nvPr/>
+        </p:nvSpPr>
+        <p:spPr>
+          <a:xfrm>
+            <a:off x="6016752" y="2304288"/>
+            <a:ext cx="2651760" cy="457200"/>
+          </a:xfrm>
+          <a:prstGeom prst="rect">
+            <a:avLst/>
+          </a:prstGeom>
+          <a:noFill/>
+        </p:spPr>
+        <p:txBody>
+          <a:bodyPr wrap="square" lIns="0" rIns="0" tIns="0" bIns="0" anchor="t">
+            <a:spAutoFit/>
+          </a:bodyPr>
+          <a:lstStyle/>
+          <a:p>
+            <a:pPr algn="l"/>
+            <a:r>
+              <a:rPr sz="2400" b="1" i="0">
+                <a:solidFill>
+                  <a:srgbClr val="FFFFFF"/>
+                </a:solidFill>
+                <a:latin typeface="Arial"/>
+              </a:rPr>
+              <a:t>2.098 m</a:t>
+            </a:r>
+          </a:p>
+        </p:txBody>
+      </p:sp>
+      <p:sp>
+        <p:nvSpPr>
+          <p:cNvPr id="19" name="TextBox 18"/>
+          <p:cNvSpPr txBox="1"/>
+          <p:nvPr/>
+        </p:nvSpPr>
+        <p:spPr>
+          <a:xfrm>
+            <a:off x="6016752" y="2761488"/>
+            <a:ext cx="2651760" cy="411480"/>
+          </a:xfrm>
+          <a:prstGeom prst="rect">
+            <a:avLst/>
+          </a:prstGeom>
+          <a:noFill/>
+        </p:spPr>
+        <p:txBody>
+          <a:bodyPr wrap="square" lIns="0" rIns="0" tIns="0" bIns="0" anchor="t">
+            <a:spAutoFit/>
+          </a:bodyPr>
+          <a:lstStyle/>
+          <a:p>
+            <a:pPr algn="l"/>
+            <a:r>
+              <a:rPr sz="950" b="0" i="0">
+                <a:solidFill>
+                  <a:srgbClr val="D0D0D0"/>
+                </a:solidFill>
+                <a:latin typeface="Arial"/>
+              </a:rPr>
+              <a:t>impresos: el mes de mayor producción desde mayo</a:t>
+            </a:r>
+          </a:p>
+        </p:txBody>
+      </p:sp>
+      <p:sp>
+        <p:nvSpPr>
+          <p:cNvPr id="20" name="Rectangle 19"/>
+          <p:cNvSpPr/>
+          <p:nvPr/>
+        </p:nvSpPr>
+        <p:spPr>
+          <a:xfrm>
+            <a:off x="5852160" y="3328416"/>
+            <a:ext cx="2926080" cy="1005840"/>
+          </a:xfrm>
+          <a:prstGeom prst="rect">
+            <a:avLst/>
+          </a:prstGeom>
+          <a:solidFill>
+            <a:srgbClr val="2D2D2D"/>
+          </a:solidFill>
+          <a:ln>
+            <a:noFill/>
+          </a:ln>
+          <a:effectLst/>
+        </p:spPr>
+        <p:style>
+          <a:lnRef idx="1">
+            <a:schemeClr val="accent1"/>
+          </a:lnRef>
+          <a:fillRef idx="3">
+            <a:schemeClr val="accent1"/>
+          </a:fillRef>
+          <a:effectRef idx="2">
+            <a:schemeClr val="accent1"/>
+          </a:effectRef>
+          <a:fontRef idx="minor">
+            <a:schemeClr val="lt1"/>
+          </a:fontRef>
+        </p:style>
+        <p:txBody>
+          <a:bodyPr rtlCol="0" anchor="ctr"/>
+          <a:lstStyle/>
+          <a:p>
+            <a:pPr algn="ctr"/>
+          </a:p>
+        </p:txBody>
+      </p:sp>
+      <p:sp>
+        <p:nvSpPr>
+          <p:cNvPr id="21" name="TextBox 20"/>
+          <p:cNvSpPr txBox="1"/>
+          <p:nvPr/>
+        </p:nvSpPr>
+        <p:spPr>
+          <a:xfrm>
+            <a:off x="6016752" y="3419856"/>
+            <a:ext cx="2651760" cy="457200"/>
+          </a:xfrm>
+          <a:prstGeom prst="rect">
+            <a:avLst/>
+          </a:prstGeom>
+          <a:noFill/>
+        </p:spPr>
+        <p:txBody>
+          <a:bodyPr wrap="square" lIns="0" rIns="0" tIns="0" bIns="0" anchor="t">
+            <a:spAutoFit/>
+          </a:bodyPr>
+          <a:lstStyle/>
+          <a:p>
+            <a:pPr algn="l"/>
+            <a:r>
+              <a:rPr sz="2400" b="1" i="0">
+                <a:solidFill>
+                  <a:srgbClr val="ED6C23"/>
+                </a:solidFill>
+                <a:latin typeface="Arial"/>
+              </a:rPr>
+              <a:t>≤8%</a:t>
+            </a:r>
+          </a:p>
+        </p:txBody>
+      </p:sp>
+      <p:sp>
+        <p:nvSpPr>
+          <p:cNvPr id="22" name="TextBox 21"/>
+          <p:cNvSpPr txBox="1"/>
+          <p:nvPr/>
+        </p:nvSpPr>
+        <p:spPr>
+          <a:xfrm>
+            <a:off x="6016752" y="3877056"/>
+            <a:ext cx="2651760" cy="411480"/>
+          </a:xfrm>
+          <a:prstGeom prst="rect">
+            <a:avLst/>
+          </a:prstGeom>
+          <a:noFill/>
+        </p:spPr>
+        <p:txBody>
+          <a:bodyPr wrap="square" lIns="0" rIns="0" tIns="0" bIns="0" anchor="t">
+            <a:spAutoFit/>
+          </a:bodyPr>
+          <a:lstStyle/>
+          <a:p>
+            <a:pPr algn="l"/>
+            <a:r>
+              <a:rPr sz="950" b="0" i="0">
+                <a:solidFill>
+                  <a:srgbClr val="D0D0D0"/>
+                </a:solidFill>
+                <a:latin typeface="Arial"/>
+              </a:rPr>
+              <a:t>próxima meta: octubre (≤165 m de reproceso)</a:t>
+            </a:r>
+          </a:p>
+        </p:txBody>
+      </p:sp>
+    </p:spTree>
+  </p:cSld>
+  <p:clrMapOvr>
+    <a:masterClrMapping/>
+  </p:clrMapOvr>
+</p:sld>
+</file>
+
+<file path=ppt/slides/slide15.xml><?xml version="1.0" encoding="utf-8"?>
+<p:sld xmlns:a="http://schemas.openxmlformats.org/drawingml/2006/main" xmlns:p="http://schemas.openxmlformats.org/presentationml/2006/main" xmlns:r="http://schemas.openxmlformats.org/officeDocument/2006/relationships">
+  <p:cSld>
+    <p:spTree>
+      <p:nvGrpSpPr>
+        <p:cNvPr id="1" name=""/>
+        <p:cNvGrpSpPr/>
+        <p:nvPr/>
+      </p:nvGrpSpPr>
+      <p:grpSpPr/>
+      <p:sp>
+        <p:nvSpPr>
+          <p:cNvPr id="2" name="Rectangle 1"/>
+          <p:cNvSpPr/>
+          <p:nvPr/>
+        </p:nvSpPr>
+        <p:spPr>
+          <a:xfrm>
+            <a:off x="0" y="0"/>
+            <a:ext cx="9144000" cy="5143500"/>
+          </a:xfrm>
+          <a:prstGeom prst="rect">
+            <a:avLst/>
+          </a:prstGeom>
+          <a:solidFill>
+            <a:srgbClr val="000000"/>
+          </a:solidFill>
+          <a:ln>
+            <a:noFill/>
+          </a:ln>
+          <a:effectLst/>
+        </p:spPr>
+        <p:style>
+          <a:lnRef idx="1">
+            <a:schemeClr val="accent1"/>
+          </a:lnRef>
+          <a:fillRef idx="3">
+            <a:schemeClr val="accent1"/>
+          </a:fillRef>
+          <a:effectRef idx="2">
+            <a:schemeClr val="accent1"/>
+          </a:effectRef>
+          <a:fontRef idx="minor">
+            <a:schemeClr val="lt1"/>
+          </a:fontRef>
+        </p:style>
+        <p:txBody>
+          <a:bodyPr rtlCol="0" anchor="ctr"/>
+          <a:lstStyle/>
+          <a:p>
+            <a:pPr algn="ctr"/>
+          </a:p>
+        </p:txBody>
+      </p:sp>
+      <p:sp>
+        <p:nvSpPr>
+          <p:cNvPr id="3" name="Rectangle 2"/>
+          <p:cNvSpPr/>
+          <p:nvPr/>
+        </p:nvSpPr>
+        <p:spPr>
+          <a:xfrm>
+            <a:off x="0" y="0"/>
+            <a:ext cx="109728" cy="5143500"/>
+          </a:xfrm>
+          <a:prstGeom prst="rect">
+            <a:avLst/>
+          </a:prstGeom>
+          <a:solidFill>
+            <a:srgbClr val="ED6C23"/>
+          </a:solidFill>
+          <a:ln>
+            <a:noFill/>
+          </a:ln>
+          <a:effectLst/>
+        </p:spPr>
+        <p:style>
+          <a:lnRef idx="1">
+            <a:schemeClr val="accent1"/>
+          </a:lnRef>
+          <a:fillRef idx="3">
+            <a:schemeClr val="accent1"/>
+          </a:fillRef>
+          <a:effectRef idx="2">
+            <a:schemeClr val="accent1"/>
+          </a:effectRef>
+          <a:fontRef idx="minor">
+            <a:schemeClr val="lt1"/>
+          </a:fontRef>
+        </p:style>
+        <p:txBody>
+          <a:bodyPr rtlCol="0" anchor="ctr"/>
+          <a:lstStyle/>
+          <a:p>
+            <a:pPr algn="ctr"/>
+          </a:p>
+        </p:txBody>
+      </p:sp>
+      <p:sp>
+        <p:nvSpPr>
+          <p:cNvPr id="4" name="Rectangle 3"/>
+          <p:cNvSpPr/>
+          <p:nvPr/>
+        </p:nvSpPr>
+        <p:spPr>
+          <a:xfrm>
+            <a:off x="109728" y="5070348"/>
+            <a:ext cx="9034272" cy="73152"/>
+          </a:xfrm>
+          <a:prstGeom prst="rect">
+            <a:avLst/>
+          </a:prstGeom>
+          <a:solidFill>
+            <a:srgbClr val="ED6C23"/>
+          </a:solidFill>
+          <a:ln>
+            <a:noFill/>
+          </a:ln>
+          <a:effectLst/>
+        </p:spPr>
+        <p:style>
+          <a:lnRef idx="1">
+            <a:schemeClr val="accent1"/>
+          </a:lnRef>
+          <a:fillRef idx="3">
+            <a:schemeClr val="accent1"/>
+          </a:fillRef>
+          <a:effectRef idx="2">
+            <a:schemeClr val="accent1"/>
+          </a:effectRef>
+          <a:fontRef idx="minor">
+            <a:schemeClr val="lt1"/>
+          </a:fontRef>
+        </p:style>
+        <p:txBody>
+          <a:bodyPr rtlCol="0" anchor="ctr"/>
+          <a:lstStyle/>
+          <a:p>
+            <a:pPr algn="ctr"/>
+          </a:p>
+        </p:txBody>
+      </p:sp>
+      <p:sp>
+        <p:nvSpPr>
+          <p:cNvPr id="5" name="Rectangle 4"/>
+          <p:cNvSpPr/>
+          <p:nvPr/>
+        </p:nvSpPr>
+        <p:spPr>
+          <a:xfrm>
+            <a:off x="777240" y="868680"/>
+            <a:ext cx="7589520" cy="2697480"/>
+          </a:xfrm>
+          <a:prstGeom prst="rect">
+            <a:avLst/>
+          </a:prstGeom>
+          <a:solidFill>
+            <a:srgbClr val="1B7F4A"/>
+          </a:solidFill>
+          <a:ln>
+            <a:noFill/>
+          </a:ln>
+          <a:effectLst/>
+        </p:spPr>
+        <p:style>
+          <a:lnRef idx="1">
+            <a:schemeClr val="accent1"/>
+          </a:lnRef>
+          <a:fillRef idx="3">
+            <a:schemeClr val="accent1"/>
+          </a:fillRef>
+          <a:effectRef idx="2">
+            <a:schemeClr val="accent1"/>
+          </a:effectRef>
+          <a:fontRef idx="minor">
+            <a:schemeClr val="lt1"/>
+          </a:fontRef>
+        </p:style>
+        <p:txBody>
+          <a:bodyPr rtlCol="0" anchor="ctr" wrap="square" lIns="274320" rIns="274320" tIns="0" bIns="0"/>
+          <a:lstStyle/>
+          <a:p>
+            <a:pPr algn="ctr">
+              <a:spcAft>
+                <a:spcPts val="200"/>
+              </a:spcAft>
+            </a:pPr>
+            <a:r>
+              <a:rPr sz="3400" b="1" i="0">
+                <a:solidFill>
+                  <a:srgbClr val="FFFFFF"/>
+                </a:solidFill>
+                <a:latin typeface="Arial"/>
+              </a:rPr>
               <a:t>¡FELICITACIONES, EQUIPO!</a:t>
             </a:r>
           </a:p>
           <a:p>
+            <a:pPr algn="ctr">
+              <a:spcAft>
+                <a:spcPts val="200"/>
+              </a:spcAft>
+            </a:pPr>
+            <a:r>
+              <a:rPr sz="800" b="0" i="0">
+                <a:solidFill>
+                  <a:srgbClr val="FFFFFF"/>
+                </a:solidFill>
+                <a:latin typeface="Arial"/>
+              </a:rPr>
+              <a:t> </a:t>
+            </a:r>
+          </a:p>
+          <a:p>
+            <a:pPr algn="ctr">
+              <a:spcAft>
+                <a:spcPts val="200"/>
+              </a:spcAft>
+            </a:pPr>
+            <a:r>
+              <a:rPr sz="1600" b="0" i="0">
+                <a:solidFill>
+                  <a:srgbClr val="FFFFFF"/>
+                </a:solidFill>
+                <a:latin typeface="Arial"/>
+              </a:rPr>
+              <a:t>En un mes bajamos el reproceso a menos de la mitad.</a:t>
+            </a:r>
+          </a:p>
+          <a:p>
+            <a:pPr algn="ctr">
+              <a:spcAft>
+                <a:spcPts val="200"/>
+              </a:spcAft>
+            </a:pPr>
+            <a:r>
+              <a:rPr sz="1600" b="1" i="0">
+                <a:solidFill>
+                  <a:srgbClr val="FFFFFF"/>
+                </a:solidFill>
+                <a:latin typeface="Arial"/>
+              </a:rPr>
+              <a:t>Este logro es de todos.</a:t>
+            </a:r>
+          </a:p>
+        </p:txBody>
+      </p:sp>
+      <p:sp>
+        <p:nvSpPr>
+          <p:cNvPr id="6" name="TextBox 5"/>
+          <p:cNvSpPr txBox="1"/>
+          <p:nvPr/>
+        </p:nvSpPr>
+        <p:spPr>
+          <a:xfrm>
+            <a:off x="777240" y="3794760"/>
+            <a:ext cx="7589520" cy="320040"/>
+          </a:xfrm>
+          <a:prstGeom prst="rect">
+            <a:avLst/>
+          </a:prstGeom>
+          <a:noFill/>
+        </p:spPr>
+        <p:txBody>
+          <a:bodyPr wrap="square" lIns="0" rIns="0" tIns="0" bIns="0" anchor="t">
+            <a:spAutoFit/>
+          </a:bodyPr>
+          <a:lstStyle/>
+          <a:p>
             <a:pPr algn="ctr"/>
             <a:r>
-              <a:rPr sz="1050">
-                <a:solidFill>
-                  <a:srgbClr val="FFFFFF"/>
-                </a:solidFill>
-                <a:latin typeface="Arial"/>
-              </a:rPr>
-              <a:t>En un mes bajamos el reproceso a menos de la mitad. Este logro es de todos: ahora vamos juntos por el 5%.</a:t>
+              <a:rPr sz="1500" b="1" i="0">
+                <a:solidFill>
+                  <a:srgbClr val="ED6C23"/>
+                </a:solidFill>
+                <a:latin typeface="Arial"/>
+              </a:rPr>
+              <a:t>PRÓXIMO DESAFÍO: OCTUBRE ≤8%   ·   VAMOS JUNTOS POR EL 5%</a:t>
+            </a:r>
+          </a:p>
+        </p:txBody>
+      </p:sp>
+      <p:sp>
+        <p:nvSpPr>
+          <p:cNvPr id="7" name="TextBox 6"/>
+          <p:cNvSpPr txBox="1"/>
+          <p:nvPr/>
+        </p:nvSpPr>
+        <p:spPr>
+          <a:xfrm>
+            <a:off x="777240" y="4343400"/>
+            <a:ext cx="7589520" cy="228600"/>
+          </a:xfrm>
+          <a:prstGeom prst="rect">
+            <a:avLst/>
+          </a:prstGeom>
+          <a:noFill/>
+        </p:spPr>
+        <p:txBody>
+          <a:bodyPr wrap="square" lIns="0" rIns="0" tIns="0" bIns="0" anchor="t">
+            <a:spAutoFit/>
+          </a:bodyPr>
+          <a:lstStyle/>
+          <a:p>
+            <a:pPr algn="ctr"/>
+            <a:r>
+              <a:rPr sz="1000" b="1" i="0">
+                <a:solidFill>
+                  <a:srgbClr val="9A9A9A"/>
+                </a:solidFill>
+                <a:latin typeface="Arial"/>
+              </a:rPr>
+              <a:t>UN CLUB, UNA FAMILIA</a:t>
             </a:r>
           </a:p>
         </p:txBody>
@@ -1976,7 +8558,7 @@
                                           </p:stCondLst>
                                         </p:cTn>
                                         <p:tgtEl>
-                                          <p:spTgt spid="3021"/>
+                                          <p:spTgt spid="5"/>
                                         </p:tgtEl>
                                         <p:attrNameLst>
                                           <p:attrName>style.visibility</p:attrName>
@@ -1988,9 +8570,9 @@
                                     </p:set>
                                     <p:animEffect transition="in" filter="fade">
                                       <p:cBhvr>
-                                        <p:cTn id="7" dur="700"/>
+                                        <p:cTn id="7" dur="800"/>
                                         <p:tgtEl>
-                                          <p:spTgt spid="3021"/>
+                                          <p:spTgt spid="5"/>
                                         </p:tgtEl>
                                       </p:cBhvr>
                                     </p:animEffect>
@@ -2025,9 +8607,454 @@
       </p:par>
     </p:tnLst>
     <p:bldLst>
-      <p:bldP spid="3021" grpId="0" animBg="1"/>
+      <p:bldP spid="5" grpId="0" animBg="1"/>
     </p:bldLst>
   </p:timing>
+</p:sld>
+</file>
+
+<file path=ppt/slides/slide9.xml><?xml version="1.0" encoding="utf-8"?>
+<p:sld xmlns:a="http://schemas.openxmlformats.org/drawingml/2006/main" xmlns:p="http://schemas.openxmlformats.org/presentationml/2006/main" xmlns:r="http://schemas.openxmlformats.org/officeDocument/2006/relationships">
+  <p:cSld>
+    <p:spTree>
+      <p:nvGrpSpPr>
+        <p:cNvPr id="1" name=""/>
+        <p:cNvGrpSpPr/>
+        <p:nvPr/>
+      </p:nvGrpSpPr>
+      <p:grpSpPr/>
+      <p:sp>
+        <p:nvSpPr>
+          <p:cNvPr id="2" name="Rectangle 1"/>
+          <p:cNvSpPr/>
+          <p:nvPr/>
+        </p:nvSpPr>
+        <p:spPr>
+          <a:xfrm>
+            <a:off x="0" y="0"/>
+            <a:ext cx="9144000" cy="5143500"/>
+          </a:xfrm>
+          <a:prstGeom prst="rect">
+            <a:avLst/>
+          </a:prstGeom>
+          <a:solidFill>
+            <a:srgbClr val="000000"/>
+          </a:solidFill>
+          <a:ln>
+            <a:noFill/>
+          </a:ln>
+          <a:effectLst/>
+        </p:spPr>
+        <p:style>
+          <a:lnRef idx="1">
+            <a:schemeClr val="accent1"/>
+          </a:lnRef>
+          <a:fillRef idx="3">
+            <a:schemeClr val="accent1"/>
+          </a:fillRef>
+          <a:effectRef idx="2">
+            <a:schemeClr val="accent1"/>
+          </a:effectRef>
+          <a:fontRef idx="minor">
+            <a:schemeClr val="lt1"/>
+          </a:fontRef>
+        </p:style>
+        <p:txBody>
+          <a:bodyPr rtlCol="0" anchor="ctr"/>
+          <a:lstStyle/>
+          <a:p>
+            <a:pPr algn="ctr"/>
+          </a:p>
+        </p:txBody>
+      </p:sp>
+      <p:sp>
+        <p:nvSpPr>
+          <p:cNvPr id="3" name="Rectangle 2"/>
+          <p:cNvSpPr/>
+          <p:nvPr/>
+        </p:nvSpPr>
+        <p:spPr>
+          <a:xfrm>
+            <a:off x="0" y="0"/>
+            <a:ext cx="109728" cy="5143500"/>
+          </a:xfrm>
+          <a:prstGeom prst="rect">
+            <a:avLst/>
+          </a:prstGeom>
+          <a:solidFill>
+            <a:srgbClr val="ED6C23"/>
+          </a:solidFill>
+          <a:ln>
+            <a:noFill/>
+          </a:ln>
+          <a:effectLst/>
+        </p:spPr>
+        <p:style>
+          <a:lnRef idx="1">
+            <a:schemeClr val="accent1"/>
+          </a:lnRef>
+          <a:fillRef idx="3">
+            <a:schemeClr val="accent1"/>
+          </a:fillRef>
+          <a:effectRef idx="2">
+            <a:schemeClr val="accent1"/>
+          </a:effectRef>
+          <a:fontRef idx="minor">
+            <a:schemeClr val="lt1"/>
+          </a:fontRef>
+        </p:style>
+        <p:txBody>
+          <a:bodyPr rtlCol="0" anchor="ctr"/>
+          <a:lstStyle/>
+          <a:p>
+            <a:pPr algn="ctr"/>
+          </a:p>
+        </p:txBody>
+      </p:sp>
+      <p:sp>
+        <p:nvSpPr>
+          <p:cNvPr id="4" name="Rectangle 3"/>
+          <p:cNvSpPr/>
+          <p:nvPr/>
+        </p:nvSpPr>
+        <p:spPr>
+          <a:xfrm>
+            <a:off x="109728" y="5070348"/>
+            <a:ext cx="9034272" cy="73152"/>
+          </a:xfrm>
+          <a:prstGeom prst="rect">
+            <a:avLst/>
+          </a:prstGeom>
+          <a:solidFill>
+            <a:srgbClr val="ED6C23"/>
+          </a:solidFill>
+          <a:ln>
+            <a:noFill/>
+          </a:ln>
+          <a:effectLst/>
+        </p:spPr>
+        <p:style>
+          <a:lnRef idx="1">
+            <a:schemeClr val="accent1"/>
+          </a:lnRef>
+          <a:fillRef idx="3">
+            <a:schemeClr val="accent1"/>
+          </a:fillRef>
+          <a:effectRef idx="2">
+            <a:schemeClr val="accent1"/>
+          </a:effectRef>
+          <a:fontRef idx="minor">
+            <a:schemeClr val="lt1"/>
+          </a:fontRef>
+        </p:style>
+        <p:txBody>
+          <a:bodyPr rtlCol="0" anchor="ctr"/>
+          <a:lstStyle/>
+          <a:p>
+            <a:pPr algn="ctr"/>
+          </a:p>
+        </p:txBody>
+      </p:sp>
+      <p:sp>
+        <p:nvSpPr>
+          <p:cNvPr id="5" name="TextBox 4"/>
+          <p:cNvSpPr txBox="1"/>
+          <p:nvPr/>
+        </p:nvSpPr>
+        <p:spPr>
+          <a:xfrm>
+            <a:off x="411480" y="960120"/>
+            <a:ext cx="8229600" cy="274320"/>
+          </a:xfrm>
+          <a:prstGeom prst="rect">
+            <a:avLst/>
+          </a:prstGeom>
+          <a:noFill/>
+        </p:spPr>
+        <p:txBody>
+          <a:bodyPr wrap="square" lIns="0" rIns="0" tIns="0" bIns="0" anchor="t">
+            <a:spAutoFit/>
+          </a:bodyPr>
+          <a:lstStyle/>
+          <a:p>
+            <a:pPr algn="l"/>
+            <a:r>
+              <a:rPr sz="1300" b="1" i="0">
+                <a:solidFill>
+                  <a:srgbClr val="ED6C23"/>
+                </a:solidFill>
+                <a:latin typeface="Arial"/>
+              </a:rPr>
+              <a:t>EQUIPO PRODUCCIÓN  ·  PLAYMAKER</a:t>
+            </a:r>
+          </a:p>
+        </p:txBody>
+      </p:sp>
+      <p:sp>
+        <p:nvSpPr>
+          <p:cNvPr id="6" name="TextBox 5"/>
+          <p:cNvSpPr txBox="1"/>
+          <p:nvPr/>
+        </p:nvSpPr>
+        <p:spPr>
+          <a:xfrm>
+            <a:off x="411480" y="1325880"/>
+            <a:ext cx="8321040" cy="1371600"/>
+          </a:xfrm>
+          <a:prstGeom prst="rect">
+            <a:avLst/>
+          </a:prstGeom>
+          <a:noFill/>
+        </p:spPr>
+        <p:txBody>
+          <a:bodyPr wrap="square" lIns="0" rIns="0" tIns="0" bIns="0" anchor="t">
+            <a:spAutoFit/>
+          </a:bodyPr>
+          <a:lstStyle/>
+          <a:p>
+            <a:pPr algn="l"/>
+            <a:r>
+              <a:rPr sz="4400" b="1" i="0">
+                <a:solidFill>
+                  <a:srgbClr val="FFFFFF"/>
+                </a:solidFill>
+                <a:latin typeface="Arial"/>
+              </a:rPr>
+              <a:t>¿CÓMO NOS FUE</a:t>
+            </a:r>
+          </a:p>
+          <a:p>
+            <a:pPr algn="l"/>
+            <a:r>
+              <a:rPr sz="4400" b="1" i="0">
+                <a:solidFill>
+                  <a:srgbClr val="FFFFFF"/>
+                </a:solidFill>
+                <a:latin typeface="Arial"/>
+              </a:rPr>
+              <a:t>EN SEPTIEMBRE?</a:t>
+            </a:r>
+          </a:p>
+        </p:txBody>
+      </p:sp>
+      <p:sp>
+        <p:nvSpPr>
+          <p:cNvPr id="7" name="TextBox 6"/>
+          <p:cNvSpPr txBox="1"/>
+          <p:nvPr/>
+        </p:nvSpPr>
+        <p:spPr>
+          <a:xfrm>
+            <a:off x="411480" y="2880360"/>
+            <a:ext cx="8229600" cy="274320"/>
+          </a:xfrm>
+          <a:prstGeom prst="rect">
+            <a:avLst/>
+          </a:prstGeom>
+          <a:noFill/>
+        </p:spPr>
+        <p:txBody>
+          <a:bodyPr wrap="square" lIns="0" rIns="0" tIns="0" bIns="0" anchor="t">
+            <a:spAutoFit/>
+          </a:bodyPr>
+          <a:lstStyle/>
+          <a:p>
+            <a:pPr algn="l"/>
+            <a:r>
+              <a:rPr sz="1300" b="0" i="1">
+                <a:solidFill>
+                  <a:srgbClr val="9A9A9A"/>
+                </a:solidFill>
+                <a:latin typeface="Arial"/>
+              </a:rPr>
+              <a:t>Revisión mensual de calidad de producción</a:t>
+            </a:r>
+          </a:p>
+        </p:txBody>
+      </p:sp>
+      <p:sp>
+        <p:nvSpPr>
+          <p:cNvPr id="8" name="Rectangle 7"/>
+          <p:cNvSpPr/>
+          <p:nvPr/>
+        </p:nvSpPr>
+        <p:spPr>
+          <a:xfrm>
+            <a:off x="411480" y="3383280"/>
+            <a:ext cx="5120640" cy="777240"/>
+          </a:xfrm>
+          <a:prstGeom prst="rect">
+            <a:avLst/>
+          </a:prstGeom>
+          <a:solidFill>
+            <a:srgbClr val="2D2D2D"/>
+          </a:solidFill>
+          <a:ln>
+            <a:noFill/>
+          </a:ln>
+          <a:effectLst/>
+        </p:spPr>
+        <p:style>
+          <a:lnRef idx="1">
+            <a:schemeClr val="accent1"/>
+          </a:lnRef>
+          <a:fillRef idx="3">
+            <a:schemeClr val="accent1"/>
+          </a:fillRef>
+          <a:effectRef idx="2">
+            <a:schemeClr val="accent1"/>
+          </a:effectRef>
+          <a:fontRef idx="minor">
+            <a:schemeClr val="lt1"/>
+          </a:fontRef>
+        </p:style>
+        <p:txBody>
+          <a:bodyPr rtlCol="0" anchor="ctr"/>
+          <a:lstStyle/>
+          <a:p>
+            <a:pPr algn="ctr"/>
+          </a:p>
+        </p:txBody>
+      </p:sp>
+      <p:sp>
+        <p:nvSpPr>
+          <p:cNvPr id="9" name="TextBox 8"/>
+          <p:cNvSpPr txBox="1"/>
+          <p:nvPr/>
+        </p:nvSpPr>
+        <p:spPr>
+          <a:xfrm>
+            <a:off x="594360" y="3493008"/>
+            <a:ext cx="4846320" cy="594360"/>
+          </a:xfrm>
+          <a:prstGeom prst="rect">
+            <a:avLst/>
+          </a:prstGeom>
+          <a:noFill/>
+        </p:spPr>
+        <p:txBody>
+          <a:bodyPr wrap="square" lIns="0" rIns="0" tIns="0" bIns="0" anchor="t">
+            <a:spAutoFit/>
+          </a:bodyPr>
+          <a:lstStyle/>
+          <a:p>
+            <a:pPr algn="l">
+              <a:spcAft>
+                <a:spcPts val="400"/>
+              </a:spcAft>
+            </a:pPr>
+            <a:r>
+              <a:rPr sz="1100" b="0" i="0">
+                <a:solidFill>
+                  <a:srgbClr val="D0D0D0"/>
+                </a:solidFill>
+                <a:latin typeface="Arial"/>
+              </a:rPr>
+              <a:t>Hoy:  qué medimos  →  cómo venimos  →  qué pasó en septiembre</a:t>
+            </a:r>
+          </a:p>
+          <a:p>
+            <a:pPr algn="l">
+              <a:spcAft>
+                <a:spcPts val="400"/>
+              </a:spcAft>
+            </a:pPr>
+            <a:r>
+              <a:rPr sz="1100" b="0" i="0">
+                <a:solidFill>
+                  <a:srgbClr val="D0D0D0"/>
+                </a:solidFill>
+                <a:latin typeface="Arial"/>
+              </a:rPr>
+              <a:t>y al final, </a:t>
+            </a:r>
+            <a:r>
+              <a:rPr sz="1100" b="1" i="0">
+                <a:solidFill>
+                  <a:srgbClr val="ED6C23"/>
+                </a:solidFill>
+                <a:latin typeface="Arial"/>
+              </a:rPr>
+              <a:t>el resultado.</a:t>
+            </a:r>
+          </a:p>
+        </p:txBody>
+      </p:sp>
+      <p:sp>
+        <p:nvSpPr>
+          <p:cNvPr id="10" name="TextBox 9"/>
+          <p:cNvSpPr txBox="1"/>
+          <p:nvPr/>
+        </p:nvSpPr>
+        <p:spPr>
+          <a:xfrm>
+            <a:off x="6035040" y="4526280"/>
+            <a:ext cx="2743200" cy="228600"/>
+          </a:xfrm>
+          <a:prstGeom prst="rect">
+            <a:avLst/>
+          </a:prstGeom>
+          <a:noFill/>
+        </p:spPr>
+        <p:txBody>
+          <a:bodyPr wrap="square" lIns="0" rIns="0" tIns="0" bIns="0" anchor="t">
+            <a:spAutoFit/>
+          </a:bodyPr>
+          <a:lstStyle/>
+          <a:p>
+            <a:pPr algn="r"/>
+            <a:r>
+              <a:rPr sz="900" b="1" i="0">
+                <a:solidFill>
+                  <a:srgbClr val="ED6C23"/>
+                </a:solidFill>
+                <a:latin typeface="Arial"/>
+              </a:rPr>
+              <a:t>UN CLUB, UNA FAMILIA</a:t>
+            </a:r>
+          </a:p>
+        </p:txBody>
+      </p:sp>
+      <p:sp>
+        <p:nvSpPr>
+          <p:cNvPr id="11" name="TextBox 10"/>
+          <p:cNvSpPr txBox="1"/>
+          <p:nvPr/>
+        </p:nvSpPr>
+        <p:spPr>
+          <a:xfrm>
+            <a:off x="6035040" y="4754880"/>
+            <a:ext cx="2743200" cy="201168"/>
+          </a:xfrm>
+          <a:prstGeom prst="rect">
+            <a:avLst/>
+          </a:prstGeom>
+          <a:noFill/>
+        </p:spPr>
+        <p:txBody>
+          <a:bodyPr wrap="square" lIns="0" rIns="0" tIns="0" bIns="0" anchor="t">
+            <a:spAutoFit/>
+          </a:bodyPr>
+          <a:lstStyle/>
+          <a:p>
+            <a:pPr algn="r"/>
+            <a:r>
+              <a:rPr sz="850" b="0" i="1">
+                <a:solidFill>
+                  <a:srgbClr val="9A9A9A"/>
+                </a:solidFill>
+                <a:latin typeface="Arial"/>
+              </a:rPr>
+              <a:t>www.playmaker.cl</a:t>
+            </a:r>
+          </a:p>
+        </p:txBody>
+      </p:sp>
+    </p:spTree>
+  </p:cSld>
+  <p:clrMapOvr>
+    <a:masterClrMapping/>
+  </p:clrMapOvr>
 </p:sld>
 </file>
 
